--- a/03-build/pptx/C5_U8_docente.pptx
+++ b/03-build/pptx/C5_U8_docente.pptx
@@ -6650,7 +6650,6 @@
               <a:srgbClr val="E4E3DE"/>
             </a:solidFill>
           </a:ln>
-          <a:effectLst/>
           <a:effectLst>
             <a:outerShdw blurRad="90000" dist="38000" dir="5400000" rotWithShape="0">
               <a:srgbClr val="20242E">
@@ -6884,7 +6883,6 @@
               <a:srgbClr val="E4E3DE"/>
             </a:solidFill>
           </a:ln>
-          <a:effectLst/>
           <a:effectLst>
             <a:outerShdw blurRad="90000" dist="38000" dir="5400000" rotWithShape="0">
               <a:srgbClr val="20242E">
@@ -7118,7 +7116,6 @@
               <a:srgbClr val="E4E3DE"/>
             </a:solidFill>
           </a:ln>
-          <a:effectLst/>
           <a:effectLst>
             <a:outerShdw blurRad="90000" dist="38000" dir="5400000" rotWithShape="0">
               <a:srgbClr val="20242E">
@@ -7352,7 +7349,6 @@
               <a:srgbClr val="E4E3DE"/>
             </a:solidFill>
           </a:ln>
-          <a:effectLst/>
           <a:effectLst>
             <a:outerShdw blurRad="90000" dist="38000" dir="5400000" rotWithShape="0">
               <a:srgbClr val="20242E">
@@ -8833,7 +8829,6 @@
               <a:srgbClr val="1E9E74"/>
             </a:solidFill>
           </a:ln>
-          <a:effectLst/>
           <a:effectLst>
             <a:outerShdw blurRad="90000" dist="38000" dir="5400000" rotWithShape="0">
               <a:srgbClr val="20242E">
@@ -8978,7 +8973,6 @@
               <a:srgbClr val="1E9E74"/>
             </a:solidFill>
           </a:ln>
-          <a:effectLst/>
           <a:effectLst>
             <a:outerShdw blurRad="90000" dist="38000" dir="5400000" rotWithShape="0">
               <a:srgbClr val="20242E">
@@ -9123,7 +9117,6 @@
               <a:srgbClr val="1E9E74"/>
             </a:solidFill>
           </a:ln>
-          <a:effectLst/>
           <a:effectLst>
             <a:outerShdw blurRad="90000" dist="38000" dir="5400000" rotWithShape="0">
               <a:srgbClr val="20242E">
@@ -9268,7 +9261,6 @@
               <a:srgbClr val="1E9E74"/>
             </a:solidFill>
           </a:ln>
-          <a:effectLst/>
           <a:effectLst>
             <a:outerShdw blurRad="90000" dist="38000" dir="5400000" rotWithShape="0">
               <a:srgbClr val="20242E">
@@ -9413,7 +9405,6 @@
               <a:srgbClr val="1E9E74"/>
             </a:solidFill>
           </a:ln>
-          <a:effectLst/>
           <a:effectLst>
             <a:outerShdw blurRad="90000" dist="38000" dir="5400000" rotWithShape="0">
               <a:srgbClr val="20242E">
@@ -9558,7 +9549,6 @@
               <a:srgbClr val="1E9E74"/>
             </a:solidFill>
           </a:ln>
-          <a:effectLst/>
           <a:effectLst>
             <a:outerShdw blurRad="90000" dist="38000" dir="5400000" rotWithShape="0">
               <a:srgbClr val="20242E">
@@ -13116,7 +13106,6 @@
               <a:srgbClr val="E4E3DE"/>
             </a:solidFill>
           </a:ln>
-          <a:effectLst/>
           <a:effectLst>
             <a:outerShdw blurRad="90000" dist="38000" dir="5400000" rotWithShape="0">
               <a:srgbClr val="20242E">
@@ -13849,7 +13838,6 @@
               <a:srgbClr val="1E9E74"/>
             </a:solidFill>
           </a:ln>
-          <a:effectLst/>
           <a:effectLst>
             <a:outerShdw blurRad="90000" dist="38000" dir="5400000" rotWithShape="0">
               <a:srgbClr val="20242E">
@@ -20776,7 +20764,6 @@
               <a:srgbClr val="1E9E74"/>
             </a:solidFill>
           </a:ln>
-          <a:effectLst/>
           <a:effectLst>
             <a:outerShdw blurRad="90000" dist="38000" dir="5400000" rotWithShape="0">
               <a:srgbClr val="20242E">
@@ -21010,7 +20997,6 @@
               <a:srgbClr val="1E9E74"/>
             </a:solidFill>
           </a:ln>
-          <a:effectLst/>
           <a:effectLst>
             <a:outerShdw blurRad="90000" dist="38000" dir="5400000" rotWithShape="0">
               <a:srgbClr val="20242E">
@@ -21244,7 +21230,6 @@
               <a:srgbClr val="1E9E74"/>
             </a:solidFill>
           </a:ln>
-          <a:effectLst/>
           <a:effectLst>
             <a:outerShdw blurRad="90000" dist="38000" dir="5400000" rotWithShape="0">
               <a:srgbClr val="20242E">
@@ -28781,7 +28766,6 @@
               <a:srgbClr val="1E9E74"/>
             </a:solidFill>
           </a:ln>
-          <a:effectLst/>
           <a:effectLst>
             <a:outerShdw blurRad="90000" dist="38000" dir="5400000" rotWithShape="0">
               <a:srgbClr val="20242E">
@@ -29084,7 +29068,6 @@
               <a:srgbClr val="1E9E74"/>
             </a:solidFill>
           </a:ln>
-          <a:effectLst/>
           <a:effectLst>
             <a:outerShdw blurRad="90000" dist="38000" dir="5400000" rotWithShape="0">
               <a:srgbClr val="20242E">
@@ -29387,7 +29370,6 @@
               <a:srgbClr val="1E9E74"/>
             </a:solidFill>
           </a:ln>
-          <a:effectLst/>
           <a:effectLst>
             <a:outerShdw blurRad="90000" dist="38000" dir="5400000" rotWithShape="0">
               <a:srgbClr val="20242E">
@@ -29690,7 +29672,6 @@
               <a:srgbClr val="1E9E74"/>
             </a:solidFill>
           </a:ln>
-          <a:effectLst/>
           <a:effectLst>
             <a:outerShdw blurRad="90000" dist="38000" dir="5400000" rotWithShape="0">
               <a:srgbClr val="20242E">
@@ -29993,7 +29974,6 @@
               <a:srgbClr val="1E9E74"/>
             </a:solidFill>
           </a:ln>
-          <a:effectLst/>
           <a:effectLst>
             <a:outerShdw blurRad="90000" dist="38000" dir="5400000" rotWithShape="0">
               <a:srgbClr val="20242E">
@@ -30296,7 +30276,6 @@
               <a:srgbClr val="157355"/>
             </a:solidFill>
           </a:ln>
-          <a:effectLst/>
           <a:effectLst>
             <a:outerShdw blurRad="90000" dist="38000" dir="5400000" rotWithShape="0">
               <a:srgbClr val="20242E">
@@ -30599,7 +30578,6 @@
               <a:srgbClr val="157355"/>
             </a:solidFill>
           </a:ln>
-          <a:effectLst/>
           <a:effectLst>
             <a:outerShdw blurRad="90000" dist="38000" dir="5400000" rotWithShape="0">
               <a:srgbClr val="20242E">
@@ -30902,7 +30880,6 @@
               <a:srgbClr val="157355"/>
             </a:solidFill>
           </a:ln>
-          <a:effectLst/>
           <a:effectLst>
             <a:outerShdw blurRad="90000" dist="38000" dir="5400000" rotWithShape="0">
               <a:srgbClr val="20242E">
@@ -31729,7 +31706,6 @@
           <a:ln>
             <a:noFill/>
           </a:ln>
-          <a:effectLst/>
           <a:effectLst>
             <a:outerShdw blurRad="90000" dist="38000" dir="5400000" rotWithShape="0">
               <a:srgbClr val="20242E">
@@ -33442,7 +33418,6 @@
           <a:ln>
             <a:noFill/>
           </a:ln>
-          <a:effectLst/>
           <a:effectLst>
             <a:outerShdw blurRad="90000" dist="38000" dir="5400000" rotWithShape="0">
               <a:srgbClr val="20242E">
@@ -33585,7 +33560,6 @@
           <a:ln>
             <a:noFill/>
           </a:ln>
-          <a:effectLst/>
           <a:effectLst>
             <a:outerShdw blurRad="90000" dist="38000" dir="5400000" rotWithShape="0">
               <a:srgbClr val="20242E">
@@ -33728,7 +33702,6 @@
           <a:ln>
             <a:noFill/>
           </a:ln>
-          <a:effectLst/>
           <a:effectLst>
             <a:outerShdw blurRad="90000" dist="38000" dir="5400000" rotWithShape="0">
               <a:srgbClr val="20242E">
@@ -33871,7 +33844,6 @@
           <a:ln>
             <a:noFill/>
           </a:ln>
-          <a:effectLst/>
           <a:effectLst>
             <a:outerShdw blurRad="90000" dist="38000" dir="5400000" rotWithShape="0">
               <a:srgbClr val="20242E">
@@ -34014,7 +33986,6 @@
           <a:ln>
             <a:noFill/>
           </a:ln>
-          <a:effectLst/>
           <a:effectLst>
             <a:outerShdw blurRad="90000" dist="38000" dir="5400000" rotWithShape="0">
               <a:srgbClr val="20242E">
@@ -38265,7 +38236,6 @@
           <a:ln>
             <a:noFill/>
           </a:ln>
-          <a:effectLst/>
           <a:effectLst>
             <a:outerShdw blurRad="90000" dist="38000" dir="5400000" rotWithShape="0">
               <a:srgbClr val="20242E">
@@ -42540,7 +42510,6 @@
               <a:srgbClr val="1E9E74"/>
             </a:solidFill>
           </a:ln>
-          <a:effectLst/>
           <a:effectLst>
             <a:outerShdw blurRad="90000" dist="38000" dir="5400000" rotWithShape="0">
               <a:srgbClr val="20242E">
@@ -42685,7 +42654,6 @@
               <a:srgbClr val="1E9E74"/>
             </a:solidFill>
           </a:ln>
-          <a:effectLst/>
           <a:effectLst>
             <a:outerShdw blurRad="90000" dist="38000" dir="5400000" rotWithShape="0">
               <a:srgbClr val="20242E">
@@ -42830,7 +42798,6 @@
               <a:srgbClr val="1E9E74"/>
             </a:solidFill>
           </a:ln>
-          <a:effectLst/>
           <a:effectLst>
             <a:outerShdw blurRad="90000" dist="38000" dir="5400000" rotWithShape="0">
               <a:srgbClr val="20242E">
@@ -42975,7 +42942,6 @@
               <a:srgbClr val="DC2626"/>
             </a:solidFill>
           </a:ln>
-          <a:effectLst/>
           <a:effectLst>
             <a:outerShdw blurRad="90000" dist="38000" dir="5400000" rotWithShape="0">
               <a:srgbClr val="20242E">
@@ -43120,7 +43086,6 @@
               <a:srgbClr val="DC2626"/>
             </a:solidFill>
           </a:ln>
-          <a:effectLst/>
           <a:effectLst>
             <a:outerShdw blurRad="90000" dist="38000" dir="5400000" rotWithShape="0">
               <a:srgbClr val="20242E">
@@ -43265,7 +43230,6 @@
               <a:srgbClr val="DC2626"/>
             </a:solidFill>
           </a:ln>
-          <a:effectLst/>
           <a:effectLst>
             <a:outerShdw blurRad="90000" dist="38000" dir="5400000" rotWithShape="0">
               <a:srgbClr val="20242E">
@@ -43410,7 +43374,6 @@
               <a:srgbClr val="DC2626"/>
             </a:solidFill>
           </a:ln>
-          <a:effectLst/>
           <a:effectLst>
             <a:outerShdw blurRad="90000" dist="38000" dir="5400000" rotWithShape="0">
               <a:srgbClr val="20242E">
@@ -43555,7 +43518,6 @@
               <a:srgbClr val="DC2626"/>
             </a:solidFill>
           </a:ln>
-          <a:effectLst/>
           <a:effectLst>
             <a:outerShdw blurRad="90000" dist="38000" dir="5400000" rotWithShape="0">
               <a:srgbClr val="20242E">
@@ -43700,7 +43662,6 @@
               <a:srgbClr val="DC2626"/>
             </a:solidFill>
           </a:ln>
-          <a:effectLst/>
           <a:effectLst>
             <a:outerShdw blurRad="90000" dist="38000" dir="5400000" rotWithShape="0">
               <a:srgbClr val="20242E">
@@ -45344,7 +45305,6 @@
               <a:srgbClr val="1E9E74"/>
             </a:solidFill>
           </a:ln>
-          <a:effectLst/>
           <a:effectLst>
             <a:outerShdw blurRad="90000" dist="38000" dir="5400000" rotWithShape="0">
               <a:srgbClr val="20242E">
@@ -45499,7 +45459,6 @@
               <a:srgbClr val="B7860B"/>
             </a:solidFill>
           </a:ln>
-          <a:effectLst/>
           <a:effectLst>
             <a:outerShdw blurRad="90000" dist="38000" dir="5400000" rotWithShape="0">
               <a:srgbClr val="20242E">
@@ -45654,7 +45613,6 @@
               <a:srgbClr val="1E9E74"/>
             </a:solidFill>
           </a:ln>
-          <a:effectLst/>
           <a:effectLst>
             <a:outerShdw blurRad="90000" dist="38000" dir="5400000" rotWithShape="0">
               <a:srgbClr val="20242E">
@@ -45809,7 +45767,6 @@
               <a:srgbClr val="B7860B"/>
             </a:solidFill>
           </a:ln>
-          <a:effectLst/>
           <a:effectLst>
             <a:outerShdw blurRad="90000" dist="38000" dir="5400000" rotWithShape="0">
               <a:srgbClr val="20242E">
@@ -45964,7 +45921,6 @@
               <a:srgbClr val="1E9E74"/>
             </a:solidFill>
           </a:ln>
-          <a:effectLst/>
           <a:effectLst>
             <a:outerShdw blurRad="90000" dist="38000" dir="5400000" rotWithShape="0">
               <a:srgbClr val="20242E">
@@ -46119,7 +46075,6 @@
               <a:srgbClr val="B7860B"/>
             </a:solidFill>
           </a:ln>
-          <a:effectLst/>
           <a:effectLst>
             <a:outerShdw blurRad="90000" dist="38000" dir="5400000" rotWithShape="0">
               <a:srgbClr val="20242E">
@@ -49818,7 +49773,6 @@
               <a:srgbClr val="1E9E74"/>
             </a:solidFill>
           </a:ln>
-          <a:effectLst/>
           <a:effectLst>
             <a:outerShdw blurRad="90000" dist="38000" dir="5400000" rotWithShape="0">
               <a:srgbClr val="20242E">

--- a/03-build/pptx/C5_U8_docente.pptx
+++ b/03-build/pptx/C5_U8_docente.pptx
@@ -11,6 +11,9 @@
     <p:sldId id="259" r:id="rId11"/>
     <p:sldId id="260" r:id="rId12"/>
     <p:sldId id="261" r:id="rId13"/>
+    <p:sldId id="277" r:id="rId29"/>
+    <p:sldId id="278" r:id="rId30"/>
+    <p:sldId id="279" r:id="rId31"/>
     <p:sldId id="262" r:id="rId14"/>
     <p:sldId id="263" r:id="rId15"/>
     <p:sldId id="264" r:id="rId16"/>
@@ -1551,6 +1554,255 @@
           </p:nvPr>
         </p:nvSpPr>
         <p:spPr/>
+      </p:sp>
+    </p:spTree>
+  </p:cSld>
+  <p:clrMapOvr>
+    <a:masterClrMapping/>
+  </p:clrMapOvr>
+</p:notes>
+</file>
+
+<file path=ppt/notesSlides/notesSlide22.xml><?xml version="1.0" encoding="utf-8"?>
+<p:notes xmlns:a="http://schemas.openxmlformats.org/drawingml/2006/main" xmlns:p="http://schemas.openxmlformats.org/presentationml/2006/main" xmlns:r="http://schemas.openxmlformats.org/officeDocument/2006/relationships">
+  <p:cSld>
+    <p:spTree>
+      <p:nvGrpSpPr>
+        <p:cNvPr id="1" name=""/>
+        <p:cNvGrpSpPr/>
+        <p:nvPr/>
+      </p:nvGrpSpPr>
+      <p:grpSpPr>
+        <a:xfrm>
+          <a:off x="0" y="0"/>
+          <a:ext cx="0" cy="0"/>
+          <a:chOff x="0" y="0"/>
+          <a:chExt cx="0" cy="0"/>
+        </a:xfrm>
+      </p:grpSpPr>
+      <p:sp>
+        <p:nvSpPr>
+          <p:cNvPr id="2" name="Slide Image Placeholder 1"/>
+          <p:cNvSpPr>
+            <a:spLocks noGrp="1"/>
+          </p:cNvSpPr>
+          <p:nvPr>
+            <p:ph type="sldImg" idx="2"/>
+          </p:nvPr>
+        </p:nvSpPr>
+        <p:spPr/>
+      </p:sp>
+      <p:sp>
+        <p:nvSpPr>
+          <p:cNvPr id="3" name="Notes Placeholder 2"/>
+          <p:cNvSpPr>
+            <a:spLocks noGrp="1"/>
+          </p:cNvSpPr>
+          <p:nvPr>
+            <p:ph type="body" idx="3" sz="quarter"/>
+          </p:nvPr>
+        </p:nvSpPr>
+        <p:spPr/>
+        <p:txBody>
+          <a:bodyPr/>
+          <a:lstStyle/>
+          <a:p>
+            <a:r>
+              <a:t>RETO 2 · Nunca he… — 🔓 puzzel &amp; escape</a:t>
+            </a:r>
+          </a:p>
+          <a:p>
+            <a:r>
+              <a:t>OPDRACHT: Zeg iets wat jij nooit gedaan hebt maar waarvan je denkt dat anderen het wél deden.</a:t>
+            </a:r>
+          </a:p>
+          <a:p>
+            <a:r>
+              <a:t>DE REGEL: Elke bewering begint met «Nunca he» plus een participium — en je moet zelf verliezen als je liegt. Wie een zin zonder perfecto zegt, verliest ook een vinger.</a:t>
+            </a:r>
+          </a:p>
+          <a:p>
+            <a:r>
+              <a:t>VERLOOP: Todos con cinco dedos arriba. | Por turnos: «Nunca he …». | Quien sí lo ha hecho, baja un dedo y lo cuenta en una frase. | Gana quien queda con dedos. Y la clase apunta los participios nuevos.</a:t>
+            </a:r>
+          </a:p>
+          <a:p>
+            <a:r>
+              <a:t>SLEUTEL: De negen aanzetten dekken samen zeven onregelmatige participia (visto, roto, dicho, escrito, vuelto, hecho, puesto). Het spel is dus een verkapte drill.  ||  «Yo sí: he …» is verplicht bij het zakken van een vinger — anders wordt het een spel zonder taal. Dat is de belangrijkste spelregel om te bewaken.  ||  Houd de beweringen onschuldig: dit is een klasspel, geen biecht. De lijst «seguras» geeft veilige voorbeelden voor wie niets bedenkt.</a:t>
+            </a:r>
+          </a:p>
+          <a:p>
+            <a:r>
+              <a:t>NOTA: Speel twee rondes: in de tweede mag niemand een werkwoord herhalen dat al gevallen is. Daar begint de echte woordenschat.</a:t>
+            </a:r>
+          </a:p>
+        </p:txBody>
+      </p:sp>
+    </p:spTree>
+  </p:cSld>
+  <p:clrMapOvr>
+    <a:masterClrMapping/>
+  </p:clrMapOvr>
+</p:notes>
+</file>
+
+<file path=ppt/notesSlides/notesSlide23.xml><?xml version="1.0" encoding="utf-8"?>
+<p:notes xmlns:a="http://schemas.openxmlformats.org/drawingml/2006/main" xmlns:p="http://schemas.openxmlformats.org/presentationml/2006/main" xmlns:r="http://schemas.openxmlformats.org/officeDocument/2006/relationships">
+  <p:cSld>
+    <p:spTree>
+      <p:nvGrpSpPr>
+        <p:cNvPr id="1" name=""/>
+        <p:cNvGrpSpPr/>
+        <p:nvPr/>
+      </p:nvGrpSpPr>
+      <p:grpSpPr>
+        <a:xfrm>
+          <a:off x="0" y="0"/>
+          <a:ext cx="0" cy="0"/>
+          <a:chOff x="0" y="0"/>
+          <a:chExt cx="0" cy="0"/>
+        </a:xfrm>
+      </p:grpSpPr>
+      <p:sp>
+        <p:nvSpPr>
+          <p:cNvPr id="2" name="Slide Image Placeholder 1"/>
+          <p:cNvSpPr>
+            <a:spLocks noGrp="1"/>
+          </p:cNvSpPr>
+          <p:nvPr>
+            <p:ph type="sldImg" idx="2"/>
+          </p:nvPr>
+        </p:nvSpPr>
+        <p:spPr/>
+      </p:sp>
+      <p:sp>
+        <p:nvSpPr>
+          <p:cNvPr id="3" name="Notes Placeholder 2"/>
+          <p:cNvSpPr>
+            <a:spLocks noGrp="1"/>
+          </p:cNvSpPr>
+          <p:nvPr>
+            <p:ph type="body" idx="3" sz="quarter"/>
+          </p:nvPr>
+        </p:nvSpPr>
+        <p:spPr/>
+        <p:txBody>
+          <a:bodyPr/>
+          <a:lstStyle/>
+          <a:p>
+            <a:r>
+              <a:t>RETO 6 · La entrevista al guía — 🎭 simulatie met beperking</a:t>
+            </a:r>
+          </a:p>
+          <a:p>
+            <a:r>
+              <a:t>OPDRACHT: Bereid vijf perfecto-vragen voor, luister en vat samen wat er veranderd is.</a:t>
+            </a:r>
+          </a:p>
+          <a:p>
+            <a:r>
+              <a:t>DE REGEL: Alle vijf de vragen staan in het perfecto compuesto en mogen niet met ja of nee te beantwoorden zijn. Een vraag die «sí» oplevert, telt niet mee.</a:t>
+            </a:r>
+          </a:p>
+          <a:p>
+            <a:r>
+              <a:t>VERLOOP: En grupo: escribid cinco preguntas en perfecto. | Comprobad: ninguna se contesta con sí o no. | Escuchad la entrevista y anotad las respuestas. | Resumid en tres frases qué ha cambiado en treinta años.</a:t>
+            </a:r>
+          </a:p>
+          <a:p>
+            <a:r>
+              <a:t>SLEUTEL: De vier «cerradas» in de data zijn expres gesloten vragen: ze staan correct in het perfecto en leveren toch niets op. Laat de klas ze eerst herformuleren.  ||  «¿Cuántas veces ha subido usted?» is de brug tussen §2 en §3: perfecto plus telbaarheid.  ||  De samenvatting moet de tweeslag bevatten: er is iets beter geworden (lokale gidsen, betere lonen) én iets slechter (afval, drukte). Wie maar één kant noemt, heeft het interview half gehoord.</a:t>
+            </a:r>
+          </a:p>
+          <a:p>
+            <a:r>
+              <a:t>NOTA: Rosa Quispe is een samengesteld personage op basis van hoe het Camino Inca geregeld is; geen echte persoon.</a:t>
+            </a:r>
+          </a:p>
+        </p:txBody>
+      </p:sp>
+    </p:spTree>
+  </p:cSld>
+  <p:clrMapOvr>
+    <a:masterClrMapping/>
+  </p:clrMapOvr>
+</p:notes>
+</file>
+
+<file path=ppt/notesSlides/notesSlide24.xml><?xml version="1.0" encoding="utf-8"?>
+<p:notes xmlns:a="http://schemas.openxmlformats.org/drawingml/2006/main" xmlns:p="http://schemas.openxmlformats.org/presentationml/2006/main" xmlns:r="http://schemas.openxmlformats.org/officeDocument/2006/relationships">
+  <p:cSld>
+    <p:spTree>
+      <p:nvGrpSpPr>
+        <p:cNvPr id="1" name=""/>
+        <p:cNvGrpSpPr/>
+        <p:nvPr/>
+      </p:nvGrpSpPr>
+      <p:grpSpPr>
+        <a:xfrm>
+          <a:off x="0" y="0"/>
+          <a:ext cx="0" cy="0"/>
+          <a:chOff x="0" y="0"/>
+          <a:chExt cx="0" cy="0"/>
+        </a:xfrm>
+      </p:grpSpPr>
+      <p:sp>
+        <p:nvSpPr>
+          <p:cNvPr id="2" name="Slide Image Placeholder 1"/>
+          <p:cNvSpPr>
+            <a:spLocks noGrp="1"/>
+          </p:cNvSpPr>
+          <p:nvPr>
+            <p:ph type="sldImg" idx="2"/>
+          </p:nvPr>
+        </p:nvSpPr>
+        <p:spPr/>
+      </p:sp>
+      <p:sp>
+        <p:nvSpPr>
+          <p:cNvPr id="3" name="Notes Placeholder 2"/>
+          <p:cNvSpPr>
+            <a:spLocks noGrp="1"/>
+          </p:cNvSpPr>
+          <p:nvPr>
+            <p:ph type="body" idx="3" sz="quarter"/>
+          </p:nvPr>
+        </p:nvSpPr>
+        <p:spPr/>
+        <p:txBody>
+          <a:bodyPr/>
+          <a:lstStyle/>
+          <a:p>
+            <a:r>
+              <a:t>RETO 7 · El clima que decide — ⚖️ onderhandeling &amp; dilemma</a:t>
+            </a:r>
+          </a:p>
+          <a:p>
+            <a:r>
+              <a:t>OPDRACHT: Beslis samen op welke dag jullie vertrekken en verdedig het met het weer.</a:t>
+            </a:r>
+          </a:p>
+          <a:p>
+            <a:r>
+              <a:t>DE REGEL: Elke stem wordt verantwoord met een weerdetail én een gevolg («si llueve, el camino…»). Een stem zonder weerreden telt niet mee.</a:t>
+            </a:r>
+          </a:p>
+          <a:p>
+            <a:r>
+              <a:t>VERLOOP: Leed los tres pronósticos. | Cada uno defiende un día. Con el tiempo, no con el gusto. | Negociad hasta que haya mayoría. | Escribid la decisión en una frase, con la razón.</a:t>
+            </a:r>
+          </a:p>
+          <a:p>
+            <a:r>
+              <a:t>SLEUTEL: Er is geen juiste dag: donderdag is mooi maar gevaarlijk na drieën, vrijdag is veilig maar koud, zaterdag is perfect én overvol. Elk antwoord is verdedigbaar.  ||  De sterkste argumenten koppelen weer aan gevolg: niet «llueve» maar «si llueve, el camino de piedra resbala». Dat is precies de conditionele zin met si + presente, die in C5 wél mag.  ||  Toets de verantwoording, niet de keuze. Een groep die unaniem zaterdag kiest zonder de drukte te noemen, heeft de tabel niet gelezen.</a:t>
+            </a:r>
+          </a:p>
+          <a:p>
+            <a:r>
+              <a:t>NOTA: Werkt ook als stemming met de voeten: drie hoeken in het lokaal, en verhuizen mag alleen ná een argument in het Spaans.</a:t>
+            </a:r>
+          </a:p>
+        </p:txBody>
       </p:sp>
     </p:spTree>
   </p:cSld>
@@ -34299,6 +34551,6005 @@
   <p:clrMapOvr>
     <a:masterClrMapping/>
   </p:clrMapOvr>
+</p:sld>
+</file>
+
+<file path=ppt/slides/slide22.xml><?xml version="1.0" encoding="utf-8"?>
+<p:sld xmlns:a="http://schemas.openxmlformats.org/drawingml/2006/main" xmlns:p="http://schemas.openxmlformats.org/presentationml/2006/main" xmlns:r="http://schemas.openxmlformats.org/officeDocument/2006/relationships">
+  <p:cSld>
+    <p:spTree>
+      <p:nvGrpSpPr>
+        <p:cNvPr id="1" name=""/>
+        <p:cNvGrpSpPr/>
+        <p:nvPr/>
+      </p:nvGrpSpPr>
+      <p:grpSpPr/>
+      <p:sp>
+        <p:nvSpPr>
+          <p:cNvPr id="2" name="Fondo"/>
+          <p:cNvSpPr/>
+          <p:nvPr/>
+        </p:nvSpPr>
+        <p:spPr>
+          <a:xfrm>
+            <a:off x="0" y="0"/>
+            <a:ext cx="12191695" cy="6858000"/>
+          </a:xfrm>
+          <a:prstGeom prst="rect">
+            <a:avLst/>
+          </a:prstGeom>
+          <a:solidFill>
+            <a:srgbClr val="FCFBF8"/>
+          </a:solidFill>
+          <a:ln>
+            <a:noFill/>
+          </a:ln>
+          <a:effectLst/>
+        </p:spPr>
+        <p:style>
+          <a:lnRef idx="1">
+            <a:schemeClr val="accent1"/>
+          </a:lnRef>
+          <a:fillRef idx="3">
+            <a:schemeClr val="accent1"/>
+          </a:fillRef>
+          <a:effectRef idx="2">
+            <a:schemeClr val="accent1"/>
+          </a:effectRef>
+          <a:fontRef idx="minor">
+            <a:schemeClr val="lt1"/>
+          </a:fontRef>
+        </p:style>
+        <p:txBody>
+          <a:bodyPr rtlCol="0" anchor="ctr"/>
+          <a:lstStyle/>
+          <a:p/>
+        </p:txBody>
+      </p:sp>
+      <p:sp>
+        <p:nvSpPr>
+          <p:cNvPr id="3" name="Cabecera"/>
+          <p:cNvSpPr/>
+          <p:nvPr/>
+        </p:nvSpPr>
+        <p:spPr>
+          <a:xfrm>
+            <a:off x="0" y="0"/>
+            <a:ext cx="12191695" cy="1078992"/>
+          </a:xfrm>
+          <a:prstGeom prst="rect">
+            <a:avLst/>
+          </a:prstGeom>
+          <a:solidFill>
+            <a:srgbClr val="1E9E74"/>
+          </a:solidFill>
+          <a:ln>
+            <a:noFill/>
+          </a:ln>
+          <a:effectLst/>
+        </p:spPr>
+        <p:style>
+          <a:lnRef idx="1">
+            <a:schemeClr val="accent1"/>
+          </a:lnRef>
+          <a:fillRef idx="3">
+            <a:schemeClr val="accent1"/>
+          </a:fillRef>
+          <a:effectRef idx="2">
+            <a:schemeClr val="accent1"/>
+          </a:effectRef>
+          <a:fontRef idx="minor">
+            <a:schemeClr val="lt1"/>
+          </a:fontRef>
+        </p:style>
+        <p:txBody>
+          <a:bodyPr rtlCol="0" anchor="ctr"/>
+          <a:lstStyle/>
+          <a:p/>
+        </p:txBody>
+      </p:sp>
+      <p:sp>
+        <p:nvSpPr>
+          <p:cNvPr id="4" name="Chip"/>
+          <p:cNvSpPr/>
+          <p:nvPr/>
+        </p:nvSpPr>
+        <p:spPr>
+          <a:xfrm>
+            <a:off x="457200" y="182880"/>
+            <a:ext cx="3017520" cy="292608"/>
+          </a:xfrm>
+          <a:prstGeom prst="roundRect">
+            <a:avLst>
+              <a:gd name="adj" fmla="val 50000"/>
+            </a:avLst>
+          </a:prstGeom>
+          <a:solidFill>
+            <a:srgbClr val="FFFFFF"/>
+          </a:solidFill>
+          <a:ln>
+            <a:noFill/>
+          </a:ln>
+          <a:effectLst/>
+        </p:spPr>
+        <p:style>
+          <a:lnRef idx="1">
+            <a:schemeClr val="accent1"/>
+          </a:lnRef>
+          <a:fillRef idx="3">
+            <a:schemeClr val="accent1"/>
+          </a:fillRef>
+          <a:effectRef idx="2">
+            <a:schemeClr val="accent1"/>
+          </a:effectRef>
+          <a:fontRef idx="minor">
+            <a:schemeClr val="lt1"/>
+          </a:fontRef>
+        </p:style>
+        <p:txBody>
+          <a:bodyPr rtlCol="0" anchor="ctr"/>
+          <a:lstStyle/>
+          <a:p/>
+        </p:txBody>
+      </p:sp>
+      <p:sp>
+        <p:nvSpPr>
+          <p:cNvPr id="5" name="ChipTxt"/>
+          <p:cNvSpPr txBox="1"/>
+          <p:nvPr/>
+        </p:nvSpPr>
+        <p:spPr>
+          <a:xfrm>
+            <a:off x="457200" y="173736"/>
+            <a:ext cx="3017520" cy="310896"/>
+          </a:xfrm>
+          <a:prstGeom prst="rect">
+            <a:avLst/>
+          </a:prstGeom>
+          <a:noFill/>
+        </p:spPr>
+        <p:txBody>
+          <a:bodyPr wrap="square" anchor="ctr" lIns="45720" rIns="45720" tIns="27432" bIns="27432">
+            <a:normAutofit/>
+          </a:bodyPr>
+          <a:lstStyle/>
+          <a:p>
+            <a:pPr algn="ctr"/>
+            <a:r>
+              <a:rPr sz="950" b="1">
+                <a:solidFill>
+                  <a:srgbClr val="157355"/>
+                </a:solidFill>
+                <a:latin typeface="Inter"/>
+              </a:rPr>
+              <a:t>RETO 2 · PUZZEL &amp; ESCAPE</a:t>
+            </a:r>
+          </a:p>
+        </p:txBody>
+      </p:sp>
+      <p:sp>
+        <p:nvSpPr>
+          <p:cNvPr id="6" name="Titulo"/>
+          <p:cNvSpPr txBox="1"/>
+          <p:nvPr/>
+        </p:nvSpPr>
+        <p:spPr>
+          <a:xfrm>
+            <a:off x="457200" y="502920"/>
+            <a:ext cx="8412480" cy="475488"/>
+          </a:xfrm>
+          <a:prstGeom prst="rect">
+            <a:avLst/>
+          </a:prstGeom>
+          <a:noFill/>
+        </p:spPr>
+        <p:txBody>
+          <a:bodyPr wrap="square" anchor="t" lIns="45720" rIns="45720" tIns="27432" bIns="27432">
+            <a:normAutofit/>
+          </a:bodyPr>
+          <a:lstStyle/>
+          <a:p>
+            <a:pPr algn="l"/>
+            <a:r>
+              <a:rPr sz="2700" b="1">
+                <a:solidFill>
+                  <a:srgbClr val="FFFFFF"/>
+                </a:solidFill>
+                <a:latin typeface="Bricolage Grotesque"/>
+              </a:rPr>
+              <a:t>Nunca he…</a:t>
+            </a:r>
+          </a:p>
+        </p:txBody>
+      </p:sp>
+      <p:sp>
+        <p:nvSpPr>
+          <p:cNvPr id="7" name="Badges"/>
+          <p:cNvSpPr txBox="1"/>
+          <p:nvPr/>
+        </p:nvSpPr>
+        <p:spPr>
+          <a:xfrm>
+            <a:off x="9052560" y="256032"/>
+            <a:ext cx="2651760" cy="640080"/>
+          </a:xfrm>
+          <a:prstGeom prst="rect">
+            <a:avLst/>
+          </a:prstGeom>
+          <a:noFill/>
+        </p:spPr>
+        <p:txBody>
+          <a:bodyPr wrap="square" anchor="t" lIns="45720" rIns="45720" tIns="27432" bIns="27432">
+            <a:normAutofit/>
+          </a:bodyPr>
+          <a:lstStyle/>
+          <a:p>
+            <a:pPr algn="r"/>
+            <a:r>
+              <a:rPr sz="1000">
+                <a:solidFill>
+                  <a:srgbClr val="E4F4EE"/>
+                </a:solidFill>
+                <a:latin typeface="Inter"/>
+              </a:rPr>
+              <a:t>🏫 Toda la clase</a:t>
+            </a:r>
+          </a:p>
+          <a:p>
+            <a:pPr algn="r"/>
+            <a:r>
+              <a:rPr sz="1000">
+                <a:solidFill>
+                  <a:srgbClr val="E4F4EE"/>
+                </a:solidFill>
+                <a:latin typeface="Inter"/>
+              </a:rPr>
+              <a:t>± 12 min · ★★☆</a:t>
+            </a:r>
+          </a:p>
+        </p:txBody>
+      </p:sp>
+      <p:sp>
+        <p:nvSpPr>
+          <p:cNvPr id="8" name="Gancho"/>
+          <p:cNvSpPr txBox="1"/>
+          <p:nvPr/>
+        </p:nvSpPr>
+        <p:spPr>
+          <a:xfrm>
+            <a:off x="457200" y="1225296"/>
+            <a:ext cx="11274552" cy="566928"/>
+          </a:xfrm>
+          <a:prstGeom prst="rect">
+            <a:avLst/>
+          </a:prstGeom>
+          <a:noFill/>
+        </p:spPr>
+        <p:txBody>
+          <a:bodyPr wrap="square" anchor="t" lIns="45720" rIns="45720" tIns="27432" bIns="27432">
+            <a:normAutofit/>
+          </a:bodyPr>
+          <a:lstStyle/>
+          <a:p>
+            <a:pPr algn="l"/>
+            <a:r>
+              <a:rPr sz="1600" b="1">
+                <a:solidFill>
+                  <a:srgbClr val="157355"/>
+                </a:solidFill>
+                <a:latin typeface="Bricolage Grotesque"/>
+              </a:rPr>
+              <a:t>Cinco dedos arriba. Cada vez que tú sí lo has hecho, baja uno.</a:t>
+            </a:r>
+          </a:p>
+          <a:p>
+            <a:pPr algn="l"/>
+            <a:r>
+              <a:rPr sz="1100" i="1">
+                <a:solidFill>
+                  <a:srgbClr val="6A6E78"/>
+                </a:solidFill>
+                <a:latin typeface="Inter"/>
+              </a:rPr>
+              <a:t>Vijf vingers in de lucht. Elke keer dat jij het wél gedaan hebt, gaat er één omlaag.</a:t>
+            </a:r>
+          </a:p>
+        </p:txBody>
+      </p:sp>
+      <p:sp>
+        <p:nvSpPr>
+          <p:cNvPr id="9" name="ReglaCaja"/>
+          <p:cNvSpPr/>
+          <p:nvPr/>
+        </p:nvSpPr>
+        <p:spPr>
+          <a:xfrm>
+            <a:off x="457200" y="1847088"/>
+            <a:ext cx="11274552" cy="658368"/>
+          </a:xfrm>
+          <a:prstGeom prst="roundRect">
+            <a:avLst>
+              <a:gd name="adj" fmla="val 5000"/>
+            </a:avLst>
+          </a:prstGeom>
+          <a:solidFill>
+            <a:srgbClr val="FBF3D6"/>
+          </a:solidFill>
+          <a:ln>
+            <a:noFill/>
+          </a:ln>
+          <a:effectLst/>
+        </p:spPr>
+        <p:style>
+          <a:lnRef idx="1">
+            <a:schemeClr val="accent1"/>
+          </a:lnRef>
+          <a:fillRef idx="3">
+            <a:schemeClr val="accent1"/>
+          </a:fillRef>
+          <a:effectRef idx="2">
+            <a:schemeClr val="accent1"/>
+          </a:effectRef>
+          <a:fontRef idx="minor">
+            <a:schemeClr val="lt1"/>
+          </a:fontRef>
+        </p:style>
+        <p:txBody>
+          <a:bodyPr rtlCol="0" anchor="ctr"/>
+          <a:lstStyle/>
+          <a:p/>
+        </p:txBody>
+      </p:sp>
+      <p:sp>
+        <p:nvSpPr>
+          <p:cNvPr id="10" name="ReglaTxt"/>
+          <p:cNvSpPr txBox="1"/>
+          <p:nvPr/>
+        </p:nvSpPr>
+        <p:spPr>
+          <a:xfrm>
+            <a:off x="603504" y="1883664"/>
+            <a:ext cx="10972800" cy="585216"/>
+          </a:xfrm>
+          <a:prstGeom prst="rect">
+            <a:avLst/>
+          </a:prstGeom>
+          <a:noFill/>
+        </p:spPr>
+        <p:txBody>
+          <a:bodyPr wrap="square" anchor="t" lIns="45720" rIns="45720" tIns="27432" bIns="27432">
+            <a:normAutofit/>
+          </a:bodyPr>
+          <a:lstStyle/>
+          <a:p>
+            <a:pPr algn="l"/>
+            <a:r>
+              <a:rPr sz="850" b="1">
+                <a:solidFill>
+                  <a:srgbClr val="B7860B"/>
+                </a:solidFill>
+                <a:latin typeface="Inter"/>
+              </a:rPr>
+              <a:t>LA REGLA DEL RETO</a:t>
+            </a:r>
+          </a:p>
+          <a:p>
+            <a:pPr algn="l"/>
+            <a:r>
+              <a:rPr sz="1100">
+                <a:solidFill>
+                  <a:srgbClr val="20242E"/>
+                </a:solidFill>
+                <a:latin typeface="Inter"/>
+              </a:rPr>
+              <a:t>Elke bewering begint met «Nunca he» plus een participium — en je moet zelf verliezen als je liegt. Wie een zin zonder perfecto zegt, verliest ook een vinger.</a:t>
+            </a:r>
+          </a:p>
+        </p:txBody>
+      </p:sp>
+      <p:sp>
+        <p:nvSpPr>
+          <p:cNvPr id="11" name="Tarjeta 0"/>
+          <p:cNvSpPr/>
+          <p:nvPr/>
+        </p:nvSpPr>
+        <p:spPr>
+          <a:xfrm>
+            <a:off x="457200" y="2670048"/>
+            <a:ext cx="2708910" cy="898398"/>
+          </a:xfrm>
+          <a:prstGeom prst="roundRect">
+            <a:avLst>
+              <a:gd name="adj" fmla="val 6000"/>
+            </a:avLst>
+          </a:prstGeom>
+          <a:solidFill>
+            <a:srgbClr val="FFFFFF"/>
+          </a:solidFill>
+          <a:ln w="12700">
+            <a:solidFill>
+              <a:srgbClr val="E4E3DE"/>
+            </a:solidFill>
+          </a:ln>
+          <a:effectLst/>
+        </p:spPr>
+        <p:style>
+          <a:lnRef idx="1">
+            <a:schemeClr val="accent1"/>
+          </a:lnRef>
+          <a:fillRef idx="3">
+            <a:schemeClr val="accent1"/>
+          </a:fillRef>
+          <a:effectRef idx="2">
+            <a:schemeClr val="accent1"/>
+          </a:effectRef>
+          <a:fontRef idx="minor">
+            <a:schemeClr val="lt1"/>
+          </a:fontRef>
+        </p:style>
+        <p:txBody>
+          <a:bodyPr rtlCol="0" anchor="ctr"/>
+          <a:lstStyle/>
+          <a:p/>
+        </p:txBody>
+      </p:sp>
+      <p:sp>
+        <p:nvSpPr>
+          <p:cNvPr id="12" name="TarjetaTxt 0"/>
+          <p:cNvSpPr txBox="1"/>
+          <p:nvPr/>
+        </p:nvSpPr>
+        <p:spPr>
+          <a:xfrm>
+            <a:off x="548640" y="2724912"/>
+            <a:ext cx="2526030" cy="788670"/>
+          </a:xfrm>
+          <a:prstGeom prst="rect">
+            <a:avLst/>
+          </a:prstGeom>
+          <a:noFill/>
+        </p:spPr>
+        <p:txBody>
+          <a:bodyPr wrap="square" anchor="t" lIns="45720" rIns="45720" tIns="27432" bIns="27432">
+            <a:normAutofit/>
+          </a:bodyPr>
+          <a:lstStyle/>
+          <a:p>
+            <a:pPr algn="l"/>
+            <a:r>
+              <a:rPr sz="1100" b="1">
+                <a:solidFill>
+                  <a:srgbClr val="157355"/>
+                </a:solidFill>
+                <a:latin typeface="Bricolage Grotesque"/>
+              </a:rPr>
+              <a:t>Empieza así</a:t>
+            </a:r>
+          </a:p>
+          <a:p>
+            <a:pPr algn="l"/>
+            <a:r>
+              <a:rPr sz="1000">
+                <a:solidFill>
+                  <a:srgbClr val="20242E"/>
+                </a:solidFill>
+                <a:latin typeface="Inter"/>
+              </a:rPr>
+              <a:t>Nunca he montado … · Nunca he comido … · Nunca he visto …</a:t>
+            </a:r>
+          </a:p>
+        </p:txBody>
+      </p:sp>
+      <p:sp>
+        <p:nvSpPr>
+          <p:cNvPr id="13" name="Tarjeta 1"/>
+          <p:cNvSpPr/>
+          <p:nvPr/>
+        </p:nvSpPr>
+        <p:spPr>
+          <a:xfrm>
+            <a:off x="3312414" y="2670048"/>
+            <a:ext cx="2708910" cy="898398"/>
+          </a:xfrm>
+          <a:prstGeom prst="roundRect">
+            <a:avLst>
+              <a:gd name="adj" fmla="val 6000"/>
+            </a:avLst>
+          </a:prstGeom>
+          <a:solidFill>
+            <a:srgbClr val="FFFFFF"/>
+          </a:solidFill>
+          <a:ln w="12700">
+            <a:solidFill>
+              <a:srgbClr val="E4E3DE"/>
+            </a:solidFill>
+          </a:ln>
+          <a:effectLst/>
+        </p:spPr>
+        <p:style>
+          <a:lnRef idx="1">
+            <a:schemeClr val="accent1"/>
+          </a:lnRef>
+          <a:fillRef idx="3">
+            <a:schemeClr val="accent1"/>
+          </a:fillRef>
+          <a:effectRef idx="2">
+            <a:schemeClr val="accent1"/>
+          </a:effectRef>
+          <a:fontRef idx="minor">
+            <a:schemeClr val="lt1"/>
+          </a:fontRef>
+        </p:style>
+        <p:txBody>
+          <a:bodyPr rtlCol="0" anchor="ctr"/>
+          <a:lstStyle/>
+          <a:p/>
+        </p:txBody>
+      </p:sp>
+      <p:sp>
+        <p:nvSpPr>
+          <p:cNvPr id="14" name="TarjetaTxt 1"/>
+          <p:cNvSpPr txBox="1"/>
+          <p:nvPr/>
+        </p:nvSpPr>
+        <p:spPr>
+          <a:xfrm>
+            <a:off x="3403854" y="2724912"/>
+            <a:ext cx="2526030" cy="788670"/>
+          </a:xfrm>
+          <a:prstGeom prst="rect">
+            <a:avLst/>
+          </a:prstGeom>
+          <a:noFill/>
+        </p:spPr>
+        <p:txBody>
+          <a:bodyPr wrap="square" anchor="t" lIns="45720" rIns="45720" tIns="27432" bIns="27432">
+            <a:normAutofit/>
+          </a:bodyPr>
+          <a:lstStyle/>
+          <a:p>
+            <a:pPr algn="l"/>
+            <a:r>
+              <a:rPr sz="1100" b="1">
+                <a:solidFill>
+                  <a:srgbClr val="157355"/>
+                </a:solidFill>
+                <a:latin typeface="Bricolage Grotesque"/>
+              </a:rPr>
+              <a:t>Empieza así</a:t>
+            </a:r>
+          </a:p>
+          <a:p>
+            <a:pPr algn="l"/>
+            <a:r>
+              <a:rPr sz="1000">
+                <a:solidFill>
+                  <a:srgbClr val="20242E"/>
+                </a:solidFill>
+                <a:latin typeface="Inter"/>
+              </a:rPr>
+              <a:t>Nunca he roto … · Nunca he dicho … · Nunca he perdido …</a:t>
+            </a:r>
+          </a:p>
+        </p:txBody>
+      </p:sp>
+      <p:sp>
+        <p:nvSpPr>
+          <p:cNvPr id="15" name="Tarjeta 2"/>
+          <p:cNvSpPr/>
+          <p:nvPr/>
+        </p:nvSpPr>
+        <p:spPr>
+          <a:xfrm>
+            <a:off x="6167628" y="2670048"/>
+            <a:ext cx="2708910" cy="898398"/>
+          </a:xfrm>
+          <a:prstGeom prst="roundRect">
+            <a:avLst>
+              <a:gd name="adj" fmla="val 6000"/>
+            </a:avLst>
+          </a:prstGeom>
+          <a:solidFill>
+            <a:srgbClr val="FFFFFF"/>
+          </a:solidFill>
+          <a:ln w="12700">
+            <a:solidFill>
+              <a:srgbClr val="E4E3DE"/>
+            </a:solidFill>
+          </a:ln>
+          <a:effectLst/>
+        </p:spPr>
+        <p:style>
+          <a:lnRef idx="1">
+            <a:schemeClr val="accent1"/>
+          </a:lnRef>
+          <a:fillRef idx="3">
+            <a:schemeClr val="accent1"/>
+          </a:fillRef>
+          <a:effectRef idx="2">
+            <a:schemeClr val="accent1"/>
+          </a:effectRef>
+          <a:fontRef idx="minor">
+            <a:schemeClr val="lt1"/>
+          </a:fontRef>
+        </p:style>
+        <p:txBody>
+          <a:bodyPr rtlCol="0" anchor="ctr"/>
+          <a:lstStyle/>
+          <a:p/>
+        </p:txBody>
+      </p:sp>
+      <p:sp>
+        <p:nvSpPr>
+          <p:cNvPr id="16" name="TarjetaTxt 2"/>
+          <p:cNvSpPr txBox="1"/>
+          <p:nvPr/>
+        </p:nvSpPr>
+        <p:spPr>
+          <a:xfrm>
+            <a:off x="6259068" y="2724912"/>
+            <a:ext cx="2526030" cy="788670"/>
+          </a:xfrm>
+          <a:prstGeom prst="rect">
+            <a:avLst/>
+          </a:prstGeom>
+          <a:noFill/>
+        </p:spPr>
+        <p:txBody>
+          <a:bodyPr wrap="square" anchor="t" lIns="45720" rIns="45720" tIns="27432" bIns="27432">
+            <a:normAutofit/>
+          </a:bodyPr>
+          <a:lstStyle/>
+          <a:p>
+            <a:pPr algn="l"/>
+            <a:r>
+              <a:rPr sz="1100" b="1">
+                <a:solidFill>
+                  <a:srgbClr val="157355"/>
+                </a:solidFill>
+                <a:latin typeface="Bricolage Grotesque"/>
+              </a:rPr>
+              <a:t>Empieza así</a:t>
+            </a:r>
+          </a:p>
+          <a:p>
+            <a:pPr algn="l"/>
+            <a:r>
+              <a:rPr sz="1000">
+                <a:solidFill>
+                  <a:srgbClr val="20242E"/>
+                </a:solidFill>
+                <a:latin typeface="Inter"/>
+              </a:rPr>
+              <a:t>Nunca he escrito … · Nunca he vuelto a … · Nunca he hecho …</a:t>
+            </a:r>
+          </a:p>
+        </p:txBody>
+      </p:sp>
+      <p:sp>
+        <p:nvSpPr>
+          <p:cNvPr id="17" name="Tarjeta 3"/>
+          <p:cNvSpPr/>
+          <p:nvPr/>
+        </p:nvSpPr>
+        <p:spPr>
+          <a:xfrm>
+            <a:off x="9022842" y="2670048"/>
+            <a:ext cx="2708910" cy="898398"/>
+          </a:xfrm>
+          <a:prstGeom prst="roundRect">
+            <a:avLst>
+              <a:gd name="adj" fmla="val 6000"/>
+            </a:avLst>
+          </a:prstGeom>
+          <a:solidFill>
+            <a:srgbClr val="FFFFFF"/>
+          </a:solidFill>
+          <a:ln w="12700">
+            <a:solidFill>
+              <a:srgbClr val="E4E3DE"/>
+            </a:solidFill>
+          </a:ln>
+          <a:effectLst/>
+        </p:spPr>
+        <p:style>
+          <a:lnRef idx="1">
+            <a:schemeClr val="accent1"/>
+          </a:lnRef>
+          <a:fillRef idx="3">
+            <a:schemeClr val="accent1"/>
+          </a:fillRef>
+          <a:effectRef idx="2">
+            <a:schemeClr val="accent1"/>
+          </a:effectRef>
+          <a:fontRef idx="minor">
+            <a:schemeClr val="lt1"/>
+          </a:fontRef>
+        </p:style>
+        <p:txBody>
+          <a:bodyPr rtlCol="0" anchor="ctr"/>
+          <a:lstStyle/>
+          <a:p/>
+        </p:txBody>
+      </p:sp>
+      <p:sp>
+        <p:nvSpPr>
+          <p:cNvPr id="18" name="TarjetaTxt 3"/>
+          <p:cNvSpPr txBox="1"/>
+          <p:nvPr/>
+        </p:nvSpPr>
+        <p:spPr>
+          <a:xfrm>
+            <a:off x="9114282" y="2724912"/>
+            <a:ext cx="2526030" cy="788670"/>
+          </a:xfrm>
+          <a:prstGeom prst="rect">
+            <a:avLst/>
+          </a:prstGeom>
+          <a:noFill/>
+        </p:spPr>
+        <p:txBody>
+          <a:bodyPr wrap="square" anchor="t" lIns="45720" rIns="45720" tIns="27432" bIns="27432">
+            <a:normAutofit/>
+          </a:bodyPr>
+          <a:lstStyle/>
+          <a:p>
+            <a:pPr algn="l"/>
+            <a:r>
+              <a:rPr sz="1100" b="1">
+                <a:solidFill>
+                  <a:srgbClr val="157355"/>
+                </a:solidFill>
+                <a:latin typeface="Bricolage Grotesque"/>
+              </a:rPr>
+              <a:t>segura</a:t>
+            </a:r>
+          </a:p>
+          <a:p>
+            <a:pPr algn="l"/>
+            <a:r>
+              <a:rPr sz="1000">
+                <a:solidFill>
+                  <a:srgbClr val="20242E"/>
+                </a:solidFill>
+                <a:latin typeface="Inter"/>
+              </a:rPr>
+              <a:t>Nunca he montado en camello.</a:t>
+            </a:r>
+          </a:p>
+        </p:txBody>
+      </p:sp>
+      <p:sp>
+        <p:nvSpPr>
+          <p:cNvPr id="19" name="Tarjeta 4"/>
+          <p:cNvSpPr/>
+          <p:nvPr/>
+        </p:nvSpPr>
+        <p:spPr>
+          <a:xfrm>
+            <a:off x="457200" y="3696462"/>
+            <a:ext cx="2708910" cy="898398"/>
+          </a:xfrm>
+          <a:prstGeom prst="roundRect">
+            <a:avLst>
+              <a:gd name="adj" fmla="val 6000"/>
+            </a:avLst>
+          </a:prstGeom>
+          <a:solidFill>
+            <a:srgbClr val="FFFFFF"/>
+          </a:solidFill>
+          <a:ln w="12700">
+            <a:solidFill>
+              <a:srgbClr val="E4E3DE"/>
+            </a:solidFill>
+          </a:ln>
+          <a:effectLst/>
+        </p:spPr>
+        <p:style>
+          <a:lnRef idx="1">
+            <a:schemeClr val="accent1"/>
+          </a:lnRef>
+          <a:fillRef idx="3">
+            <a:schemeClr val="accent1"/>
+          </a:fillRef>
+          <a:effectRef idx="2">
+            <a:schemeClr val="accent1"/>
+          </a:effectRef>
+          <a:fontRef idx="minor">
+            <a:schemeClr val="lt1"/>
+          </a:fontRef>
+        </p:style>
+        <p:txBody>
+          <a:bodyPr rtlCol="0" anchor="ctr"/>
+          <a:lstStyle/>
+          <a:p/>
+        </p:txBody>
+      </p:sp>
+      <p:sp>
+        <p:nvSpPr>
+          <p:cNvPr id="20" name="TarjetaTxt 4"/>
+          <p:cNvSpPr txBox="1"/>
+          <p:nvPr/>
+        </p:nvSpPr>
+        <p:spPr>
+          <a:xfrm>
+            <a:off x="548640" y="3751326"/>
+            <a:ext cx="2526030" cy="788670"/>
+          </a:xfrm>
+          <a:prstGeom prst="rect">
+            <a:avLst/>
+          </a:prstGeom>
+          <a:noFill/>
+        </p:spPr>
+        <p:txBody>
+          <a:bodyPr wrap="square" anchor="t" lIns="45720" rIns="45720" tIns="27432" bIns="27432">
+            <a:normAutofit/>
+          </a:bodyPr>
+          <a:lstStyle/>
+          <a:p>
+            <a:pPr algn="l"/>
+            <a:r>
+              <a:rPr sz="1100" b="1">
+                <a:solidFill>
+                  <a:srgbClr val="157355"/>
+                </a:solidFill>
+                <a:latin typeface="Bricolage Grotesque"/>
+              </a:rPr>
+              <a:t>segura</a:t>
+            </a:r>
+          </a:p>
+          <a:p>
+            <a:pPr algn="l"/>
+            <a:r>
+              <a:rPr sz="1000">
+                <a:solidFill>
+                  <a:srgbClr val="20242E"/>
+                </a:solidFill>
+                <a:latin typeface="Inter"/>
+              </a:rPr>
+              <a:t>Nunca he comido insectos.</a:t>
+            </a:r>
+          </a:p>
+        </p:txBody>
+      </p:sp>
+      <p:sp>
+        <p:nvSpPr>
+          <p:cNvPr id="21" name="Tarjeta 5"/>
+          <p:cNvSpPr/>
+          <p:nvPr/>
+        </p:nvSpPr>
+        <p:spPr>
+          <a:xfrm>
+            <a:off x="3312414" y="3696462"/>
+            <a:ext cx="2708910" cy="898398"/>
+          </a:xfrm>
+          <a:prstGeom prst="roundRect">
+            <a:avLst>
+              <a:gd name="adj" fmla="val 6000"/>
+            </a:avLst>
+          </a:prstGeom>
+          <a:solidFill>
+            <a:srgbClr val="FFFFFF"/>
+          </a:solidFill>
+          <a:ln w="12700">
+            <a:solidFill>
+              <a:srgbClr val="E4E3DE"/>
+            </a:solidFill>
+          </a:ln>
+          <a:effectLst/>
+        </p:spPr>
+        <p:style>
+          <a:lnRef idx="1">
+            <a:schemeClr val="accent1"/>
+          </a:lnRef>
+          <a:fillRef idx="3">
+            <a:schemeClr val="accent1"/>
+          </a:fillRef>
+          <a:effectRef idx="2">
+            <a:schemeClr val="accent1"/>
+          </a:effectRef>
+          <a:fontRef idx="minor">
+            <a:schemeClr val="lt1"/>
+          </a:fontRef>
+        </p:style>
+        <p:txBody>
+          <a:bodyPr rtlCol="0" anchor="ctr"/>
+          <a:lstStyle/>
+          <a:p/>
+        </p:txBody>
+      </p:sp>
+      <p:sp>
+        <p:nvSpPr>
+          <p:cNvPr id="22" name="TarjetaTxt 5"/>
+          <p:cNvSpPr txBox="1"/>
+          <p:nvPr/>
+        </p:nvSpPr>
+        <p:spPr>
+          <a:xfrm>
+            <a:off x="3403854" y="3751326"/>
+            <a:ext cx="2526030" cy="788670"/>
+          </a:xfrm>
+          <a:prstGeom prst="rect">
+            <a:avLst/>
+          </a:prstGeom>
+          <a:noFill/>
+        </p:spPr>
+        <p:txBody>
+          <a:bodyPr wrap="square" anchor="t" lIns="45720" rIns="45720" tIns="27432" bIns="27432">
+            <a:normAutofit/>
+          </a:bodyPr>
+          <a:lstStyle/>
+          <a:p>
+            <a:pPr algn="l"/>
+            <a:r>
+              <a:rPr sz="1100" b="1">
+                <a:solidFill>
+                  <a:srgbClr val="157355"/>
+                </a:solidFill>
+                <a:latin typeface="Bricolage Grotesque"/>
+              </a:rPr>
+              <a:t>segura</a:t>
+            </a:r>
+          </a:p>
+          <a:p>
+            <a:pPr algn="l"/>
+            <a:r>
+              <a:rPr sz="1000">
+                <a:solidFill>
+                  <a:srgbClr val="20242E"/>
+                </a:solidFill>
+                <a:latin typeface="Inter"/>
+              </a:rPr>
+              <a:t>Nunca he visto el mar en invierno.</a:t>
+            </a:r>
+          </a:p>
+        </p:txBody>
+      </p:sp>
+      <p:sp>
+        <p:nvSpPr>
+          <p:cNvPr id="23" name="Tarjeta 6"/>
+          <p:cNvSpPr/>
+          <p:nvPr/>
+        </p:nvSpPr>
+        <p:spPr>
+          <a:xfrm>
+            <a:off x="6167628" y="3696462"/>
+            <a:ext cx="2708910" cy="898398"/>
+          </a:xfrm>
+          <a:prstGeom prst="roundRect">
+            <a:avLst>
+              <a:gd name="adj" fmla="val 6000"/>
+            </a:avLst>
+          </a:prstGeom>
+          <a:solidFill>
+            <a:srgbClr val="FFFFFF"/>
+          </a:solidFill>
+          <a:ln w="12700">
+            <a:solidFill>
+              <a:srgbClr val="E4E3DE"/>
+            </a:solidFill>
+          </a:ln>
+          <a:effectLst/>
+        </p:spPr>
+        <p:style>
+          <a:lnRef idx="1">
+            <a:schemeClr val="accent1"/>
+          </a:lnRef>
+          <a:fillRef idx="3">
+            <a:schemeClr val="accent1"/>
+          </a:fillRef>
+          <a:effectRef idx="2">
+            <a:schemeClr val="accent1"/>
+          </a:effectRef>
+          <a:fontRef idx="minor">
+            <a:schemeClr val="lt1"/>
+          </a:fontRef>
+        </p:style>
+        <p:txBody>
+          <a:bodyPr rtlCol="0" anchor="ctr"/>
+          <a:lstStyle/>
+          <a:p/>
+        </p:txBody>
+      </p:sp>
+      <p:sp>
+        <p:nvSpPr>
+          <p:cNvPr id="24" name="TarjetaTxt 6"/>
+          <p:cNvSpPr txBox="1"/>
+          <p:nvPr/>
+        </p:nvSpPr>
+        <p:spPr>
+          <a:xfrm>
+            <a:off x="6259068" y="3751326"/>
+            <a:ext cx="2526030" cy="788670"/>
+          </a:xfrm>
+          <a:prstGeom prst="rect">
+            <a:avLst/>
+          </a:prstGeom>
+          <a:noFill/>
+        </p:spPr>
+        <p:txBody>
+          <a:bodyPr wrap="square" anchor="t" lIns="45720" rIns="45720" tIns="27432" bIns="27432">
+            <a:normAutofit/>
+          </a:bodyPr>
+          <a:lstStyle/>
+          <a:p>
+            <a:pPr algn="l"/>
+            <a:r>
+              <a:rPr sz="1100" b="1">
+                <a:solidFill>
+                  <a:srgbClr val="157355"/>
+                </a:solidFill>
+                <a:latin typeface="Bricolage Grotesque"/>
+              </a:rPr>
+              <a:t>segura</a:t>
+            </a:r>
+          </a:p>
+          <a:p>
+            <a:pPr algn="l"/>
+            <a:r>
+              <a:rPr sz="1000">
+                <a:solidFill>
+                  <a:srgbClr val="20242E"/>
+                </a:solidFill>
+                <a:latin typeface="Inter"/>
+              </a:rPr>
+              <a:t>Nunca he roto un hueso.</a:t>
+            </a:r>
+          </a:p>
+        </p:txBody>
+      </p:sp>
+      <p:sp>
+        <p:nvSpPr>
+          <p:cNvPr id="25" name="Tarjeta 7"/>
+          <p:cNvSpPr/>
+          <p:nvPr/>
+        </p:nvSpPr>
+        <p:spPr>
+          <a:xfrm>
+            <a:off x="9022842" y="3696462"/>
+            <a:ext cx="2708910" cy="898398"/>
+          </a:xfrm>
+          <a:prstGeom prst="roundRect">
+            <a:avLst>
+              <a:gd name="adj" fmla="val 6000"/>
+            </a:avLst>
+          </a:prstGeom>
+          <a:solidFill>
+            <a:srgbClr val="FFFFFF"/>
+          </a:solidFill>
+          <a:ln w="12700">
+            <a:solidFill>
+              <a:srgbClr val="E4E3DE"/>
+            </a:solidFill>
+          </a:ln>
+          <a:effectLst/>
+        </p:spPr>
+        <p:style>
+          <a:lnRef idx="1">
+            <a:schemeClr val="accent1"/>
+          </a:lnRef>
+          <a:fillRef idx="3">
+            <a:schemeClr val="accent1"/>
+          </a:fillRef>
+          <a:effectRef idx="2">
+            <a:schemeClr val="accent1"/>
+          </a:effectRef>
+          <a:fontRef idx="minor">
+            <a:schemeClr val="lt1"/>
+          </a:fontRef>
+        </p:style>
+        <p:txBody>
+          <a:bodyPr rtlCol="0" anchor="ctr"/>
+          <a:lstStyle/>
+          <a:p/>
+        </p:txBody>
+      </p:sp>
+      <p:sp>
+        <p:nvSpPr>
+          <p:cNvPr id="26" name="TarjetaTxt 7"/>
+          <p:cNvSpPr txBox="1"/>
+          <p:nvPr/>
+        </p:nvSpPr>
+        <p:spPr>
+          <a:xfrm>
+            <a:off x="9114282" y="3751326"/>
+            <a:ext cx="2526030" cy="788670"/>
+          </a:xfrm>
+          <a:prstGeom prst="rect">
+            <a:avLst/>
+          </a:prstGeom>
+          <a:noFill/>
+        </p:spPr>
+        <p:txBody>
+          <a:bodyPr wrap="square" anchor="t" lIns="45720" rIns="45720" tIns="27432" bIns="27432">
+            <a:normAutofit/>
+          </a:bodyPr>
+          <a:lstStyle/>
+          <a:p>
+            <a:pPr algn="l"/>
+            <a:r>
+              <a:rPr sz="1100" b="1">
+                <a:solidFill>
+                  <a:srgbClr val="157355"/>
+                </a:solidFill>
+                <a:latin typeface="Bricolage Grotesque"/>
+              </a:rPr>
+              <a:t>segura</a:t>
+            </a:r>
+          </a:p>
+          <a:p>
+            <a:pPr algn="l"/>
+            <a:r>
+              <a:rPr sz="1000">
+                <a:solidFill>
+                  <a:srgbClr val="20242E"/>
+                </a:solidFill>
+                <a:latin typeface="Inter"/>
+              </a:rPr>
+              <a:t>Nunca he dormido en una tienda.</a:t>
+            </a:r>
+          </a:p>
+        </p:txBody>
+      </p:sp>
+      <p:sp>
+        <p:nvSpPr>
+          <p:cNvPr id="27" name="Tarjeta 8"/>
+          <p:cNvSpPr/>
+          <p:nvPr/>
+        </p:nvSpPr>
+        <p:spPr>
+          <a:xfrm>
+            <a:off x="457200" y="4722876"/>
+            <a:ext cx="2708910" cy="898398"/>
+          </a:xfrm>
+          <a:prstGeom prst="roundRect">
+            <a:avLst>
+              <a:gd name="adj" fmla="val 6000"/>
+            </a:avLst>
+          </a:prstGeom>
+          <a:solidFill>
+            <a:srgbClr val="FFFFFF"/>
+          </a:solidFill>
+          <a:ln w="12700">
+            <a:solidFill>
+              <a:srgbClr val="E4E3DE"/>
+            </a:solidFill>
+          </a:ln>
+          <a:effectLst/>
+        </p:spPr>
+        <p:style>
+          <a:lnRef idx="1">
+            <a:schemeClr val="accent1"/>
+          </a:lnRef>
+          <a:fillRef idx="3">
+            <a:schemeClr val="accent1"/>
+          </a:fillRef>
+          <a:effectRef idx="2">
+            <a:schemeClr val="accent1"/>
+          </a:effectRef>
+          <a:fontRef idx="minor">
+            <a:schemeClr val="lt1"/>
+          </a:fontRef>
+        </p:style>
+        <p:txBody>
+          <a:bodyPr rtlCol="0" anchor="ctr"/>
+          <a:lstStyle/>
+          <a:p/>
+        </p:txBody>
+      </p:sp>
+      <p:sp>
+        <p:nvSpPr>
+          <p:cNvPr id="28" name="TarjetaTxt 8"/>
+          <p:cNvSpPr txBox="1"/>
+          <p:nvPr/>
+        </p:nvSpPr>
+        <p:spPr>
+          <a:xfrm>
+            <a:off x="548640" y="4777740"/>
+            <a:ext cx="2526030" cy="788670"/>
+          </a:xfrm>
+          <a:prstGeom prst="rect">
+            <a:avLst/>
+          </a:prstGeom>
+          <a:noFill/>
+        </p:spPr>
+        <p:txBody>
+          <a:bodyPr wrap="square" anchor="t" lIns="45720" rIns="45720" tIns="27432" bIns="27432">
+            <a:normAutofit/>
+          </a:bodyPr>
+          <a:lstStyle/>
+          <a:p>
+            <a:pPr algn="l"/>
+            <a:r>
+              <a:rPr sz="1100" b="1">
+                <a:solidFill>
+                  <a:srgbClr val="157355"/>
+                </a:solidFill>
+                <a:latin typeface="Bricolage Grotesque"/>
+              </a:rPr>
+              <a:t>segura</a:t>
+            </a:r>
+          </a:p>
+          <a:p>
+            <a:pPr algn="l"/>
+            <a:r>
+              <a:rPr sz="1000">
+                <a:solidFill>
+                  <a:srgbClr val="20242E"/>
+                </a:solidFill>
+                <a:latin typeface="Inter"/>
+              </a:rPr>
+              <a:t>Nunca he cantado en público.</a:t>
+            </a:r>
+          </a:p>
+        </p:txBody>
+      </p:sp>
+      <p:sp>
+        <p:nvSpPr>
+          <p:cNvPr id="29" name="Tarjeta 9"/>
+          <p:cNvSpPr/>
+          <p:nvPr/>
+        </p:nvSpPr>
+        <p:spPr>
+          <a:xfrm>
+            <a:off x="3312414" y="4722876"/>
+            <a:ext cx="2708910" cy="898398"/>
+          </a:xfrm>
+          <a:prstGeom prst="roundRect">
+            <a:avLst>
+              <a:gd name="adj" fmla="val 6000"/>
+            </a:avLst>
+          </a:prstGeom>
+          <a:solidFill>
+            <a:srgbClr val="FFFFFF"/>
+          </a:solidFill>
+          <a:ln w="12700">
+            <a:solidFill>
+              <a:srgbClr val="E4E3DE"/>
+            </a:solidFill>
+          </a:ln>
+          <a:effectLst/>
+        </p:spPr>
+        <p:style>
+          <a:lnRef idx="1">
+            <a:schemeClr val="accent1"/>
+          </a:lnRef>
+          <a:fillRef idx="3">
+            <a:schemeClr val="accent1"/>
+          </a:fillRef>
+          <a:effectRef idx="2">
+            <a:schemeClr val="accent1"/>
+          </a:effectRef>
+          <a:fontRef idx="minor">
+            <a:schemeClr val="lt1"/>
+          </a:fontRef>
+        </p:style>
+        <p:txBody>
+          <a:bodyPr rtlCol="0" anchor="ctr"/>
+          <a:lstStyle/>
+          <a:p/>
+        </p:txBody>
+      </p:sp>
+      <p:sp>
+        <p:nvSpPr>
+          <p:cNvPr id="30" name="TarjetaTxt 9"/>
+          <p:cNvSpPr txBox="1"/>
+          <p:nvPr/>
+        </p:nvSpPr>
+        <p:spPr>
+          <a:xfrm>
+            <a:off x="3403854" y="4777740"/>
+            <a:ext cx="2526030" cy="788670"/>
+          </a:xfrm>
+          <a:prstGeom prst="rect">
+            <a:avLst/>
+          </a:prstGeom>
+          <a:noFill/>
+        </p:spPr>
+        <p:txBody>
+          <a:bodyPr wrap="square" anchor="t" lIns="45720" rIns="45720" tIns="27432" bIns="27432">
+            <a:normAutofit/>
+          </a:bodyPr>
+          <a:lstStyle/>
+          <a:p>
+            <a:pPr algn="l"/>
+            <a:r>
+              <a:rPr sz="1100" b="1">
+                <a:solidFill>
+                  <a:srgbClr val="157355"/>
+                </a:solidFill>
+                <a:latin typeface="Bricolage Grotesque"/>
+              </a:rPr>
+              <a:t>segura</a:t>
+            </a:r>
+          </a:p>
+          <a:p>
+            <a:pPr algn="l"/>
+            <a:r>
+              <a:rPr sz="1000">
+                <a:solidFill>
+                  <a:srgbClr val="20242E"/>
+                </a:solidFill>
+                <a:latin typeface="Inter"/>
+              </a:rPr>
+              <a:t>Nunca he hecho un pastel yo solo/a.</a:t>
+            </a:r>
+          </a:p>
+        </p:txBody>
+      </p:sp>
+      <p:sp>
+        <p:nvSpPr>
+          <p:cNvPr id="31" name="Tarjeta 10"/>
+          <p:cNvSpPr/>
+          <p:nvPr/>
+        </p:nvSpPr>
+        <p:spPr>
+          <a:xfrm>
+            <a:off x="6167628" y="4722876"/>
+            <a:ext cx="2708910" cy="898398"/>
+          </a:xfrm>
+          <a:prstGeom prst="roundRect">
+            <a:avLst>
+              <a:gd name="adj" fmla="val 6000"/>
+            </a:avLst>
+          </a:prstGeom>
+          <a:solidFill>
+            <a:srgbClr val="FFFFFF"/>
+          </a:solidFill>
+          <a:ln w="12700">
+            <a:solidFill>
+              <a:srgbClr val="E4E3DE"/>
+            </a:solidFill>
+          </a:ln>
+          <a:effectLst/>
+        </p:spPr>
+        <p:style>
+          <a:lnRef idx="1">
+            <a:schemeClr val="accent1"/>
+          </a:lnRef>
+          <a:fillRef idx="3">
+            <a:schemeClr val="accent1"/>
+          </a:fillRef>
+          <a:effectRef idx="2">
+            <a:schemeClr val="accent1"/>
+          </a:effectRef>
+          <a:fontRef idx="minor">
+            <a:schemeClr val="lt1"/>
+          </a:fontRef>
+        </p:style>
+        <p:txBody>
+          <a:bodyPr rtlCol="0" anchor="ctr"/>
+          <a:lstStyle/>
+          <a:p/>
+        </p:txBody>
+      </p:sp>
+      <p:sp>
+        <p:nvSpPr>
+          <p:cNvPr id="32" name="TarjetaTxt 10"/>
+          <p:cNvSpPr txBox="1"/>
+          <p:nvPr/>
+        </p:nvSpPr>
+        <p:spPr>
+          <a:xfrm>
+            <a:off x="6259068" y="4777740"/>
+            <a:ext cx="2526030" cy="788670"/>
+          </a:xfrm>
+          <a:prstGeom prst="rect">
+            <a:avLst/>
+          </a:prstGeom>
+          <a:noFill/>
+        </p:spPr>
+        <p:txBody>
+          <a:bodyPr wrap="square" anchor="t" lIns="45720" rIns="45720" tIns="27432" bIns="27432">
+            <a:normAutofit/>
+          </a:bodyPr>
+          <a:lstStyle/>
+          <a:p>
+            <a:pPr algn="l"/>
+            <a:r>
+              <a:rPr sz="1100" b="1">
+                <a:solidFill>
+                  <a:srgbClr val="157355"/>
+                </a:solidFill>
+                <a:latin typeface="Bricolage Grotesque"/>
+              </a:rPr>
+              <a:t>reacción</a:t>
+            </a:r>
+          </a:p>
+          <a:p>
+            <a:pPr algn="l"/>
+            <a:r>
+              <a:rPr sz="1000">
+                <a:solidFill>
+                  <a:srgbClr val="20242E"/>
+                </a:solidFill>
+                <a:latin typeface="Inter"/>
+              </a:rPr>
+              <a:t>Yo sí: he …</a:t>
+            </a:r>
+          </a:p>
+        </p:txBody>
+      </p:sp>
+      <p:sp>
+        <p:nvSpPr>
+          <p:cNvPr id="33" name="Tarjeta 11"/>
+          <p:cNvSpPr/>
+          <p:nvPr/>
+        </p:nvSpPr>
+        <p:spPr>
+          <a:xfrm>
+            <a:off x="9022842" y="4722876"/>
+            <a:ext cx="2708910" cy="898398"/>
+          </a:xfrm>
+          <a:prstGeom prst="roundRect">
+            <a:avLst>
+              <a:gd name="adj" fmla="val 6000"/>
+            </a:avLst>
+          </a:prstGeom>
+          <a:solidFill>
+            <a:srgbClr val="FFFFFF"/>
+          </a:solidFill>
+          <a:ln w="12700">
+            <a:solidFill>
+              <a:srgbClr val="E4E3DE"/>
+            </a:solidFill>
+          </a:ln>
+          <a:effectLst/>
+        </p:spPr>
+        <p:style>
+          <a:lnRef idx="1">
+            <a:schemeClr val="accent1"/>
+          </a:lnRef>
+          <a:fillRef idx="3">
+            <a:schemeClr val="accent1"/>
+          </a:fillRef>
+          <a:effectRef idx="2">
+            <a:schemeClr val="accent1"/>
+          </a:effectRef>
+          <a:fontRef idx="minor">
+            <a:schemeClr val="lt1"/>
+          </a:fontRef>
+        </p:style>
+        <p:txBody>
+          <a:bodyPr rtlCol="0" anchor="ctr"/>
+          <a:lstStyle/>
+          <a:p/>
+        </p:txBody>
+      </p:sp>
+      <p:sp>
+        <p:nvSpPr>
+          <p:cNvPr id="34" name="TarjetaTxt 11"/>
+          <p:cNvSpPr txBox="1"/>
+          <p:nvPr/>
+        </p:nvSpPr>
+        <p:spPr>
+          <a:xfrm>
+            <a:off x="9114282" y="4777740"/>
+            <a:ext cx="2526030" cy="788670"/>
+          </a:xfrm>
+          <a:prstGeom prst="rect">
+            <a:avLst/>
+          </a:prstGeom>
+          <a:noFill/>
+        </p:spPr>
+        <p:txBody>
+          <a:bodyPr wrap="square" anchor="t" lIns="45720" rIns="45720" tIns="27432" bIns="27432">
+            <a:normAutofit/>
+          </a:bodyPr>
+          <a:lstStyle/>
+          <a:p>
+            <a:pPr algn="l"/>
+            <a:r>
+              <a:rPr sz="1100" b="1">
+                <a:solidFill>
+                  <a:srgbClr val="157355"/>
+                </a:solidFill>
+                <a:latin typeface="Bricolage Grotesque"/>
+              </a:rPr>
+              <a:t>reacción</a:t>
+            </a:r>
+          </a:p>
+          <a:p>
+            <a:pPr algn="l"/>
+            <a:r>
+              <a:rPr sz="1000">
+                <a:solidFill>
+                  <a:srgbClr val="20242E"/>
+                </a:solidFill>
+                <a:latin typeface="Inter"/>
+              </a:rPr>
+              <a:t>Yo tampoco.</a:t>
+            </a:r>
+          </a:p>
+        </p:txBody>
+      </p:sp>
+      <p:sp>
+        <p:nvSpPr>
+          <p:cNvPr id="35" name="Tarjeta 12"/>
+          <p:cNvSpPr/>
+          <p:nvPr/>
+        </p:nvSpPr>
+        <p:spPr>
+          <a:xfrm>
+            <a:off x="457200" y="5749290"/>
+            <a:ext cx="2708910" cy="898398"/>
+          </a:xfrm>
+          <a:prstGeom prst="roundRect">
+            <a:avLst>
+              <a:gd name="adj" fmla="val 6000"/>
+            </a:avLst>
+          </a:prstGeom>
+          <a:solidFill>
+            <a:srgbClr val="FFFFFF"/>
+          </a:solidFill>
+          <a:ln w="12700">
+            <a:solidFill>
+              <a:srgbClr val="E4E3DE"/>
+            </a:solidFill>
+          </a:ln>
+          <a:effectLst/>
+        </p:spPr>
+        <p:style>
+          <a:lnRef idx="1">
+            <a:schemeClr val="accent1"/>
+          </a:lnRef>
+          <a:fillRef idx="3">
+            <a:schemeClr val="accent1"/>
+          </a:fillRef>
+          <a:effectRef idx="2">
+            <a:schemeClr val="accent1"/>
+          </a:effectRef>
+          <a:fontRef idx="minor">
+            <a:schemeClr val="lt1"/>
+          </a:fontRef>
+        </p:style>
+        <p:txBody>
+          <a:bodyPr rtlCol="0" anchor="ctr"/>
+          <a:lstStyle/>
+          <a:p/>
+        </p:txBody>
+      </p:sp>
+      <p:sp>
+        <p:nvSpPr>
+          <p:cNvPr id="36" name="TarjetaTxt 12"/>
+          <p:cNvSpPr txBox="1"/>
+          <p:nvPr/>
+        </p:nvSpPr>
+        <p:spPr>
+          <a:xfrm>
+            <a:off x="548640" y="5804154"/>
+            <a:ext cx="2526030" cy="788670"/>
+          </a:xfrm>
+          <a:prstGeom prst="rect">
+            <a:avLst/>
+          </a:prstGeom>
+          <a:noFill/>
+        </p:spPr>
+        <p:txBody>
+          <a:bodyPr wrap="square" anchor="t" lIns="45720" rIns="45720" tIns="27432" bIns="27432">
+            <a:normAutofit/>
+          </a:bodyPr>
+          <a:lstStyle/>
+          <a:p>
+            <a:pPr algn="l"/>
+            <a:r>
+              <a:rPr sz="1100" b="1">
+                <a:solidFill>
+                  <a:srgbClr val="157355"/>
+                </a:solidFill>
+                <a:latin typeface="Bricolage Grotesque"/>
+              </a:rPr>
+              <a:t>reacción</a:t>
+            </a:r>
+          </a:p>
+          <a:p>
+            <a:pPr algn="l"/>
+            <a:r>
+              <a:rPr sz="1000">
+                <a:solidFill>
+                  <a:srgbClr val="20242E"/>
+                </a:solidFill>
+                <a:latin typeface="Inter"/>
+              </a:rPr>
+              <a:t>¿En serio? ¿Cuándo?</a:t>
+            </a:r>
+          </a:p>
+        </p:txBody>
+      </p:sp>
+      <p:sp>
+        <p:nvSpPr>
+          <p:cNvPr id="37" name="Tarjeta 13"/>
+          <p:cNvSpPr/>
+          <p:nvPr/>
+        </p:nvSpPr>
+        <p:spPr>
+          <a:xfrm>
+            <a:off x="3312414" y="5749290"/>
+            <a:ext cx="2708910" cy="898398"/>
+          </a:xfrm>
+          <a:prstGeom prst="roundRect">
+            <a:avLst>
+              <a:gd name="adj" fmla="val 6000"/>
+            </a:avLst>
+          </a:prstGeom>
+          <a:solidFill>
+            <a:srgbClr val="FFFFFF"/>
+          </a:solidFill>
+          <a:ln w="12700">
+            <a:solidFill>
+              <a:srgbClr val="E4E3DE"/>
+            </a:solidFill>
+          </a:ln>
+          <a:effectLst/>
+        </p:spPr>
+        <p:style>
+          <a:lnRef idx="1">
+            <a:schemeClr val="accent1"/>
+          </a:lnRef>
+          <a:fillRef idx="3">
+            <a:schemeClr val="accent1"/>
+          </a:fillRef>
+          <a:effectRef idx="2">
+            <a:schemeClr val="accent1"/>
+          </a:effectRef>
+          <a:fontRef idx="minor">
+            <a:schemeClr val="lt1"/>
+          </a:fontRef>
+        </p:style>
+        <p:txBody>
+          <a:bodyPr rtlCol="0" anchor="ctr"/>
+          <a:lstStyle/>
+          <a:p/>
+        </p:txBody>
+      </p:sp>
+      <p:sp>
+        <p:nvSpPr>
+          <p:cNvPr id="38" name="TarjetaTxt 13"/>
+          <p:cNvSpPr txBox="1"/>
+          <p:nvPr/>
+        </p:nvSpPr>
+        <p:spPr>
+          <a:xfrm>
+            <a:off x="3403854" y="5804154"/>
+            <a:ext cx="2526030" cy="788670"/>
+          </a:xfrm>
+          <a:prstGeom prst="rect">
+            <a:avLst/>
+          </a:prstGeom>
+          <a:noFill/>
+        </p:spPr>
+        <p:txBody>
+          <a:bodyPr wrap="square" anchor="t" lIns="45720" rIns="45720" tIns="27432" bIns="27432">
+            <a:normAutofit/>
+          </a:bodyPr>
+          <a:lstStyle/>
+          <a:p>
+            <a:pPr algn="l"/>
+            <a:r>
+              <a:rPr sz="1100" b="1">
+                <a:solidFill>
+                  <a:srgbClr val="157355"/>
+                </a:solidFill>
+                <a:latin typeface="Bricolage Grotesque"/>
+              </a:rPr>
+              <a:t>reacción</a:t>
+            </a:r>
+          </a:p>
+          <a:p>
+            <a:pPr algn="l"/>
+            <a:r>
+              <a:rPr sz="1000">
+                <a:solidFill>
+                  <a:srgbClr val="20242E"/>
+                </a:solidFill>
+                <a:latin typeface="Inter"/>
+              </a:rPr>
+              <a:t>Yo también, pero solo una vez.</a:t>
+            </a:r>
+          </a:p>
+        </p:txBody>
+      </p:sp>
+    </p:spTree>
+  </p:cSld>
+  <p:clrMapOvr>
+    <a:masterClrMapping/>
+  </p:clrMapOvr>
+</p:sld>
+</file>
+
+<file path=ppt/slides/slide23.xml><?xml version="1.0" encoding="utf-8"?>
+<p:sld xmlns:a="http://schemas.openxmlformats.org/drawingml/2006/main" xmlns:p="http://schemas.openxmlformats.org/presentationml/2006/main" xmlns:r="http://schemas.openxmlformats.org/officeDocument/2006/relationships">
+  <p:cSld>
+    <p:spTree>
+      <p:nvGrpSpPr>
+        <p:cNvPr id="1" name=""/>
+        <p:cNvGrpSpPr/>
+        <p:nvPr/>
+      </p:nvGrpSpPr>
+      <p:grpSpPr/>
+      <p:sp>
+        <p:nvSpPr>
+          <p:cNvPr id="2" name="Fondo"/>
+          <p:cNvSpPr/>
+          <p:nvPr/>
+        </p:nvSpPr>
+        <p:spPr>
+          <a:xfrm>
+            <a:off x="0" y="0"/>
+            <a:ext cx="12191695" cy="6858000"/>
+          </a:xfrm>
+          <a:prstGeom prst="rect">
+            <a:avLst/>
+          </a:prstGeom>
+          <a:solidFill>
+            <a:srgbClr val="FCFBF8"/>
+          </a:solidFill>
+          <a:ln>
+            <a:noFill/>
+          </a:ln>
+          <a:effectLst/>
+        </p:spPr>
+        <p:style>
+          <a:lnRef idx="1">
+            <a:schemeClr val="accent1"/>
+          </a:lnRef>
+          <a:fillRef idx="3">
+            <a:schemeClr val="accent1"/>
+          </a:fillRef>
+          <a:effectRef idx="2">
+            <a:schemeClr val="accent1"/>
+          </a:effectRef>
+          <a:fontRef idx="minor">
+            <a:schemeClr val="lt1"/>
+          </a:fontRef>
+        </p:style>
+        <p:txBody>
+          <a:bodyPr rtlCol="0" anchor="ctr"/>
+          <a:lstStyle/>
+          <a:p/>
+        </p:txBody>
+      </p:sp>
+      <p:sp>
+        <p:nvSpPr>
+          <p:cNvPr id="3" name="Cabecera"/>
+          <p:cNvSpPr/>
+          <p:nvPr/>
+        </p:nvSpPr>
+        <p:spPr>
+          <a:xfrm>
+            <a:off x="0" y="0"/>
+            <a:ext cx="12191695" cy="1078992"/>
+          </a:xfrm>
+          <a:prstGeom prst="rect">
+            <a:avLst/>
+          </a:prstGeom>
+          <a:solidFill>
+            <a:srgbClr val="1E9E74"/>
+          </a:solidFill>
+          <a:ln>
+            <a:noFill/>
+          </a:ln>
+          <a:effectLst/>
+        </p:spPr>
+        <p:style>
+          <a:lnRef idx="1">
+            <a:schemeClr val="accent1"/>
+          </a:lnRef>
+          <a:fillRef idx="3">
+            <a:schemeClr val="accent1"/>
+          </a:fillRef>
+          <a:effectRef idx="2">
+            <a:schemeClr val="accent1"/>
+          </a:effectRef>
+          <a:fontRef idx="minor">
+            <a:schemeClr val="lt1"/>
+          </a:fontRef>
+        </p:style>
+        <p:txBody>
+          <a:bodyPr rtlCol="0" anchor="ctr"/>
+          <a:lstStyle/>
+          <a:p/>
+        </p:txBody>
+      </p:sp>
+      <p:sp>
+        <p:nvSpPr>
+          <p:cNvPr id="4" name="Chip"/>
+          <p:cNvSpPr/>
+          <p:nvPr/>
+        </p:nvSpPr>
+        <p:spPr>
+          <a:xfrm>
+            <a:off x="457200" y="182880"/>
+            <a:ext cx="3017520" cy="292608"/>
+          </a:xfrm>
+          <a:prstGeom prst="roundRect">
+            <a:avLst>
+              <a:gd name="adj" fmla="val 50000"/>
+            </a:avLst>
+          </a:prstGeom>
+          <a:solidFill>
+            <a:srgbClr val="FFFFFF"/>
+          </a:solidFill>
+          <a:ln>
+            <a:noFill/>
+          </a:ln>
+          <a:effectLst/>
+        </p:spPr>
+        <p:style>
+          <a:lnRef idx="1">
+            <a:schemeClr val="accent1"/>
+          </a:lnRef>
+          <a:fillRef idx="3">
+            <a:schemeClr val="accent1"/>
+          </a:fillRef>
+          <a:effectRef idx="2">
+            <a:schemeClr val="accent1"/>
+          </a:effectRef>
+          <a:fontRef idx="minor">
+            <a:schemeClr val="lt1"/>
+          </a:fontRef>
+        </p:style>
+        <p:txBody>
+          <a:bodyPr rtlCol="0" anchor="ctr"/>
+          <a:lstStyle/>
+          <a:p/>
+        </p:txBody>
+      </p:sp>
+      <p:sp>
+        <p:nvSpPr>
+          <p:cNvPr id="5" name="ChipTxt"/>
+          <p:cNvSpPr txBox="1"/>
+          <p:nvPr/>
+        </p:nvSpPr>
+        <p:spPr>
+          <a:xfrm>
+            <a:off x="457200" y="173736"/>
+            <a:ext cx="3017520" cy="310896"/>
+          </a:xfrm>
+          <a:prstGeom prst="rect">
+            <a:avLst/>
+          </a:prstGeom>
+          <a:noFill/>
+        </p:spPr>
+        <p:txBody>
+          <a:bodyPr wrap="square" anchor="ctr" lIns="45720" rIns="45720" tIns="27432" bIns="27432">
+            <a:normAutofit/>
+          </a:bodyPr>
+          <a:lstStyle/>
+          <a:p>
+            <a:pPr algn="ctr"/>
+            <a:r>
+              <a:rPr sz="950" b="1">
+                <a:solidFill>
+                  <a:srgbClr val="157355"/>
+                </a:solidFill>
+                <a:latin typeface="Inter"/>
+              </a:rPr>
+              <a:t>RETO 6 · SIMULATIE MET BEPERKING</a:t>
+            </a:r>
+          </a:p>
+        </p:txBody>
+      </p:sp>
+      <p:sp>
+        <p:nvSpPr>
+          <p:cNvPr id="6" name="Titulo"/>
+          <p:cNvSpPr txBox="1"/>
+          <p:nvPr/>
+        </p:nvSpPr>
+        <p:spPr>
+          <a:xfrm>
+            <a:off x="457200" y="502920"/>
+            <a:ext cx="8412480" cy="475488"/>
+          </a:xfrm>
+          <a:prstGeom prst="rect">
+            <a:avLst/>
+          </a:prstGeom>
+          <a:noFill/>
+        </p:spPr>
+        <p:txBody>
+          <a:bodyPr wrap="square" anchor="t" lIns="45720" rIns="45720" tIns="27432" bIns="27432">
+            <a:normAutofit/>
+          </a:bodyPr>
+          <a:lstStyle/>
+          <a:p>
+            <a:pPr algn="l"/>
+            <a:r>
+              <a:rPr sz="2700" b="1">
+                <a:solidFill>
+                  <a:srgbClr val="FFFFFF"/>
+                </a:solidFill>
+                <a:latin typeface="Bricolage Grotesque"/>
+              </a:rPr>
+              <a:t>La entrevista al guía</a:t>
+            </a:r>
+          </a:p>
+        </p:txBody>
+      </p:sp>
+      <p:sp>
+        <p:nvSpPr>
+          <p:cNvPr id="7" name="Badges"/>
+          <p:cNvSpPr txBox="1"/>
+          <p:nvPr/>
+        </p:nvSpPr>
+        <p:spPr>
+          <a:xfrm>
+            <a:off x="9052560" y="256032"/>
+            <a:ext cx="2651760" cy="640080"/>
+          </a:xfrm>
+          <a:prstGeom prst="rect">
+            <a:avLst/>
+          </a:prstGeom>
+          <a:noFill/>
+        </p:spPr>
+        <p:txBody>
+          <a:bodyPr wrap="square" anchor="t" lIns="45720" rIns="45720" tIns="27432" bIns="27432">
+            <a:normAutofit/>
+          </a:bodyPr>
+          <a:lstStyle/>
+          <a:p>
+            <a:pPr algn="r"/>
+            <a:r>
+              <a:rPr sz="1000">
+                <a:solidFill>
+                  <a:srgbClr val="E4F4EE"/>
+                </a:solidFill>
+                <a:latin typeface="Inter"/>
+              </a:rPr>
+              <a:t>👨‍👩‍👧 En grupos</a:t>
+            </a:r>
+          </a:p>
+          <a:p>
+            <a:pPr algn="r"/>
+            <a:r>
+              <a:rPr sz="1000">
+                <a:solidFill>
+                  <a:srgbClr val="E4F4EE"/>
+                </a:solidFill>
+                <a:latin typeface="Inter"/>
+              </a:rPr>
+              <a:t>± 18 min · ★★★</a:t>
+            </a:r>
+          </a:p>
+        </p:txBody>
+      </p:sp>
+      <p:sp>
+        <p:nvSpPr>
+          <p:cNvPr id="8" name="Gancho"/>
+          <p:cNvSpPr txBox="1"/>
+          <p:nvPr/>
+        </p:nvSpPr>
+        <p:spPr>
+          <a:xfrm>
+            <a:off x="457200" y="1225296"/>
+            <a:ext cx="11274552" cy="566928"/>
+          </a:xfrm>
+          <a:prstGeom prst="rect">
+            <a:avLst/>
+          </a:prstGeom>
+          <a:noFill/>
+        </p:spPr>
+        <p:txBody>
+          <a:bodyPr wrap="square" anchor="t" lIns="45720" rIns="45720" tIns="27432" bIns="27432">
+            <a:normAutofit/>
+          </a:bodyPr>
+          <a:lstStyle/>
+          <a:p>
+            <a:pPr algn="l"/>
+            <a:r>
+              <a:rPr sz="1600" b="1">
+                <a:solidFill>
+                  <a:srgbClr val="157355"/>
+                </a:solidFill>
+                <a:latin typeface="Bricolage Grotesque"/>
+              </a:rPr>
+              <a:t>Treinta años subiendo la misma montaña. ¿Qué ha cambiado?</a:t>
+            </a:r>
+          </a:p>
+          <a:p>
+            <a:pPr algn="l"/>
+            <a:r>
+              <a:rPr sz="1100" i="1">
+                <a:solidFill>
+                  <a:srgbClr val="6A6E78"/>
+                </a:solidFill>
+                <a:latin typeface="Inter"/>
+              </a:rPr>
+              <a:t>Dertig jaar dezelfde berg op. Wat is er veranderd?</a:t>
+            </a:r>
+          </a:p>
+        </p:txBody>
+      </p:sp>
+      <p:sp>
+        <p:nvSpPr>
+          <p:cNvPr id="9" name="ReglaCaja"/>
+          <p:cNvSpPr/>
+          <p:nvPr/>
+        </p:nvSpPr>
+        <p:spPr>
+          <a:xfrm>
+            <a:off x="457200" y="1847088"/>
+            <a:ext cx="11274552" cy="658368"/>
+          </a:xfrm>
+          <a:prstGeom prst="roundRect">
+            <a:avLst>
+              <a:gd name="adj" fmla="val 5000"/>
+            </a:avLst>
+          </a:prstGeom>
+          <a:solidFill>
+            <a:srgbClr val="FBF3D6"/>
+          </a:solidFill>
+          <a:ln>
+            <a:noFill/>
+          </a:ln>
+          <a:effectLst/>
+        </p:spPr>
+        <p:style>
+          <a:lnRef idx="1">
+            <a:schemeClr val="accent1"/>
+          </a:lnRef>
+          <a:fillRef idx="3">
+            <a:schemeClr val="accent1"/>
+          </a:fillRef>
+          <a:effectRef idx="2">
+            <a:schemeClr val="accent1"/>
+          </a:effectRef>
+          <a:fontRef idx="minor">
+            <a:schemeClr val="lt1"/>
+          </a:fontRef>
+        </p:style>
+        <p:txBody>
+          <a:bodyPr rtlCol="0" anchor="ctr"/>
+          <a:lstStyle/>
+          <a:p/>
+        </p:txBody>
+      </p:sp>
+      <p:sp>
+        <p:nvSpPr>
+          <p:cNvPr id="10" name="ReglaTxt"/>
+          <p:cNvSpPr txBox="1"/>
+          <p:nvPr/>
+        </p:nvSpPr>
+        <p:spPr>
+          <a:xfrm>
+            <a:off x="603504" y="1883664"/>
+            <a:ext cx="10972800" cy="585216"/>
+          </a:xfrm>
+          <a:prstGeom prst="rect">
+            <a:avLst/>
+          </a:prstGeom>
+          <a:noFill/>
+        </p:spPr>
+        <p:txBody>
+          <a:bodyPr wrap="square" anchor="t" lIns="45720" rIns="45720" tIns="27432" bIns="27432">
+            <a:normAutofit/>
+          </a:bodyPr>
+          <a:lstStyle/>
+          <a:p>
+            <a:pPr algn="l"/>
+            <a:r>
+              <a:rPr sz="850" b="1">
+                <a:solidFill>
+                  <a:srgbClr val="B7860B"/>
+                </a:solidFill>
+                <a:latin typeface="Inter"/>
+              </a:rPr>
+              <a:t>LA REGLA DEL RETO</a:t>
+            </a:r>
+          </a:p>
+          <a:p>
+            <a:pPr algn="l"/>
+            <a:r>
+              <a:rPr sz="1100">
+                <a:solidFill>
+                  <a:srgbClr val="20242E"/>
+                </a:solidFill>
+                <a:latin typeface="Inter"/>
+              </a:rPr>
+              <a:t>Alle vijf de vragen staan in het perfecto compuesto en mogen niet met ja of nee te beantwoorden zijn. Een vraag die «sí» oplevert, telt niet mee.</a:t>
+            </a:r>
+          </a:p>
+        </p:txBody>
+      </p:sp>
+      <p:sp>
+        <p:nvSpPr>
+          <p:cNvPr id="11" name="Tarjeta 0"/>
+          <p:cNvSpPr/>
+          <p:nvPr/>
+        </p:nvSpPr>
+        <p:spPr>
+          <a:xfrm>
+            <a:off x="457200" y="2670048"/>
+            <a:ext cx="2708910" cy="898398"/>
+          </a:xfrm>
+          <a:prstGeom prst="roundRect">
+            <a:avLst>
+              <a:gd name="adj" fmla="val 6000"/>
+            </a:avLst>
+          </a:prstGeom>
+          <a:solidFill>
+            <a:srgbClr val="FFFFFF"/>
+          </a:solidFill>
+          <a:ln w="12700">
+            <a:solidFill>
+              <a:srgbClr val="E4E3DE"/>
+            </a:solidFill>
+          </a:ln>
+          <a:effectLst/>
+        </p:spPr>
+        <p:style>
+          <a:lnRef idx="1">
+            <a:schemeClr val="accent1"/>
+          </a:lnRef>
+          <a:fillRef idx="3">
+            <a:schemeClr val="accent1"/>
+          </a:fillRef>
+          <a:effectRef idx="2">
+            <a:schemeClr val="accent1"/>
+          </a:effectRef>
+          <a:fontRef idx="minor">
+            <a:schemeClr val="lt1"/>
+          </a:fontRef>
+        </p:style>
+        <p:txBody>
+          <a:bodyPr rtlCol="0" anchor="ctr"/>
+          <a:lstStyle/>
+          <a:p/>
+        </p:txBody>
+      </p:sp>
+      <p:sp>
+        <p:nvSpPr>
+          <p:cNvPr id="12" name="TarjetaTxt 0"/>
+          <p:cNvSpPr txBox="1"/>
+          <p:nvPr/>
+        </p:nvSpPr>
+        <p:spPr>
+          <a:xfrm>
+            <a:off x="548640" y="2724912"/>
+            <a:ext cx="2526030" cy="788670"/>
+          </a:xfrm>
+          <a:prstGeom prst="rect">
+            <a:avLst/>
+          </a:prstGeom>
+          <a:noFill/>
+        </p:spPr>
+        <p:txBody>
+          <a:bodyPr wrap="square" anchor="t" lIns="45720" rIns="45720" tIns="27432" bIns="27432">
+            <a:normAutofit/>
+          </a:bodyPr>
+          <a:lstStyle/>
+          <a:p>
+            <a:pPr algn="l"/>
+            <a:r>
+              <a:rPr sz="1100" b="1">
+                <a:solidFill>
+                  <a:srgbClr val="157355"/>
+                </a:solidFill>
+                <a:latin typeface="Bricolage Grotesque"/>
+              </a:rPr>
+              <a:t>nombre</a:t>
+            </a:r>
+          </a:p>
+          <a:p>
+            <a:pPr algn="l"/>
+            <a:r>
+              <a:rPr sz="1000">
+                <a:solidFill>
+                  <a:srgbClr val="20242E"/>
+                </a:solidFill>
+                <a:latin typeface="Inter"/>
+              </a:rPr>
+              <a:t>Rosa Quispe, guía en el Camino Inca desde 1994</a:t>
+            </a:r>
+          </a:p>
+        </p:txBody>
+      </p:sp>
+      <p:sp>
+        <p:nvSpPr>
+          <p:cNvPr id="13" name="Tarjeta 1"/>
+          <p:cNvSpPr/>
+          <p:nvPr/>
+        </p:nvSpPr>
+        <p:spPr>
+          <a:xfrm>
+            <a:off x="3312414" y="2670048"/>
+            <a:ext cx="2708910" cy="898398"/>
+          </a:xfrm>
+          <a:prstGeom prst="roundRect">
+            <a:avLst>
+              <a:gd name="adj" fmla="val 6000"/>
+            </a:avLst>
+          </a:prstGeom>
+          <a:solidFill>
+            <a:srgbClr val="FFFFFF"/>
+          </a:solidFill>
+          <a:ln w="12700">
+            <a:solidFill>
+              <a:srgbClr val="E4E3DE"/>
+            </a:solidFill>
+          </a:ln>
+          <a:effectLst/>
+        </p:spPr>
+        <p:style>
+          <a:lnRef idx="1">
+            <a:schemeClr val="accent1"/>
+          </a:lnRef>
+          <a:fillRef idx="3">
+            <a:schemeClr val="accent1"/>
+          </a:fillRef>
+          <a:effectRef idx="2">
+            <a:schemeClr val="accent1"/>
+          </a:effectRef>
+          <a:fontRef idx="minor">
+            <a:schemeClr val="lt1"/>
+          </a:fontRef>
+        </p:style>
+        <p:txBody>
+          <a:bodyPr rtlCol="0" anchor="ctr"/>
+          <a:lstStyle/>
+          <a:p/>
+        </p:txBody>
+      </p:sp>
+      <p:sp>
+        <p:nvSpPr>
+          <p:cNvPr id="14" name="TarjetaTxt 1"/>
+          <p:cNvSpPr txBox="1"/>
+          <p:nvPr/>
+        </p:nvSpPr>
+        <p:spPr>
+          <a:xfrm>
+            <a:off x="3403854" y="2724912"/>
+            <a:ext cx="2526030" cy="788670"/>
+          </a:xfrm>
+          <a:prstGeom prst="rect">
+            <a:avLst/>
+          </a:prstGeom>
+          <a:noFill/>
+        </p:spPr>
+        <p:txBody>
+          <a:bodyPr wrap="square" anchor="t" lIns="45720" rIns="45720" tIns="27432" bIns="27432">
+            <a:normAutofit/>
+          </a:bodyPr>
+          <a:lstStyle/>
+          <a:p>
+            <a:pPr algn="l"/>
+            <a:r>
+              <a:rPr sz="1100" b="1">
+                <a:solidFill>
+                  <a:srgbClr val="157355"/>
+                </a:solidFill>
+                <a:latin typeface="Bricolage Grotesque"/>
+              </a:rPr>
+              <a:t>antes</a:t>
+            </a:r>
+          </a:p>
+          <a:p>
+            <a:pPr algn="l"/>
+            <a:r>
+              <a:rPr sz="1000">
+                <a:solidFill>
+                  <a:srgbClr val="20242E"/>
+                </a:solidFill>
+                <a:latin typeface="Inter"/>
+              </a:rPr>
+              <a:t>grupos de seis personas, sin permiso, sin límite de días</a:t>
+            </a:r>
+          </a:p>
+        </p:txBody>
+      </p:sp>
+      <p:sp>
+        <p:nvSpPr>
+          <p:cNvPr id="15" name="Tarjeta 2"/>
+          <p:cNvSpPr/>
+          <p:nvPr/>
+        </p:nvSpPr>
+        <p:spPr>
+          <a:xfrm>
+            <a:off x="6167628" y="2670048"/>
+            <a:ext cx="2708910" cy="898398"/>
+          </a:xfrm>
+          <a:prstGeom prst="roundRect">
+            <a:avLst>
+              <a:gd name="adj" fmla="val 6000"/>
+            </a:avLst>
+          </a:prstGeom>
+          <a:solidFill>
+            <a:srgbClr val="FFFFFF"/>
+          </a:solidFill>
+          <a:ln w="12700">
+            <a:solidFill>
+              <a:srgbClr val="E4E3DE"/>
+            </a:solidFill>
+          </a:ln>
+          <a:effectLst/>
+        </p:spPr>
+        <p:style>
+          <a:lnRef idx="1">
+            <a:schemeClr val="accent1"/>
+          </a:lnRef>
+          <a:fillRef idx="3">
+            <a:schemeClr val="accent1"/>
+          </a:fillRef>
+          <a:effectRef idx="2">
+            <a:schemeClr val="accent1"/>
+          </a:effectRef>
+          <a:fontRef idx="minor">
+            <a:schemeClr val="lt1"/>
+          </a:fontRef>
+        </p:style>
+        <p:txBody>
+          <a:bodyPr rtlCol="0" anchor="ctr"/>
+          <a:lstStyle/>
+          <a:p/>
+        </p:txBody>
+      </p:sp>
+      <p:sp>
+        <p:nvSpPr>
+          <p:cNvPr id="16" name="TarjetaTxt 2"/>
+          <p:cNvSpPr txBox="1"/>
+          <p:nvPr/>
+        </p:nvSpPr>
+        <p:spPr>
+          <a:xfrm>
+            <a:off x="6259068" y="2724912"/>
+            <a:ext cx="2526030" cy="788670"/>
+          </a:xfrm>
+          <a:prstGeom prst="rect">
+            <a:avLst/>
+          </a:prstGeom>
+          <a:noFill/>
+        </p:spPr>
+        <p:txBody>
+          <a:bodyPr wrap="square" anchor="t" lIns="45720" rIns="45720" tIns="27432" bIns="27432">
+            <a:normAutofit/>
+          </a:bodyPr>
+          <a:lstStyle/>
+          <a:p>
+            <a:pPr algn="l"/>
+            <a:r>
+              <a:rPr sz="1100" b="1">
+                <a:solidFill>
+                  <a:srgbClr val="157355"/>
+                </a:solidFill>
+                <a:latin typeface="Bricolage Grotesque"/>
+              </a:rPr>
+              <a:t>ahora</a:t>
+            </a:r>
+          </a:p>
+          <a:p>
+            <a:pPr algn="l"/>
+            <a:r>
+              <a:rPr sz="1000">
+                <a:solidFill>
+                  <a:srgbClr val="20242E"/>
+                </a:solidFill>
+                <a:latin typeface="Inter"/>
+              </a:rPr>
+              <a:t>grupos de dieciséis, permiso con meses de antelación, cupo diario</a:t>
+            </a:r>
+          </a:p>
+        </p:txBody>
+      </p:sp>
+      <p:sp>
+        <p:nvSpPr>
+          <p:cNvPr id="17" name="Tarjeta 3"/>
+          <p:cNvSpPr/>
+          <p:nvPr/>
+        </p:nvSpPr>
+        <p:spPr>
+          <a:xfrm>
+            <a:off x="9022842" y="2670048"/>
+            <a:ext cx="2708910" cy="898398"/>
+          </a:xfrm>
+          <a:prstGeom prst="roundRect">
+            <a:avLst>
+              <a:gd name="adj" fmla="val 6000"/>
+            </a:avLst>
+          </a:prstGeom>
+          <a:solidFill>
+            <a:srgbClr val="FFFFFF"/>
+          </a:solidFill>
+          <a:ln w="12700">
+            <a:solidFill>
+              <a:srgbClr val="E4E3DE"/>
+            </a:solidFill>
+          </a:ln>
+          <a:effectLst/>
+        </p:spPr>
+        <p:style>
+          <a:lnRef idx="1">
+            <a:schemeClr val="accent1"/>
+          </a:lnRef>
+          <a:fillRef idx="3">
+            <a:schemeClr val="accent1"/>
+          </a:fillRef>
+          <a:effectRef idx="2">
+            <a:schemeClr val="accent1"/>
+          </a:effectRef>
+          <a:fontRef idx="minor">
+            <a:schemeClr val="lt1"/>
+          </a:fontRef>
+        </p:style>
+        <p:txBody>
+          <a:bodyPr rtlCol="0" anchor="ctr"/>
+          <a:lstStyle/>
+          <a:p/>
+        </p:txBody>
+      </p:sp>
+      <p:sp>
+        <p:nvSpPr>
+          <p:cNvPr id="18" name="TarjetaTxt 3"/>
+          <p:cNvSpPr txBox="1"/>
+          <p:nvPr/>
+        </p:nvSpPr>
+        <p:spPr>
+          <a:xfrm>
+            <a:off x="9114282" y="2724912"/>
+            <a:ext cx="2526030" cy="788670"/>
+          </a:xfrm>
+          <a:prstGeom prst="rect">
+            <a:avLst/>
+          </a:prstGeom>
+          <a:noFill/>
+        </p:spPr>
+        <p:txBody>
+          <a:bodyPr wrap="square" anchor="t" lIns="45720" rIns="45720" tIns="27432" bIns="27432">
+            <a:normAutofit/>
+          </a:bodyPr>
+          <a:lstStyle/>
+          <a:p>
+            <a:pPr algn="l"/>
+            <a:r>
+              <a:rPr sz="1100" b="1">
+                <a:solidFill>
+                  <a:srgbClr val="157355"/>
+                </a:solidFill>
+                <a:latin typeface="Bricolage Grotesque"/>
+              </a:rPr>
+              <a:t>lo mejor</a:t>
+            </a:r>
+          </a:p>
+          <a:p>
+            <a:pPr algn="l"/>
+            <a:r>
+              <a:rPr sz="1000">
+                <a:solidFill>
+                  <a:srgbClr val="20242E"/>
+                </a:solidFill>
+                <a:latin typeface="Inter"/>
+              </a:rPr>
+              <a:t>que ahora los guías son de la zona y cobran mejor</a:t>
+            </a:r>
+          </a:p>
+        </p:txBody>
+      </p:sp>
+      <p:sp>
+        <p:nvSpPr>
+          <p:cNvPr id="19" name="Tarjeta 4"/>
+          <p:cNvSpPr/>
+          <p:nvPr/>
+        </p:nvSpPr>
+        <p:spPr>
+          <a:xfrm>
+            <a:off x="457200" y="3696462"/>
+            <a:ext cx="2708910" cy="898398"/>
+          </a:xfrm>
+          <a:prstGeom prst="roundRect">
+            <a:avLst>
+              <a:gd name="adj" fmla="val 6000"/>
+            </a:avLst>
+          </a:prstGeom>
+          <a:solidFill>
+            <a:srgbClr val="FFFFFF"/>
+          </a:solidFill>
+          <a:ln w="12700">
+            <a:solidFill>
+              <a:srgbClr val="E4E3DE"/>
+            </a:solidFill>
+          </a:ln>
+          <a:effectLst/>
+        </p:spPr>
+        <p:style>
+          <a:lnRef idx="1">
+            <a:schemeClr val="accent1"/>
+          </a:lnRef>
+          <a:fillRef idx="3">
+            <a:schemeClr val="accent1"/>
+          </a:fillRef>
+          <a:effectRef idx="2">
+            <a:schemeClr val="accent1"/>
+          </a:effectRef>
+          <a:fontRef idx="minor">
+            <a:schemeClr val="lt1"/>
+          </a:fontRef>
+        </p:style>
+        <p:txBody>
+          <a:bodyPr rtlCol="0" anchor="ctr"/>
+          <a:lstStyle/>
+          <a:p/>
+        </p:txBody>
+      </p:sp>
+      <p:sp>
+        <p:nvSpPr>
+          <p:cNvPr id="20" name="TarjetaTxt 4"/>
+          <p:cNvSpPr txBox="1"/>
+          <p:nvPr/>
+        </p:nvSpPr>
+        <p:spPr>
+          <a:xfrm>
+            <a:off x="548640" y="3751326"/>
+            <a:ext cx="2526030" cy="788670"/>
+          </a:xfrm>
+          <a:prstGeom prst="rect">
+            <a:avLst/>
+          </a:prstGeom>
+          <a:noFill/>
+        </p:spPr>
+        <p:txBody>
+          <a:bodyPr wrap="square" anchor="t" lIns="45720" rIns="45720" tIns="27432" bIns="27432">
+            <a:normAutofit/>
+          </a:bodyPr>
+          <a:lstStyle/>
+          <a:p>
+            <a:pPr algn="l"/>
+            <a:r>
+              <a:rPr sz="1100" b="1">
+                <a:solidFill>
+                  <a:srgbClr val="157355"/>
+                </a:solidFill>
+                <a:latin typeface="Bricolage Grotesque"/>
+              </a:rPr>
+              <a:t>lo peor</a:t>
+            </a:r>
+          </a:p>
+          <a:p>
+            <a:pPr algn="l"/>
+            <a:r>
+              <a:rPr sz="1000">
+                <a:solidFill>
+                  <a:srgbClr val="20242E"/>
+                </a:solidFill>
+                <a:latin typeface="Inter"/>
+              </a:rPr>
+              <a:t>que hay basura donde antes no había nadie</a:t>
+            </a:r>
+          </a:p>
+        </p:txBody>
+      </p:sp>
+      <p:sp>
+        <p:nvSpPr>
+          <p:cNvPr id="21" name="Tarjeta 5"/>
+          <p:cNvSpPr/>
+          <p:nvPr/>
+        </p:nvSpPr>
+        <p:spPr>
+          <a:xfrm>
+            <a:off x="3312414" y="3696462"/>
+            <a:ext cx="2708910" cy="898398"/>
+          </a:xfrm>
+          <a:prstGeom prst="roundRect">
+            <a:avLst>
+              <a:gd name="adj" fmla="val 6000"/>
+            </a:avLst>
+          </a:prstGeom>
+          <a:solidFill>
+            <a:srgbClr val="FFFFFF"/>
+          </a:solidFill>
+          <a:ln w="12700">
+            <a:solidFill>
+              <a:srgbClr val="E4E3DE"/>
+            </a:solidFill>
+          </a:ln>
+          <a:effectLst/>
+        </p:spPr>
+        <p:style>
+          <a:lnRef idx="1">
+            <a:schemeClr val="accent1"/>
+          </a:lnRef>
+          <a:fillRef idx="3">
+            <a:schemeClr val="accent1"/>
+          </a:fillRef>
+          <a:effectRef idx="2">
+            <a:schemeClr val="accent1"/>
+          </a:effectRef>
+          <a:fontRef idx="minor">
+            <a:schemeClr val="lt1"/>
+          </a:fontRef>
+        </p:style>
+        <p:txBody>
+          <a:bodyPr rtlCol="0" anchor="ctr"/>
+          <a:lstStyle/>
+          <a:p/>
+        </p:txBody>
+      </p:sp>
+      <p:sp>
+        <p:nvSpPr>
+          <p:cNvPr id="22" name="TarjetaTxt 5"/>
+          <p:cNvSpPr txBox="1"/>
+          <p:nvPr/>
+        </p:nvSpPr>
+        <p:spPr>
+          <a:xfrm>
+            <a:off x="3403854" y="3751326"/>
+            <a:ext cx="2526030" cy="788670"/>
+          </a:xfrm>
+          <a:prstGeom prst="rect">
+            <a:avLst/>
+          </a:prstGeom>
+          <a:noFill/>
+        </p:spPr>
+        <p:txBody>
+          <a:bodyPr wrap="square" anchor="t" lIns="45720" rIns="45720" tIns="27432" bIns="27432">
+            <a:normAutofit/>
+          </a:bodyPr>
+          <a:lstStyle/>
+          <a:p>
+            <a:pPr algn="l"/>
+            <a:r>
+              <a:rPr sz="1100" b="1">
+                <a:solidFill>
+                  <a:srgbClr val="157355"/>
+                </a:solidFill>
+                <a:latin typeface="Bricolage Grotesque"/>
+              </a:rPr>
+              <a:t>modelo</a:t>
+            </a:r>
+          </a:p>
+          <a:p>
+            <a:pPr algn="l"/>
+            <a:r>
+              <a:rPr sz="1000">
+                <a:solidFill>
+                  <a:srgbClr val="20242E"/>
+                </a:solidFill>
+                <a:latin typeface="Inter"/>
+              </a:rPr>
+              <a:t>¿Qué ha cambiado más en estos años?</a:t>
+            </a:r>
+          </a:p>
+        </p:txBody>
+      </p:sp>
+      <p:sp>
+        <p:nvSpPr>
+          <p:cNvPr id="23" name="Tarjeta 6"/>
+          <p:cNvSpPr/>
+          <p:nvPr/>
+        </p:nvSpPr>
+        <p:spPr>
+          <a:xfrm>
+            <a:off x="6167628" y="3696462"/>
+            <a:ext cx="2708910" cy="898398"/>
+          </a:xfrm>
+          <a:prstGeom prst="roundRect">
+            <a:avLst>
+              <a:gd name="adj" fmla="val 6000"/>
+            </a:avLst>
+          </a:prstGeom>
+          <a:solidFill>
+            <a:srgbClr val="FFFFFF"/>
+          </a:solidFill>
+          <a:ln w="12700">
+            <a:solidFill>
+              <a:srgbClr val="E4E3DE"/>
+            </a:solidFill>
+          </a:ln>
+          <a:effectLst/>
+        </p:spPr>
+        <p:style>
+          <a:lnRef idx="1">
+            <a:schemeClr val="accent1"/>
+          </a:lnRef>
+          <a:fillRef idx="3">
+            <a:schemeClr val="accent1"/>
+          </a:fillRef>
+          <a:effectRef idx="2">
+            <a:schemeClr val="accent1"/>
+          </a:effectRef>
+          <a:fontRef idx="minor">
+            <a:schemeClr val="lt1"/>
+          </a:fontRef>
+        </p:style>
+        <p:txBody>
+          <a:bodyPr rtlCol="0" anchor="ctr"/>
+          <a:lstStyle/>
+          <a:p/>
+        </p:txBody>
+      </p:sp>
+      <p:sp>
+        <p:nvSpPr>
+          <p:cNvPr id="24" name="TarjetaTxt 6"/>
+          <p:cNvSpPr txBox="1"/>
+          <p:nvPr/>
+        </p:nvSpPr>
+        <p:spPr>
+          <a:xfrm>
+            <a:off x="6259068" y="3751326"/>
+            <a:ext cx="2526030" cy="788670"/>
+          </a:xfrm>
+          <a:prstGeom prst="rect">
+            <a:avLst/>
+          </a:prstGeom>
+          <a:noFill/>
+        </p:spPr>
+        <p:txBody>
+          <a:bodyPr wrap="square" anchor="t" lIns="45720" rIns="45720" tIns="27432" bIns="27432">
+            <a:normAutofit/>
+          </a:bodyPr>
+          <a:lstStyle/>
+          <a:p>
+            <a:pPr algn="l"/>
+            <a:r>
+              <a:rPr sz="1100" b="1">
+                <a:solidFill>
+                  <a:srgbClr val="157355"/>
+                </a:solidFill>
+                <a:latin typeface="Bricolage Grotesque"/>
+              </a:rPr>
+              <a:t>modelo</a:t>
+            </a:r>
+          </a:p>
+          <a:p>
+            <a:pPr algn="l"/>
+            <a:r>
+              <a:rPr sz="1000">
+                <a:solidFill>
+                  <a:srgbClr val="20242E"/>
+                </a:solidFill>
+                <a:latin typeface="Inter"/>
+              </a:rPr>
+              <a:t>¿Qué ha desaparecido del camino?</a:t>
+            </a:r>
+          </a:p>
+        </p:txBody>
+      </p:sp>
+      <p:sp>
+        <p:nvSpPr>
+          <p:cNvPr id="25" name="Tarjeta 7"/>
+          <p:cNvSpPr/>
+          <p:nvPr/>
+        </p:nvSpPr>
+        <p:spPr>
+          <a:xfrm>
+            <a:off x="9022842" y="3696462"/>
+            <a:ext cx="2708910" cy="898398"/>
+          </a:xfrm>
+          <a:prstGeom prst="roundRect">
+            <a:avLst>
+              <a:gd name="adj" fmla="val 6000"/>
+            </a:avLst>
+          </a:prstGeom>
+          <a:solidFill>
+            <a:srgbClr val="FFFFFF"/>
+          </a:solidFill>
+          <a:ln w="12700">
+            <a:solidFill>
+              <a:srgbClr val="E4E3DE"/>
+            </a:solidFill>
+          </a:ln>
+          <a:effectLst/>
+        </p:spPr>
+        <p:style>
+          <a:lnRef idx="1">
+            <a:schemeClr val="accent1"/>
+          </a:lnRef>
+          <a:fillRef idx="3">
+            <a:schemeClr val="accent1"/>
+          </a:fillRef>
+          <a:effectRef idx="2">
+            <a:schemeClr val="accent1"/>
+          </a:effectRef>
+          <a:fontRef idx="minor">
+            <a:schemeClr val="lt1"/>
+          </a:fontRef>
+        </p:style>
+        <p:txBody>
+          <a:bodyPr rtlCol="0" anchor="ctr"/>
+          <a:lstStyle/>
+          <a:p/>
+        </p:txBody>
+      </p:sp>
+      <p:sp>
+        <p:nvSpPr>
+          <p:cNvPr id="26" name="TarjetaTxt 7"/>
+          <p:cNvSpPr txBox="1"/>
+          <p:nvPr/>
+        </p:nvSpPr>
+        <p:spPr>
+          <a:xfrm>
+            <a:off x="9114282" y="3751326"/>
+            <a:ext cx="2526030" cy="788670"/>
+          </a:xfrm>
+          <a:prstGeom prst="rect">
+            <a:avLst/>
+          </a:prstGeom>
+          <a:noFill/>
+        </p:spPr>
+        <p:txBody>
+          <a:bodyPr wrap="square" anchor="t" lIns="45720" rIns="45720" tIns="27432" bIns="27432">
+            <a:normAutofit/>
+          </a:bodyPr>
+          <a:lstStyle/>
+          <a:p>
+            <a:pPr algn="l"/>
+            <a:r>
+              <a:rPr sz="1100" b="1">
+                <a:solidFill>
+                  <a:srgbClr val="157355"/>
+                </a:solidFill>
+                <a:latin typeface="Bricolage Grotesque"/>
+              </a:rPr>
+              <a:t>modelo</a:t>
+            </a:r>
+          </a:p>
+          <a:p>
+            <a:pPr algn="l"/>
+            <a:r>
+              <a:rPr sz="1000">
+                <a:solidFill>
+                  <a:srgbClr val="20242E"/>
+                </a:solidFill>
+                <a:latin typeface="Inter"/>
+              </a:rPr>
+              <a:t>¿Qué ha mejorado para la gente de aquí?</a:t>
+            </a:r>
+          </a:p>
+        </p:txBody>
+      </p:sp>
+      <p:sp>
+        <p:nvSpPr>
+          <p:cNvPr id="27" name="Tarjeta 8"/>
+          <p:cNvSpPr/>
+          <p:nvPr/>
+        </p:nvSpPr>
+        <p:spPr>
+          <a:xfrm>
+            <a:off x="457200" y="4722876"/>
+            <a:ext cx="2708910" cy="898398"/>
+          </a:xfrm>
+          <a:prstGeom prst="roundRect">
+            <a:avLst>
+              <a:gd name="adj" fmla="val 6000"/>
+            </a:avLst>
+          </a:prstGeom>
+          <a:solidFill>
+            <a:srgbClr val="FFFFFF"/>
+          </a:solidFill>
+          <a:ln w="12700">
+            <a:solidFill>
+              <a:srgbClr val="E4E3DE"/>
+            </a:solidFill>
+          </a:ln>
+          <a:effectLst/>
+        </p:spPr>
+        <p:style>
+          <a:lnRef idx="1">
+            <a:schemeClr val="accent1"/>
+          </a:lnRef>
+          <a:fillRef idx="3">
+            <a:schemeClr val="accent1"/>
+          </a:fillRef>
+          <a:effectRef idx="2">
+            <a:schemeClr val="accent1"/>
+          </a:effectRef>
+          <a:fontRef idx="minor">
+            <a:schemeClr val="lt1"/>
+          </a:fontRef>
+        </p:style>
+        <p:txBody>
+          <a:bodyPr rtlCol="0" anchor="ctr"/>
+          <a:lstStyle/>
+          <a:p/>
+        </p:txBody>
+      </p:sp>
+      <p:sp>
+        <p:nvSpPr>
+          <p:cNvPr id="28" name="TarjetaTxt 8"/>
+          <p:cNvSpPr txBox="1"/>
+          <p:nvPr/>
+        </p:nvSpPr>
+        <p:spPr>
+          <a:xfrm>
+            <a:off x="548640" y="4777740"/>
+            <a:ext cx="2526030" cy="788670"/>
+          </a:xfrm>
+          <a:prstGeom prst="rect">
+            <a:avLst/>
+          </a:prstGeom>
+          <a:noFill/>
+        </p:spPr>
+        <p:txBody>
+          <a:bodyPr wrap="square" anchor="t" lIns="45720" rIns="45720" tIns="27432" bIns="27432">
+            <a:normAutofit/>
+          </a:bodyPr>
+          <a:lstStyle/>
+          <a:p>
+            <a:pPr algn="l"/>
+            <a:r>
+              <a:rPr sz="1100" b="1">
+                <a:solidFill>
+                  <a:srgbClr val="157355"/>
+                </a:solidFill>
+                <a:latin typeface="Bricolage Grotesque"/>
+              </a:rPr>
+              <a:t>modelo</a:t>
+            </a:r>
+          </a:p>
+          <a:p>
+            <a:pPr algn="l"/>
+            <a:r>
+              <a:rPr sz="1000">
+                <a:solidFill>
+                  <a:srgbClr val="20242E"/>
+                </a:solidFill>
+                <a:latin typeface="Inter"/>
+              </a:rPr>
+              <a:t>¿Cuántas veces ha subido usted?</a:t>
+            </a:r>
+          </a:p>
+        </p:txBody>
+      </p:sp>
+      <p:sp>
+        <p:nvSpPr>
+          <p:cNvPr id="29" name="Tarjeta 9"/>
+          <p:cNvSpPr/>
+          <p:nvPr/>
+        </p:nvSpPr>
+        <p:spPr>
+          <a:xfrm>
+            <a:off x="3312414" y="4722876"/>
+            <a:ext cx="2708910" cy="898398"/>
+          </a:xfrm>
+          <a:prstGeom prst="roundRect">
+            <a:avLst>
+              <a:gd name="adj" fmla="val 6000"/>
+            </a:avLst>
+          </a:prstGeom>
+          <a:solidFill>
+            <a:srgbClr val="FFFFFF"/>
+          </a:solidFill>
+          <a:ln w="12700">
+            <a:solidFill>
+              <a:srgbClr val="E4E3DE"/>
+            </a:solidFill>
+          </a:ln>
+          <a:effectLst/>
+        </p:spPr>
+        <p:style>
+          <a:lnRef idx="1">
+            <a:schemeClr val="accent1"/>
+          </a:lnRef>
+          <a:fillRef idx="3">
+            <a:schemeClr val="accent1"/>
+          </a:fillRef>
+          <a:effectRef idx="2">
+            <a:schemeClr val="accent1"/>
+          </a:effectRef>
+          <a:fontRef idx="minor">
+            <a:schemeClr val="lt1"/>
+          </a:fontRef>
+        </p:style>
+        <p:txBody>
+          <a:bodyPr rtlCol="0" anchor="ctr"/>
+          <a:lstStyle/>
+          <a:p/>
+        </p:txBody>
+      </p:sp>
+      <p:sp>
+        <p:nvSpPr>
+          <p:cNvPr id="30" name="TarjetaTxt 9"/>
+          <p:cNvSpPr txBox="1"/>
+          <p:nvPr/>
+        </p:nvSpPr>
+        <p:spPr>
+          <a:xfrm>
+            <a:off x="3403854" y="4777740"/>
+            <a:ext cx="2526030" cy="788670"/>
+          </a:xfrm>
+          <a:prstGeom prst="rect">
+            <a:avLst/>
+          </a:prstGeom>
+          <a:noFill/>
+        </p:spPr>
+        <p:txBody>
+          <a:bodyPr wrap="square" anchor="t" lIns="45720" rIns="45720" tIns="27432" bIns="27432">
+            <a:normAutofit/>
+          </a:bodyPr>
+          <a:lstStyle/>
+          <a:p>
+            <a:pPr algn="l"/>
+            <a:r>
+              <a:rPr sz="1100" b="1">
+                <a:solidFill>
+                  <a:srgbClr val="157355"/>
+                </a:solidFill>
+                <a:latin typeface="Bricolage Grotesque"/>
+              </a:rPr>
+              <a:t>modelo</a:t>
+            </a:r>
+          </a:p>
+          <a:p>
+            <a:pPr algn="l"/>
+            <a:r>
+              <a:rPr sz="1000">
+                <a:solidFill>
+                  <a:srgbClr val="20242E"/>
+                </a:solidFill>
+                <a:latin typeface="Inter"/>
+              </a:rPr>
+              <a:t>¿Qué le ha sorprendido de los turistas?</a:t>
+            </a:r>
+          </a:p>
+        </p:txBody>
+      </p:sp>
+      <p:sp>
+        <p:nvSpPr>
+          <p:cNvPr id="31" name="Tarjeta 10"/>
+          <p:cNvSpPr/>
+          <p:nvPr/>
+        </p:nvSpPr>
+        <p:spPr>
+          <a:xfrm>
+            <a:off x="6167628" y="4722876"/>
+            <a:ext cx="2708910" cy="898398"/>
+          </a:xfrm>
+          <a:prstGeom prst="roundRect">
+            <a:avLst>
+              <a:gd name="adj" fmla="val 6000"/>
+            </a:avLst>
+          </a:prstGeom>
+          <a:solidFill>
+            <a:srgbClr val="FFFFFF"/>
+          </a:solidFill>
+          <a:ln w="12700">
+            <a:solidFill>
+              <a:srgbClr val="E4E3DE"/>
+            </a:solidFill>
+          </a:ln>
+          <a:effectLst/>
+        </p:spPr>
+        <p:style>
+          <a:lnRef idx="1">
+            <a:schemeClr val="accent1"/>
+          </a:lnRef>
+          <a:fillRef idx="3">
+            <a:schemeClr val="accent1"/>
+          </a:fillRef>
+          <a:effectRef idx="2">
+            <a:schemeClr val="accent1"/>
+          </a:effectRef>
+          <a:fontRef idx="minor">
+            <a:schemeClr val="lt1"/>
+          </a:fontRef>
+        </p:style>
+        <p:txBody>
+          <a:bodyPr rtlCol="0" anchor="ctr"/>
+          <a:lstStyle/>
+          <a:p/>
+        </p:txBody>
+      </p:sp>
+      <p:sp>
+        <p:nvSpPr>
+          <p:cNvPr id="32" name="TarjetaTxt 10"/>
+          <p:cNvSpPr txBox="1"/>
+          <p:nvPr/>
+        </p:nvSpPr>
+        <p:spPr>
+          <a:xfrm>
+            <a:off x="6259068" y="4777740"/>
+            <a:ext cx="2526030" cy="587502"/>
+          </a:xfrm>
+          <a:prstGeom prst="rect">
+            <a:avLst/>
+          </a:prstGeom>
+          <a:noFill/>
+        </p:spPr>
+        <p:txBody>
+          <a:bodyPr wrap="square" anchor="t" lIns="45720" rIns="45720" tIns="27432" bIns="27432">
+            <a:normAutofit/>
+          </a:bodyPr>
+          <a:lstStyle/>
+          <a:p>
+            <a:pPr algn="l"/>
+            <a:r>
+              <a:rPr sz="1100" b="1">
+                <a:solidFill>
+                  <a:srgbClr val="157355"/>
+                </a:solidFill>
+                <a:latin typeface="Bricolage Grotesque"/>
+              </a:rPr>
+              <a:t>cerrada ✗</a:t>
+            </a:r>
+          </a:p>
+          <a:p>
+            <a:pPr algn="l"/>
+            <a:r>
+              <a:rPr sz="1000">
+                <a:solidFill>
+                  <a:srgbClr val="20242E"/>
+                </a:solidFill>
+                <a:latin typeface="Inter"/>
+              </a:rPr>
+              <a:t>¿Le gusta su trabajo?</a:t>
+            </a:r>
+          </a:p>
+        </p:txBody>
+      </p:sp>
+      <p:sp>
+        <p:nvSpPr>
+          <p:cNvPr id="33" name="Onthul 10"/>
+          <p:cNvSpPr/>
+          <p:nvPr/>
+        </p:nvSpPr>
+        <p:spPr>
+          <a:xfrm>
+            <a:off x="6259068" y="5328666"/>
+            <a:ext cx="2526030" cy="237744"/>
+          </a:xfrm>
+          <a:prstGeom prst="roundRect">
+            <a:avLst>
+              <a:gd name="adj" fmla="val 20000"/>
+            </a:avLst>
+          </a:prstGeom>
+          <a:solidFill>
+            <a:srgbClr val="E4F4EE"/>
+          </a:solidFill>
+          <a:ln>
+            <a:noFill/>
+          </a:ln>
+          <a:effectLst/>
+        </p:spPr>
+        <p:style>
+          <a:lnRef idx="1">
+            <a:schemeClr val="accent1"/>
+          </a:lnRef>
+          <a:fillRef idx="3">
+            <a:schemeClr val="accent1"/>
+          </a:fillRef>
+          <a:effectRef idx="2">
+            <a:schemeClr val="accent1"/>
+          </a:effectRef>
+          <a:fontRef idx="minor">
+            <a:schemeClr val="lt1"/>
+          </a:fontRef>
+        </p:style>
+        <p:txBody>
+          <a:bodyPr rtlCol="0" anchor="ctr"/>
+          <a:lstStyle/>
+          <a:p/>
+        </p:txBody>
+      </p:sp>
+      <p:sp>
+        <p:nvSpPr>
+          <p:cNvPr id="34" name="OnthulTxt 10"/>
+          <p:cNvSpPr txBox="1"/>
+          <p:nvPr/>
+        </p:nvSpPr>
+        <p:spPr>
+          <a:xfrm>
+            <a:off x="6277356" y="5328666"/>
+            <a:ext cx="2489454" cy="237744"/>
+          </a:xfrm>
+          <a:prstGeom prst="rect">
+            <a:avLst/>
+          </a:prstGeom>
+          <a:noFill/>
+        </p:spPr>
+        <p:txBody>
+          <a:bodyPr wrap="square" anchor="ctr" lIns="45720" rIns="45720" tIns="27432" bIns="27432">
+            <a:normAutofit/>
+          </a:bodyPr>
+          <a:lstStyle/>
+          <a:p>
+            <a:pPr algn="l"/>
+            <a:r>
+              <a:rPr sz="850" b="1">
+                <a:solidFill>
+                  <a:srgbClr val="157355"/>
+                </a:solidFill>
+                <a:latin typeface="Inter"/>
+              </a:rPr>
+              <a:t>reformúlala: ¿qué? ¿cuánto?</a:t>
+            </a:r>
+          </a:p>
+        </p:txBody>
+      </p:sp>
+      <p:sp>
+        <p:nvSpPr>
+          <p:cNvPr id="35" name="Tarjeta 11"/>
+          <p:cNvSpPr/>
+          <p:nvPr/>
+        </p:nvSpPr>
+        <p:spPr>
+          <a:xfrm>
+            <a:off x="9022842" y="4722876"/>
+            <a:ext cx="2708910" cy="898398"/>
+          </a:xfrm>
+          <a:prstGeom prst="roundRect">
+            <a:avLst>
+              <a:gd name="adj" fmla="val 6000"/>
+            </a:avLst>
+          </a:prstGeom>
+          <a:solidFill>
+            <a:srgbClr val="FFFFFF"/>
+          </a:solidFill>
+          <a:ln w="12700">
+            <a:solidFill>
+              <a:srgbClr val="E4E3DE"/>
+            </a:solidFill>
+          </a:ln>
+          <a:effectLst/>
+        </p:spPr>
+        <p:style>
+          <a:lnRef idx="1">
+            <a:schemeClr val="accent1"/>
+          </a:lnRef>
+          <a:fillRef idx="3">
+            <a:schemeClr val="accent1"/>
+          </a:fillRef>
+          <a:effectRef idx="2">
+            <a:schemeClr val="accent1"/>
+          </a:effectRef>
+          <a:fontRef idx="minor">
+            <a:schemeClr val="lt1"/>
+          </a:fontRef>
+        </p:style>
+        <p:txBody>
+          <a:bodyPr rtlCol="0" anchor="ctr"/>
+          <a:lstStyle/>
+          <a:p/>
+        </p:txBody>
+      </p:sp>
+      <p:sp>
+        <p:nvSpPr>
+          <p:cNvPr id="36" name="TarjetaTxt 11"/>
+          <p:cNvSpPr txBox="1"/>
+          <p:nvPr/>
+        </p:nvSpPr>
+        <p:spPr>
+          <a:xfrm>
+            <a:off x="9114282" y="4777740"/>
+            <a:ext cx="2526030" cy="587502"/>
+          </a:xfrm>
+          <a:prstGeom prst="rect">
+            <a:avLst/>
+          </a:prstGeom>
+          <a:noFill/>
+        </p:spPr>
+        <p:txBody>
+          <a:bodyPr wrap="square" anchor="t" lIns="45720" rIns="45720" tIns="27432" bIns="27432">
+            <a:normAutofit/>
+          </a:bodyPr>
+          <a:lstStyle/>
+          <a:p>
+            <a:pPr algn="l"/>
+            <a:r>
+              <a:rPr sz="1100" b="1">
+                <a:solidFill>
+                  <a:srgbClr val="157355"/>
+                </a:solidFill>
+                <a:latin typeface="Bricolage Grotesque"/>
+              </a:rPr>
+              <a:t>cerrada ✗</a:t>
+            </a:r>
+          </a:p>
+          <a:p>
+            <a:pPr algn="l"/>
+            <a:r>
+              <a:rPr sz="1000">
+                <a:solidFill>
+                  <a:srgbClr val="20242E"/>
+                </a:solidFill>
+                <a:latin typeface="Inter"/>
+              </a:rPr>
+              <a:t>¿Ha subido muchas veces?</a:t>
+            </a:r>
+          </a:p>
+        </p:txBody>
+      </p:sp>
+      <p:sp>
+        <p:nvSpPr>
+          <p:cNvPr id="37" name="Onthul 11"/>
+          <p:cNvSpPr/>
+          <p:nvPr/>
+        </p:nvSpPr>
+        <p:spPr>
+          <a:xfrm>
+            <a:off x="9114282" y="5328666"/>
+            <a:ext cx="2526030" cy="237744"/>
+          </a:xfrm>
+          <a:prstGeom prst="roundRect">
+            <a:avLst>
+              <a:gd name="adj" fmla="val 20000"/>
+            </a:avLst>
+          </a:prstGeom>
+          <a:solidFill>
+            <a:srgbClr val="E4F4EE"/>
+          </a:solidFill>
+          <a:ln>
+            <a:noFill/>
+          </a:ln>
+          <a:effectLst/>
+        </p:spPr>
+        <p:style>
+          <a:lnRef idx="1">
+            <a:schemeClr val="accent1"/>
+          </a:lnRef>
+          <a:fillRef idx="3">
+            <a:schemeClr val="accent1"/>
+          </a:fillRef>
+          <a:effectRef idx="2">
+            <a:schemeClr val="accent1"/>
+          </a:effectRef>
+          <a:fontRef idx="minor">
+            <a:schemeClr val="lt1"/>
+          </a:fontRef>
+        </p:style>
+        <p:txBody>
+          <a:bodyPr rtlCol="0" anchor="ctr"/>
+          <a:lstStyle/>
+          <a:p/>
+        </p:txBody>
+      </p:sp>
+      <p:sp>
+        <p:nvSpPr>
+          <p:cNvPr id="38" name="OnthulTxt 11"/>
+          <p:cNvSpPr txBox="1"/>
+          <p:nvPr/>
+        </p:nvSpPr>
+        <p:spPr>
+          <a:xfrm>
+            <a:off x="9132570" y="5328666"/>
+            <a:ext cx="2489454" cy="237744"/>
+          </a:xfrm>
+          <a:prstGeom prst="rect">
+            <a:avLst/>
+          </a:prstGeom>
+          <a:noFill/>
+        </p:spPr>
+        <p:txBody>
+          <a:bodyPr wrap="square" anchor="ctr" lIns="45720" rIns="45720" tIns="27432" bIns="27432">
+            <a:normAutofit/>
+          </a:bodyPr>
+          <a:lstStyle/>
+          <a:p>
+            <a:pPr algn="l"/>
+            <a:r>
+              <a:rPr sz="850" b="1">
+                <a:solidFill>
+                  <a:srgbClr val="157355"/>
+                </a:solidFill>
+                <a:latin typeface="Inter"/>
+              </a:rPr>
+              <a:t>reformúlala: ¿qué? ¿cuánto?</a:t>
+            </a:r>
+          </a:p>
+        </p:txBody>
+      </p:sp>
+      <p:sp>
+        <p:nvSpPr>
+          <p:cNvPr id="39" name="Tarjeta 12"/>
+          <p:cNvSpPr/>
+          <p:nvPr/>
+        </p:nvSpPr>
+        <p:spPr>
+          <a:xfrm>
+            <a:off x="457200" y="5749290"/>
+            <a:ext cx="2708910" cy="898398"/>
+          </a:xfrm>
+          <a:prstGeom prst="roundRect">
+            <a:avLst>
+              <a:gd name="adj" fmla="val 6000"/>
+            </a:avLst>
+          </a:prstGeom>
+          <a:solidFill>
+            <a:srgbClr val="FFFFFF"/>
+          </a:solidFill>
+          <a:ln w="12700">
+            <a:solidFill>
+              <a:srgbClr val="E4E3DE"/>
+            </a:solidFill>
+          </a:ln>
+          <a:effectLst/>
+        </p:spPr>
+        <p:style>
+          <a:lnRef idx="1">
+            <a:schemeClr val="accent1"/>
+          </a:lnRef>
+          <a:fillRef idx="3">
+            <a:schemeClr val="accent1"/>
+          </a:fillRef>
+          <a:effectRef idx="2">
+            <a:schemeClr val="accent1"/>
+          </a:effectRef>
+          <a:fontRef idx="minor">
+            <a:schemeClr val="lt1"/>
+          </a:fontRef>
+        </p:style>
+        <p:txBody>
+          <a:bodyPr rtlCol="0" anchor="ctr"/>
+          <a:lstStyle/>
+          <a:p/>
+        </p:txBody>
+      </p:sp>
+      <p:sp>
+        <p:nvSpPr>
+          <p:cNvPr id="40" name="TarjetaTxt 12"/>
+          <p:cNvSpPr txBox="1"/>
+          <p:nvPr/>
+        </p:nvSpPr>
+        <p:spPr>
+          <a:xfrm>
+            <a:off x="548640" y="5804154"/>
+            <a:ext cx="2526030" cy="587502"/>
+          </a:xfrm>
+          <a:prstGeom prst="rect">
+            <a:avLst/>
+          </a:prstGeom>
+          <a:noFill/>
+        </p:spPr>
+        <p:txBody>
+          <a:bodyPr wrap="square" anchor="t" lIns="45720" rIns="45720" tIns="27432" bIns="27432">
+            <a:normAutofit/>
+          </a:bodyPr>
+          <a:lstStyle/>
+          <a:p>
+            <a:pPr algn="l"/>
+            <a:r>
+              <a:rPr sz="1100" b="1">
+                <a:solidFill>
+                  <a:srgbClr val="157355"/>
+                </a:solidFill>
+                <a:latin typeface="Bricolage Grotesque"/>
+              </a:rPr>
+              <a:t>cerrada ✗</a:t>
+            </a:r>
+          </a:p>
+          <a:p>
+            <a:pPr algn="l"/>
+            <a:r>
+              <a:rPr sz="1000">
+                <a:solidFill>
+                  <a:srgbClr val="20242E"/>
+                </a:solidFill>
+                <a:latin typeface="Inter"/>
+              </a:rPr>
+              <a:t>¿Es difícil?</a:t>
+            </a:r>
+          </a:p>
+        </p:txBody>
+      </p:sp>
+      <p:sp>
+        <p:nvSpPr>
+          <p:cNvPr id="41" name="Onthul 12"/>
+          <p:cNvSpPr/>
+          <p:nvPr/>
+        </p:nvSpPr>
+        <p:spPr>
+          <a:xfrm>
+            <a:off x="548640" y="6355080"/>
+            <a:ext cx="2526030" cy="237744"/>
+          </a:xfrm>
+          <a:prstGeom prst="roundRect">
+            <a:avLst>
+              <a:gd name="adj" fmla="val 20000"/>
+            </a:avLst>
+          </a:prstGeom>
+          <a:solidFill>
+            <a:srgbClr val="E4F4EE"/>
+          </a:solidFill>
+          <a:ln>
+            <a:noFill/>
+          </a:ln>
+          <a:effectLst/>
+        </p:spPr>
+        <p:style>
+          <a:lnRef idx="1">
+            <a:schemeClr val="accent1"/>
+          </a:lnRef>
+          <a:fillRef idx="3">
+            <a:schemeClr val="accent1"/>
+          </a:fillRef>
+          <a:effectRef idx="2">
+            <a:schemeClr val="accent1"/>
+          </a:effectRef>
+          <a:fontRef idx="minor">
+            <a:schemeClr val="lt1"/>
+          </a:fontRef>
+        </p:style>
+        <p:txBody>
+          <a:bodyPr rtlCol="0" anchor="ctr"/>
+          <a:lstStyle/>
+          <a:p/>
+        </p:txBody>
+      </p:sp>
+      <p:sp>
+        <p:nvSpPr>
+          <p:cNvPr id="42" name="OnthulTxt 12"/>
+          <p:cNvSpPr txBox="1"/>
+          <p:nvPr/>
+        </p:nvSpPr>
+        <p:spPr>
+          <a:xfrm>
+            <a:off x="566928" y="6355080"/>
+            <a:ext cx="2489454" cy="237744"/>
+          </a:xfrm>
+          <a:prstGeom prst="rect">
+            <a:avLst/>
+          </a:prstGeom>
+          <a:noFill/>
+        </p:spPr>
+        <p:txBody>
+          <a:bodyPr wrap="square" anchor="ctr" lIns="45720" rIns="45720" tIns="27432" bIns="27432">
+            <a:normAutofit/>
+          </a:bodyPr>
+          <a:lstStyle/>
+          <a:p>
+            <a:pPr algn="l"/>
+            <a:r>
+              <a:rPr sz="850" b="1">
+                <a:solidFill>
+                  <a:srgbClr val="157355"/>
+                </a:solidFill>
+                <a:latin typeface="Inter"/>
+              </a:rPr>
+              <a:t>reformúlala: ¿qué? ¿cuánto?</a:t>
+            </a:r>
+          </a:p>
+        </p:txBody>
+      </p:sp>
+      <p:sp>
+        <p:nvSpPr>
+          <p:cNvPr id="43" name="Tarjeta 13"/>
+          <p:cNvSpPr/>
+          <p:nvPr/>
+        </p:nvSpPr>
+        <p:spPr>
+          <a:xfrm>
+            <a:off x="3312414" y="5749290"/>
+            <a:ext cx="2708910" cy="898398"/>
+          </a:xfrm>
+          <a:prstGeom prst="roundRect">
+            <a:avLst>
+              <a:gd name="adj" fmla="val 6000"/>
+            </a:avLst>
+          </a:prstGeom>
+          <a:solidFill>
+            <a:srgbClr val="FFFFFF"/>
+          </a:solidFill>
+          <a:ln w="12700">
+            <a:solidFill>
+              <a:srgbClr val="E4E3DE"/>
+            </a:solidFill>
+          </a:ln>
+          <a:effectLst/>
+        </p:spPr>
+        <p:style>
+          <a:lnRef idx="1">
+            <a:schemeClr val="accent1"/>
+          </a:lnRef>
+          <a:fillRef idx="3">
+            <a:schemeClr val="accent1"/>
+          </a:fillRef>
+          <a:effectRef idx="2">
+            <a:schemeClr val="accent1"/>
+          </a:effectRef>
+          <a:fontRef idx="minor">
+            <a:schemeClr val="lt1"/>
+          </a:fontRef>
+        </p:style>
+        <p:txBody>
+          <a:bodyPr rtlCol="0" anchor="ctr"/>
+          <a:lstStyle/>
+          <a:p/>
+        </p:txBody>
+      </p:sp>
+      <p:sp>
+        <p:nvSpPr>
+          <p:cNvPr id="44" name="TarjetaTxt 13"/>
+          <p:cNvSpPr txBox="1"/>
+          <p:nvPr/>
+        </p:nvSpPr>
+        <p:spPr>
+          <a:xfrm>
+            <a:off x="3403854" y="5804154"/>
+            <a:ext cx="2526030" cy="587502"/>
+          </a:xfrm>
+          <a:prstGeom prst="rect">
+            <a:avLst/>
+          </a:prstGeom>
+          <a:noFill/>
+        </p:spPr>
+        <p:txBody>
+          <a:bodyPr wrap="square" anchor="t" lIns="45720" rIns="45720" tIns="27432" bIns="27432">
+            <a:normAutofit/>
+          </a:bodyPr>
+          <a:lstStyle/>
+          <a:p>
+            <a:pPr algn="l"/>
+            <a:r>
+              <a:rPr sz="1100" b="1">
+                <a:solidFill>
+                  <a:srgbClr val="157355"/>
+                </a:solidFill>
+                <a:latin typeface="Bricolage Grotesque"/>
+              </a:rPr>
+              <a:t>cerrada ✗</a:t>
+            </a:r>
+          </a:p>
+          <a:p>
+            <a:pPr algn="l"/>
+            <a:r>
+              <a:rPr sz="1000">
+                <a:solidFill>
+                  <a:srgbClr val="20242E"/>
+                </a:solidFill>
+                <a:latin typeface="Inter"/>
+              </a:rPr>
+              <a:t>¿Ha visto turistas?</a:t>
+            </a:r>
+          </a:p>
+        </p:txBody>
+      </p:sp>
+      <p:sp>
+        <p:nvSpPr>
+          <p:cNvPr id="45" name="Onthul 13"/>
+          <p:cNvSpPr/>
+          <p:nvPr/>
+        </p:nvSpPr>
+        <p:spPr>
+          <a:xfrm>
+            <a:off x="3403854" y="6355080"/>
+            <a:ext cx="2526030" cy="237744"/>
+          </a:xfrm>
+          <a:prstGeom prst="roundRect">
+            <a:avLst>
+              <a:gd name="adj" fmla="val 20000"/>
+            </a:avLst>
+          </a:prstGeom>
+          <a:solidFill>
+            <a:srgbClr val="E4F4EE"/>
+          </a:solidFill>
+          <a:ln>
+            <a:noFill/>
+          </a:ln>
+          <a:effectLst/>
+        </p:spPr>
+        <p:style>
+          <a:lnRef idx="1">
+            <a:schemeClr val="accent1"/>
+          </a:lnRef>
+          <a:fillRef idx="3">
+            <a:schemeClr val="accent1"/>
+          </a:fillRef>
+          <a:effectRef idx="2">
+            <a:schemeClr val="accent1"/>
+          </a:effectRef>
+          <a:fontRef idx="minor">
+            <a:schemeClr val="lt1"/>
+          </a:fontRef>
+        </p:style>
+        <p:txBody>
+          <a:bodyPr rtlCol="0" anchor="ctr"/>
+          <a:lstStyle/>
+          <a:p/>
+        </p:txBody>
+      </p:sp>
+      <p:sp>
+        <p:nvSpPr>
+          <p:cNvPr id="46" name="OnthulTxt 13"/>
+          <p:cNvSpPr txBox="1"/>
+          <p:nvPr/>
+        </p:nvSpPr>
+        <p:spPr>
+          <a:xfrm>
+            <a:off x="3422142" y="6355080"/>
+            <a:ext cx="2489454" cy="237744"/>
+          </a:xfrm>
+          <a:prstGeom prst="rect">
+            <a:avLst/>
+          </a:prstGeom>
+          <a:noFill/>
+        </p:spPr>
+        <p:txBody>
+          <a:bodyPr wrap="square" anchor="ctr" lIns="45720" rIns="45720" tIns="27432" bIns="27432">
+            <a:normAutofit/>
+          </a:bodyPr>
+          <a:lstStyle/>
+          <a:p>
+            <a:pPr algn="l"/>
+            <a:r>
+              <a:rPr sz="850" b="1">
+                <a:solidFill>
+                  <a:srgbClr val="157355"/>
+                </a:solidFill>
+                <a:latin typeface="Inter"/>
+              </a:rPr>
+              <a:t>reformúlala: ¿qué? ¿cuánto?</a:t>
+            </a:r>
+          </a:p>
+        </p:txBody>
+      </p:sp>
+    </p:spTree>
+  </p:cSld>
+  <p:clrMapOvr>
+    <a:masterClrMapping/>
+  </p:clrMapOvr>
+  <p:timing>
+    <p:tnLst>
+      <p:par>
+        <p:cTn id="1" dur="indefinite" restart="never" nodeType="tmRoot">
+          <p:childTnLst>
+            <p:seq concurrent="1" nextAc="seek">
+              <p:cTn id="2" dur="indefinite" nodeType="mainSeq">
+                <p:childTnLst>
+                  <p:par>
+                    <p:cTn id="5" fill="hold">
+                      <p:stCondLst>
+                        <p:cond delay="indefinite"/>
+                      </p:stCondLst>
+                      <p:childTnLst>
+                        <p:par>
+                          <p:cTn id="6" fill="hold">
+                            <p:stCondLst>
+                              <p:cond delay="0"/>
+                            </p:stCondLst>
+                            <p:childTnLst>
+                              <p:par>
+                                <p:cTn id="7" presetID="10" presetClass="entr" presetSubtype="0" fill="hold" grpId="0" nodeType="clickEffect">
+                                  <p:stCondLst>
+                                    <p:cond delay="0"/>
+                                  </p:stCondLst>
+                                  <p:childTnLst>
+                                    <p:set>
+                                      <p:cBhvr>
+                                        <p:cTn id="8" dur="1" fill="hold">
+                                          <p:stCondLst>
+                                            <p:cond delay="0"/>
+                                          </p:stCondLst>
+                                        </p:cTn>
+                                        <p:tgtEl>
+                                          <p:spTgt spid="33"/>
+                                        </p:tgtEl>
+                                        <p:attrNameLst>
+                                          <p:attrName>style.visibility</p:attrName>
+                                        </p:attrNameLst>
+                                      </p:cBhvr>
+                                      <p:to>
+                                        <p:strVal val="visible"/>
+                                      </p:to>
+                                    </p:set>
+                                    <p:animEffect transition="in" filter="fade">
+                                      <p:cBhvr>
+                                        <p:cTn id="9" dur="500"/>
+                                        <p:tgtEl>
+                                          <p:spTgt spid="33"/>
+                                        </p:tgtEl>
+                                      </p:cBhvr>
+                                    </p:animEffect>
+                                  </p:childTnLst>
+                                </p:cTn>
+                              </p:par>
+                            </p:childTnLst>
+                          </p:cTn>
+                        </p:par>
+                      </p:childTnLst>
+                    </p:cTn>
+                  </p:par>
+                  <p:par>
+                    <p:cTn id="10" fill="hold">
+                      <p:stCondLst>
+                        <p:cond delay="indefinite"/>
+                      </p:stCondLst>
+                      <p:childTnLst>
+                        <p:par>
+                          <p:cTn id="11" fill="hold">
+                            <p:stCondLst>
+                              <p:cond delay="0"/>
+                            </p:stCondLst>
+                            <p:childTnLst>
+                              <p:par>
+                                <p:cTn id="12" presetID="10" presetClass="entr" presetSubtype="0" fill="hold" grpId="0" nodeType="clickEffect">
+                                  <p:stCondLst>
+                                    <p:cond delay="0"/>
+                                  </p:stCondLst>
+                                  <p:childTnLst>
+                                    <p:set>
+                                      <p:cBhvr>
+                                        <p:cTn id="13" dur="1" fill="hold">
+                                          <p:stCondLst>
+                                            <p:cond delay="0"/>
+                                          </p:stCondLst>
+                                        </p:cTn>
+                                        <p:tgtEl>
+                                          <p:spTgt spid="34"/>
+                                        </p:tgtEl>
+                                        <p:attrNameLst>
+                                          <p:attrName>style.visibility</p:attrName>
+                                        </p:attrNameLst>
+                                      </p:cBhvr>
+                                      <p:to>
+                                        <p:strVal val="visible"/>
+                                      </p:to>
+                                    </p:set>
+                                    <p:animEffect transition="in" filter="fade">
+                                      <p:cBhvr>
+                                        <p:cTn id="14" dur="500"/>
+                                        <p:tgtEl>
+                                          <p:spTgt spid="34"/>
+                                        </p:tgtEl>
+                                      </p:cBhvr>
+                                    </p:animEffect>
+                                  </p:childTnLst>
+                                </p:cTn>
+                              </p:par>
+                            </p:childTnLst>
+                          </p:cTn>
+                        </p:par>
+                      </p:childTnLst>
+                    </p:cTn>
+                  </p:par>
+                  <p:par>
+                    <p:cTn id="15" fill="hold">
+                      <p:stCondLst>
+                        <p:cond delay="indefinite"/>
+                      </p:stCondLst>
+                      <p:childTnLst>
+                        <p:par>
+                          <p:cTn id="16" fill="hold">
+                            <p:stCondLst>
+                              <p:cond delay="0"/>
+                            </p:stCondLst>
+                            <p:childTnLst>
+                              <p:par>
+                                <p:cTn id="17" presetID="10" presetClass="entr" presetSubtype="0" fill="hold" grpId="0" nodeType="clickEffect">
+                                  <p:stCondLst>
+                                    <p:cond delay="0"/>
+                                  </p:stCondLst>
+                                  <p:childTnLst>
+                                    <p:set>
+                                      <p:cBhvr>
+                                        <p:cTn id="18" dur="1" fill="hold">
+                                          <p:stCondLst>
+                                            <p:cond delay="0"/>
+                                          </p:stCondLst>
+                                        </p:cTn>
+                                        <p:tgtEl>
+                                          <p:spTgt spid="37"/>
+                                        </p:tgtEl>
+                                        <p:attrNameLst>
+                                          <p:attrName>style.visibility</p:attrName>
+                                        </p:attrNameLst>
+                                      </p:cBhvr>
+                                      <p:to>
+                                        <p:strVal val="visible"/>
+                                      </p:to>
+                                    </p:set>
+                                    <p:animEffect transition="in" filter="fade">
+                                      <p:cBhvr>
+                                        <p:cTn id="19" dur="500"/>
+                                        <p:tgtEl>
+                                          <p:spTgt spid="37"/>
+                                        </p:tgtEl>
+                                      </p:cBhvr>
+                                    </p:animEffect>
+                                  </p:childTnLst>
+                                </p:cTn>
+                              </p:par>
+                            </p:childTnLst>
+                          </p:cTn>
+                        </p:par>
+                      </p:childTnLst>
+                    </p:cTn>
+                  </p:par>
+                  <p:par>
+                    <p:cTn id="20" fill="hold">
+                      <p:stCondLst>
+                        <p:cond delay="indefinite"/>
+                      </p:stCondLst>
+                      <p:childTnLst>
+                        <p:par>
+                          <p:cTn id="21" fill="hold">
+                            <p:stCondLst>
+                              <p:cond delay="0"/>
+                            </p:stCondLst>
+                            <p:childTnLst>
+                              <p:par>
+                                <p:cTn id="22" presetID="10" presetClass="entr" presetSubtype="0" fill="hold" grpId="0" nodeType="clickEffect">
+                                  <p:stCondLst>
+                                    <p:cond delay="0"/>
+                                  </p:stCondLst>
+                                  <p:childTnLst>
+                                    <p:set>
+                                      <p:cBhvr>
+                                        <p:cTn id="23" dur="1" fill="hold">
+                                          <p:stCondLst>
+                                            <p:cond delay="0"/>
+                                          </p:stCondLst>
+                                        </p:cTn>
+                                        <p:tgtEl>
+                                          <p:spTgt spid="38"/>
+                                        </p:tgtEl>
+                                        <p:attrNameLst>
+                                          <p:attrName>style.visibility</p:attrName>
+                                        </p:attrNameLst>
+                                      </p:cBhvr>
+                                      <p:to>
+                                        <p:strVal val="visible"/>
+                                      </p:to>
+                                    </p:set>
+                                    <p:animEffect transition="in" filter="fade">
+                                      <p:cBhvr>
+                                        <p:cTn id="24" dur="500"/>
+                                        <p:tgtEl>
+                                          <p:spTgt spid="38"/>
+                                        </p:tgtEl>
+                                      </p:cBhvr>
+                                    </p:animEffect>
+                                  </p:childTnLst>
+                                </p:cTn>
+                              </p:par>
+                            </p:childTnLst>
+                          </p:cTn>
+                        </p:par>
+                      </p:childTnLst>
+                    </p:cTn>
+                  </p:par>
+                  <p:par>
+                    <p:cTn id="25" fill="hold">
+                      <p:stCondLst>
+                        <p:cond delay="indefinite"/>
+                      </p:stCondLst>
+                      <p:childTnLst>
+                        <p:par>
+                          <p:cTn id="26" fill="hold">
+                            <p:stCondLst>
+                              <p:cond delay="0"/>
+                            </p:stCondLst>
+                            <p:childTnLst>
+                              <p:par>
+                                <p:cTn id="27" presetID="10" presetClass="entr" presetSubtype="0" fill="hold" grpId="0" nodeType="clickEffect">
+                                  <p:stCondLst>
+                                    <p:cond delay="0"/>
+                                  </p:stCondLst>
+                                  <p:childTnLst>
+                                    <p:set>
+                                      <p:cBhvr>
+                                        <p:cTn id="28" dur="1" fill="hold">
+                                          <p:stCondLst>
+                                            <p:cond delay="0"/>
+                                          </p:stCondLst>
+                                        </p:cTn>
+                                        <p:tgtEl>
+                                          <p:spTgt spid="41"/>
+                                        </p:tgtEl>
+                                        <p:attrNameLst>
+                                          <p:attrName>style.visibility</p:attrName>
+                                        </p:attrNameLst>
+                                      </p:cBhvr>
+                                      <p:to>
+                                        <p:strVal val="visible"/>
+                                      </p:to>
+                                    </p:set>
+                                    <p:animEffect transition="in" filter="fade">
+                                      <p:cBhvr>
+                                        <p:cTn id="29" dur="500"/>
+                                        <p:tgtEl>
+                                          <p:spTgt spid="41"/>
+                                        </p:tgtEl>
+                                      </p:cBhvr>
+                                    </p:animEffect>
+                                  </p:childTnLst>
+                                </p:cTn>
+                              </p:par>
+                            </p:childTnLst>
+                          </p:cTn>
+                        </p:par>
+                      </p:childTnLst>
+                    </p:cTn>
+                  </p:par>
+                  <p:par>
+                    <p:cTn id="30" fill="hold">
+                      <p:stCondLst>
+                        <p:cond delay="indefinite"/>
+                      </p:stCondLst>
+                      <p:childTnLst>
+                        <p:par>
+                          <p:cTn id="31" fill="hold">
+                            <p:stCondLst>
+                              <p:cond delay="0"/>
+                            </p:stCondLst>
+                            <p:childTnLst>
+                              <p:par>
+                                <p:cTn id="32" presetID="10" presetClass="entr" presetSubtype="0" fill="hold" grpId="0" nodeType="clickEffect">
+                                  <p:stCondLst>
+                                    <p:cond delay="0"/>
+                                  </p:stCondLst>
+                                  <p:childTnLst>
+                                    <p:set>
+                                      <p:cBhvr>
+                                        <p:cTn id="33" dur="1" fill="hold">
+                                          <p:stCondLst>
+                                            <p:cond delay="0"/>
+                                          </p:stCondLst>
+                                        </p:cTn>
+                                        <p:tgtEl>
+                                          <p:spTgt spid="42"/>
+                                        </p:tgtEl>
+                                        <p:attrNameLst>
+                                          <p:attrName>style.visibility</p:attrName>
+                                        </p:attrNameLst>
+                                      </p:cBhvr>
+                                      <p:to>
+                                        <p:strVal val="visible"/>
+                                      </p:to>
+                                    </p:set>
+                                    <p:animEffect transition="in" filter="fade">
+                                      <p:cBhvr>
+                                        <p:cTn id="34" dur="500"/>
+                                        <p:tgtEl>
+                                          <p:spTgt spid="42"/>
+                                        </p:tgtEl>
+                                      </p:cBhvr>
+                                    </p:animEffect>
+                                  </p:childTnLst>
+                                </p:cTn>
+                              </p:par>
+                            </p:childTnLst>
+                          </p:cTn>
+                        </p:par>
+                      </p:childTnLst>
+                    </p:cTn>
+                  </p:par>
+                  <p:par>
+                    <p:cTn id="35" fill="hold">
+                      <p:stCondLst>
+                        <p:cond delay="indefinite"/>
+                      </p:stCondLst>
+                      <p:childTnLst>
+                        <p:par>
+                          <p:cTn id="36" fill="hold">
+                            <p:stCondLst>
+                              <p:cond delay="0"/>
+                            </p:stCondLst>
+                            <p:childTnLst>
+                              <p:par>
+                                <p:cTn id="37" presetID="10" presetClass="entr" presetSubtype="0" fill="hold" grpId="0" nodeType="clickEffect">
+                                  <p:stCondLst>
+                                    <p:cond delay="0"/>
+                                  </p:stCondLst>
+                                  <p:childTnLst>
+                                    <p:set>
+                                      <p:cBhvr>
+                                        <p:cTn id="38" dur="1" fill="hold">
+                                          <p:stCondLst>
+                                            <p:cond delay="0"/>
+                                          </p:stCondLst>
+                                        </p:cTn>
+                                        <p:tgtEl>
+                                          <p:spTgt spid="45"/>
+                                        </p:tgtEl>
+                                        <p:attrNameLst>
+                                          <p:attrName>style.visibility</p:attrName>
+                                        </p:attrNameLst>
+                                      </p:cBhvr>
+                                      <p:to>
+                                        <p:strVal val="visible"/>
+                                      </p:to>
+                                    </p:set>
+                                    <p:animEffect transition="in" filter="fade">
+                                      <p:cBhvr>
+                                        <p:cTn id="39" dur="500"/>
+                                        <p:tgtEl>
+                                          <p:spTgt spid="45"/>
+                                        </p:tgtEl>
+                                      </p:cBhvr>
+                                    </p:animEffect>
+                                  </p:childTnLst>
+                                </p:cTn>
+                              </p:par>
+                            </p:childTnLst>
+                          </p:cTn>
+                        </p:par>
+                      </p:childTnLst>
+                    </p:cTn>
+                  </p:par>
+                  <p:par>
+                    <p:cTn id="40" fill="hold">
+                      <p:stCondLst>
+                        <p:cond delay="indefinite"/>
+                      </p:stCondLst>
+                      <p:childTnLst>
+                        <p:par>
+                          <p:cTn id="41" fill="hold">
+                            <p:stCondLst>
+                              <p:cond delay="0"/>
+                            </p:stCondLst>
+                            <p:childTnLst>
+                              <p:par>
+                                <p:cTn id="42" presetID="10" presetClass="entr" presetSubtype="0" fill="hold" grpId="0" nodeType="clickEffect">
+                                  <p:stCondLst>
+                                    <p:cond delay="0"/>
+                                  </p:stCondLst>
+                                  <p:childTnLst>
+                                    <p:set>
+                                      <p:cBhvr>
+                                        <p:cTn id="43" dur="1" fill="hold">
+                                          <p:stCondLst>
+                                            <p:cond delay="0"/>
+                                          </p:stCondLst>
+                                        </p:cTn>
+                                        <p:tgtEl>
+                                          <p:spTgt spid="46"/>
+                                        </p:tgtEl>
+                                        <p:attrNameLst>
+                                          <p:attrName>style.visibility</p:attrName>
+                                        </p:attrNameLst>
+                                      </p:cBhvr>
+                                      <p:to>
+                                        <p:strVal val="visible"/>
+                                      </p:to>
+                                    </p:set>
+                                    <p:animEffect transition="in" filter="fade">
+                                      <p:cBhvr>
+                                        <p:cTn id="44" dur="500"/>
+                                        <p:tgtEl>
+                                          <p:spTgt spid="46"/>
+                                        </p:tgtEl>
+                                      </p:cBhvr>
+                                    </p:animEffect>
+                                  </p:childTnLst>
+                                </p:cTn>
+                              </p:par>
+                            </p:childTnLst>
+                          </p:cTn>
+                        </p:par>
+                      </p:childTnLst>
+                    </p:cTn>
+                  </p:par>
+                </p:childTnLst>
+              </p:cTn>
+              <p:prevCondLst>
+                <p:cond evt="onPrev" delay="0">
+                  <p:tgtEl>
+                    <p:sldTgt/>
+                  </p:tgtEl>
+                </p:cond>
+              </p:prevCondLst>
+              <p:nextCondLst>
+                <p:cond evt="onNext" delay="0">
+                  <p:tgtEl>
+                    <p:sldTgt/>
+                  </p:tgtEl>
+                </p:cond>
+              </p:nextCondLst>
+            </p:seq>
+          </p:childTnLst>
+        </p:cTn>
+      </p:par>
+    </p:tnLst>
+  </p:timing>
+</p:sld>
+</file>
+
+<file path=ppt/slides/slide24.xml><?xml version="1.0" encoding="utf-8"?>
+<p:sld xmlns:a="http://schemas.openxmlformats.org/drawingml/2006/main" xmlns:p="http://schemas.openxmlformats.org/presentationml/2006/main" xmlns:r="http://schemas.openxmlformats.org/officeDocument/2006/relationships">
+  <p:cSld>
+    <p:spTree>
+      <p:nvGrpSpPr>
+        <p:cNvPr id="1" name=""/>
+        <p:cNvGrpSpPr/>
+        <p:nvPr/>
+      </p:nvGrpSpPr>
+      <p:grpSpPr/>
+      <p:sp>
+        <p:nvSpPr>
+          <p:cNvPr id="2" name="Fondo"/>
+          <p:cNvSpPr/>
+          <p:nvPr/>
+        </p:nvSpPr>
+        <p:spPr>
+          <a:xfrm>
+            <a:off x="0" y="0"/>
+            <a:ext cx="12191695" cy="6858000"/>
+          </a:xfrm>
+          <a:prstGeom prst="rect">
+            <a:avLst/>
+          </a:prstGeom>
+          <a:solidFill>
+            <a:srgbClr val="FCFBF8"/>
+          </a:solidFill>
+          <a:ln>
+            <a:noFill/>
+          </a:ln>
+          <a:effectLst/>
+        </p:spPr>
+        <p:style>
+          <a:lnRef idx="1">
+            <a:schemeClr val="accent1"/>
+          </a:lnRef>
+          <a:fillRef idx="3">
+            <a:schemeClr val="accent1"/>
+          </a:fillRef>
+          <a:effectRef idx="2">
+            <a:schemeClr val="accent1"/>
+          </a:effectRef>
+          <a:fontRef idx="minor">
+            <a:schemeClr val="lt1"/>
+          </a:fontRef>
+        </p:style>
+        <p:txBody>
+          <a:bodyPr rtlCol="0" anchor="ctr"/>
+          <a:lstStyle/>
+          <a:p/>
+        </p:txBody>
+      </p:sp>
+      <p:sp>
+        <p:nvSpPr>
+          <p:cNvPr id="3" name="Cabecera"/>
+          <p:cNvSpPr/>
+          <p:nvPr/>
+        </p:nvSpPr>
+        <p:spPr>
+          <a:xfrm>
+            <a:off x="0" y="0"/>
+            <a:ext cx="12191695" cy="1078992"/>
+          </a:xfrm>
+          <a:prstGeom prst="rect">
+            <a:avLst/>
+          </a:prstGeom>
+          <a:solidFill>
+            <a:srgbClr val="1E9E74"/>
+          </a:solidFill>
+          <a:ln>
+            <a:noFill/>
+          </a:ln>
+          <a:effectLst/>
+        </p:spPr>
+        <p:style>
+          <a:lnRef idx="1">
+            <a:schemeClr val="accent1"/>
+          </a:lnRef>
+          <a:fillRef idx="3">
+            <a:schemeClr val="accent1"/>
+          </a:fillRef>
+          <a:effectRef idx="2">
+            <a:schemeClr val="accent1"/>
+          </a:effectRef>
+          <a:fontRef idx="minor">
+            <a:schemeClr val="lt1"/>
+          </a:fontRef>
+        </p:style>
+        <p:txBody>
+          <a:bodyPr rtlCol="0" anchor="ctr"/>
+          <a:lstStyle/>
+          <a:p/>
+        </p:txBody>
+      </p:sp>
+      <p:sp>
+        <p:nvSpPr>
+          <p:cNvPr id="4" name="Chip"/>
+          <p:cNvSpPr/>
+          <p:nvPr/>
+        </p:nvSpPr>
+        <p:spPr>
+          <a:xfrm>
+            <a:off x="457200" y="182880"/>
+            <a:ext cx="3017520" cy="292608"/>
+          </a:xfrm>
+          <a:prstGeom prst="roundRect">
+            <a:avLst>
+              <a:gd name="adj" fmla="val 50000"/>
+            </a:avLst>
+          </a:prstGeom>
+          <a:solidFill>
+            <a:srgbClr val="FFFFFF"/>
+          </a:solidFill>
+          <a:ln>
+            <a:noFill/>
+          </a:ln>
+          <a:effectLst/>
+        </p:spPr>
+        <p:style>
+          <a:lnRef idx="1">
+            <a:schemeClr val="accent1"/>
+          </a:lnRef>
+          <a:fillRef idx="3">
+            <a:schemeClr val="accent1"/>
+          </a:fillRef>
+          <a:effectRef idx="2">
+            <a:schemeClr val="accent1"/>
+          </a:effectRef>
+          <a:fontRef idx="minor">
+            <a:schemeClr val="lt1"/>
+          </a:fontRef>
+        </p:style>
+        <p:txBody>
+          <a:bodyPr rtlCol="0" anchor="ctr"/>
+          <a:lstStyle/>
+          <a:p/>
+        </p:txBody>
+      </p:sp>
+      <p:sp>
+        <p:nvSpPr>
+          <p:cNvPr id="5" name="ChipTxt"/>
+          <p:cNvSpPr txBox="1"/>
+          <p:nvPr/>
+        </p:nvSpPr>
+        <p:spPr>
+          <a:xfrm>
+            <a:off x="457200" y="173736"/>
+            <a:ext cx="3017520" cy="310896"/>
+          </a:xfrm>
+          <a:prstGeom prst="rect">
+            <a:avLst/>
+          </a:prstGeom>
+          <a:noFill/>
+        </p:spPr>
+        <p:txBody>
+          <a:bodyPr wrap="square" anchor="ctr" lIns="45720" rIns="45720" tIns="27432" bIns="27432">
+            <a:normAutofit/>
+          </a:bodyPr>
+          <a:lstStyle/>
+          <a:p>
+            <a:pPr algn="ctr"/>
+            <a:r>
+              <a:rPr sz="950" b="1">
+                <a:solidFill>
+                  <a:srgbClr val="157355"/>
+                </a:solidFill>
+                <a:latin typeface="Inter"/>
+              </a:rPr>
+              <a:t>RETO 7 · ONDERHANDELING &amp; DILEMMA</a:t>
+            </a:r>
+          </a:p>
+        </p:txBody>
+      </p:sp>
+      <p:sp>
+        <p:nvSpPr>
+          <p:cNvPr id="6" name="Titulo"/>
+          <p:cNvSpPr txBox="1"/>
+          <p:nvPr/>
+        </p:nvSpPr>
+        <p:spPr>
+          <a:xfrm>
+            <a:off x="457200" y="502920"/>
+            <a:ext cx="8412480" cy="475488"/>
+          </a:xfrm>
+          <a:prstGeom prst="rect">
+            <a:avLst/>
+          </a:prstGeom>
+          <a:noFill/>
+        </p:spPr>
+        <p:txBody>
+          <a:bodyPr wrap="square" anchor="t" lIns="45720" rIns="45720" tIns="27432" bIns="27432">
+            <a:normAutofit/>
+          </a:bodyPr>
+          <a:lstStyle/>
+          <a:p>
+            <a:pPr algn="l"/>
+            <a:r>
+              <a:rPr sz="2700" b="1">
+                <a:solidFill>
+                  <a:srgbClr val="FFFFFF"/>
+                </a:solidFill>
+                <a:latin typeface="Bricolage Grotesque"/>
+              </a:rPr>
+              <a:t>El clima que decide</a:t>
+            </a:r>
+          </a:p>
+        </p:txBody>
+      </p:sp>
+      <p:sp>
+        <p:nvSpPr>
+          <p:cNvPr id="7" name="Badges"/>
+          <p:cNvSpPr txBox="1"/>
+          <p:nvPr/>
+        </p:nvSpPr>
+        <p:spPr>
+          <a:xfrm>
+            <a:off x="9052560" y="256032"/>
+            <a:ext cx="2651760" cy="640080"/>
+          </a:xfrm>
+          <a:prstGeom prst="rect">
+            <a:avLst/>
+          </a:prstGeom>
+          <a:noFill/>
+        </p:spPr>
+        <p:txBody>
+          <a:bodyPr wrap="square" anchor="t" lIns="45720" rIns="45720" tIns="27432" bIns="27432">
+            <a:normAutofit/>
+          </a:bodyPr>
+          <a:lstStyle/>
+          <a:p>
+            <a:pPr algn="r"/>
+            <a:r>
+              <a:rPr sz="1000">
+                <a:solidFill>
+                  <a:srgbClr val="E4F4EE"/>
+                </a:solidFill>
+                <a:latin typeface="Inter"/>
+              </a:rPr>
+              <a:t>👨‍👩‍👧 En grupos</a:t>
+            </a:r>
+          </a:p>
+          <a:p>
+            <a:pPr algn="r"/>
+            <a:r>
+              <a:rPr sz="1000">
+                <a:solidFill>
+                  <a:srgbClr val="E4F4EE"/>
+                </a:solidFill>
+                <a:latin typeface="Inter"/>
+              </a:rPr>
+              <a:t>± 15 min · ★★★</a:t>
+            </a:r>
+          </a:p>
+        </p:txBody>
+      </p:sp>
+      <p:sp>
+        <p:nvSpPr>
+          <p:cNvPr id="8" name="Gancho"/>
+          <p:cNvSpPr txBox="1"/>
+          <p:nvPr/>
+        </p:nvSpPr>
+        <p:spPr>
+          <a:xfrm>
+            <a:off x="457200" y="1225296"/>
+            <a:ext cx="11274552" cy="566928"/>
+          </a:xfrm>
+          <a:prstGeom prst="rect">
+            <a:avLst/>
+          </a:prstGeom>
+          <a:noFill/>
+        </p:spPr>
+        <p:txBody>
+          <a:bodyPr wrap="square" anchor="t" lIns="45720" rIns="45720" tIns="27432" bIns="27432">
+            <a:normAutofit/>
+          </a:bodyPr>
+          <a:lstStyle/>
+          <a:p>
+            <a:pPr algn="l"/>
+            <a:r>
+              <a:rPr sz="1600" b="1">
+                <a:solidFill>
+                  <a:srgbClr val="157355"/>
+                </a:solidFill>
+                <a:latin typeface="Bricolage Grotesque"/>
+              </a:rPr>
+              <a:t>Tres días, tres pronósticos, un solo permiso para subir.</a:t>
+            </a:r>
+          </a:p>
+          <a:p>
+            <a:pPr algn="l"/>
+            <a:r>
+              <a:rPr sz="1100" i="1">
+                <a:solidFill>
+                  <a:srgbClr val="6A6E78"/>
+                </a:solidFill>
+                <a:latin typeface="Inter"/>
+              </a:rPr>
+              <a:t>Drie dagen, drie voorspellingen, maar één vergunning om te klimmen.</a:t>
+            </a:r>
+          </a:p>
+        </p:txBody>
+      </p:sp>
+      <p:sp>
+        <p:nvSpPr>
+          <p:cNvPr id="9" name="ReglaCaja"/>
+          <p:cNvSpPr/>
+          <p:nvPr/>
+        </p:nvSpPr>
+        <p:spPr>
+          <a:xfrm>
+            <a:off x="457200" y="1847088"/>
+            <a:ext cx="11274552" cy="658368"/>
+          </a:xfrm>
+          <a:prstGeom prst="roundRect">
+            <a:avLst>
+              <a:gd name="adj" fmla="val 5000"/>
+            </a:avLst>
+          </a:prstGeom>
+          <a:solidFill>
+            <a:srgbClr val="FBF3D6"/>
+          </a:solidFill>
+          <a:ln>
+            <a:noFill/>
+          </a:ln>
+          <a:effectLst/>
+        </p:spPr>
+        <p:style>
+          <a:lnRef idx="1">
+            <a:schemeClr val="accent1"/>
+          </a:lnRef>
+          <a:fillRef idx="3">
+            <a:schemeClr val="accent1"/>
+          </a:fillRef>
+          <a:effectRef idx="2">
+            <a:schemeClr val="accent1"/>
+          </a:effectRef>
+          <a:fontRef idx="minor">
+            <a:schemeClr val="lt1"/>
+          </a:fontRef>
+        </p:style>
+        <p:txBody>
+          <a:bodyPr rtlCol="0" anchor="ctr"/>
+          <a:lstStyle/>
+          <a:p/>
+        </p:txBody>
+      </p:sp>
+      <p:sp>
+        <p:nvSpPr>
+          <p:cNvPr id="10" name="ReglaTxt"/>
+          <p:cNvSpPr txBox="1"/>
+          <p:nvPr/>
+        </p:nvSpPr>
+        <p:spPr>
+          <a:xfrm>
+            <a:off x="603504" y="1883664"/>
+            <a:ext cx="10972800" cy="585216"/>
+          </a:xfrm>
+          <a:prstGeom prst="rect">
+            <a:avLst/>
+          </a:prstGeom>
+          <a:noFill/>
+        </p:spPr>
+        <p:txBody>
+          <a:bodyPr wrap="square" anchor="t" lIns="45720" rIns="45720" tIns="27432" bIns="27432">
+            <a:normAutofit/>
+          </a:bodyPr>
+          <a:lstStyle/>
+          <a:p>
+            <a:pPr algn="l"/>
+            <a:r>
+              <a:rPr sz="850" b="1">
+                <a:solidFill>
+                  <a:srgbClr val="B7860B"/>
+                </a:solidFill>
+                <a:latin typeface="Inter"/>
+              </a:rPr>
+              <a:t>LA REGLA DEL RETO</a:t>
+            </a:r>
+          </a:p>
+          <a:p>
+            <a:pPr algn="l"/>
+            <a:r>
+              <a:rPr sz="1100">
+                <a:solidFill>
+                  <a:srgbClr val="20242E"/>
+                </a:solidFill>
+                <a:latin typeface="Inter"/>
+              </a:rPr>
+              <a:t>Elke stem wordt verantwoord met een weerdetail én een gevolg («si llueve, el camino…»). Een stem zonder weerreden telt niet mee.</a:t>
+            </a:r>
+          </a:p>
+        </p:txBody>
+      </p:sp>
+      <p:sp>
+        <p:nvSpPr>
+          <p:cNvPr id="11" name="Tarjeta 0"/>
+          <p:cNvSpPr/>
+          <p:nvPr/>
+        </p:nvSpPr>
+        <p:spPr>
+          <a:xfrm>
+            <a:off x="457200" y="2670048"/>
+            <a:ext cx="2708910" cy="1170432"/>
+          </a:xfrm>
+          <a:prstGeom prst="roundRect">
+            <a:avLst>
+              <a:gd name="adj" fmla="val 6000"/>
+            </a:avLst>
+          </a:prstGeom>
+          <a:solidFill>
+            <a:srgbClr val="FFFFFF"/>
+          </a:solidFill>
+          <a:ln w="12700">
+            <a:solidFill>
+              <a:srgbClr val="E4E3DE"/>
+            </a:solidFill>
+          </a:ln>
+          <a:effectLst/>
+        </p:spPr>
+        <p:style>
+          <a:lnRef idx="1">
+            <a:schemeClr val="accent1"/>
+          </a:lnRef>
+          <a:fillRef idx="3">
+            <a:schemeClr val="accent1"/>
+          </a:fillRef>
+          <a:effectRef idx="2">
+            <a:schemeClr val="accent1"/>
+          </a:effectRef>
+          <a:fontRef idx="minor">
+            <a:schemeClr val="lt1"/>
+          </a:fontRef>
+        </p:style>
+        <p:txBody>
+          <a:bodyPr rtlCol="0" anchor="ctr"/>
+          <a:lstStyle/>
+          <a:p/>
+        </p:txBody>
+      </p:sp>
+      <p:sp>
+        <p:nvSpPr>
+          <p:cNvPr id="12" name="TarjetaTxt 0"/>
+          <p:cNvSpPr txBox="1"/>
+          <p:nvPr/>
+        </p:nvSpPr>
+        <p:spPr>
+          <a:xfrm>
+            <a:off x="548640" y="2724912"/>
+            <a:ext cx="2526030" cy="859536"/>
+          </a:xfrm>
+          <a:prstGeom prst="rect">
+            <a:avLst/>
+          </a:prstGeom>
+          <a:noFill/>
+        </p:spPr>
+        <p:txBody>
+          <a:bodyPr wrap="square" anchor="t" lIns="45720" rIns="45720" tIns="27432" bIns="27432">
+            <a:normAutofit/>
+          </a:bodyPr>
+          <a:lstStyle/>
+          <a:p>
+            <a:pPr algn="l"/>
+            <a:r>
+              <a:rPr sz="1100" b="1">
+                <a:solidFill>
+                  <a:srgbClr val="157355"/>
+                </a:solidFill>
+                <a:latin typeface="Bricolage Grotesque"/>
+              </a:rPr>
+              <a:t>jueves</a:t>
+            </a:r>
+          </a:p>
+          <a:p>
+            <a:pPr algn="l"/>
+            <a:r>
+              <a:rPr sz="1000">
+                <a:solidFill>
+                  <a:srgbClr val="20242E"/>
+                </a:solidFill>
+                <a:latin typeface="Inter"/>
+              </a:rPr>
+              <a:t>sol por la mañana, tormenta a las tres — el camino de piedra se moja y resbala</a:t>
+            </a:r>
+          </a:p>
+        </p:txBody>
+      </p:sp>
+      <p:sp>
+        <p:nvSpPr>
+          <p:cNvPr id="13" name="Onthul 0"/>
+          <p:cNvSpPr/>
+          <p:nvPr/>
+        </p:nvSpPr>
+        <p:spPr>
+          <a:xfrm>
+            <a:off x="548640" y="3547872"/>
+            <a:ext cx="2526030" cy="237744"/>
+          </a:xfrm>
+          <a:prstGeom prst="roundRect">
+            <a:avLst>
+              <a:gd name="adj" fmla="val 20000"/>
+            </a:avLst>
+          </a:prstGeom>
+          <a:solidFill>
+            <a:srgbClr val="E4F4EE"/>
+          </a:solidFill>
+          <a:ln>
+            <a:noFill/>
+          </a:ln>
+          <a:effectLst/>
+        </p:spPr>
+        <p:style>
+          <a:lnRef idx="1">
+            <a:schemeClr val="accent1"/>
+          </a:lnRef>
+          <a:fillRef idx="3">
+            <a:schemeClr val="accent1"/>
+          </a:fillRef>
+          <a:effectRef idx="2">
+            <a:schemeClr val="accent1"/>
+          </a:effectRef>
+          <a:fontRef idx="minor">
+            <a:schemeClr val="lt1"/>
+          </a:fontRef>
+        </p:style>
+        <p:txBody>
+          <a:bodyPr rtlCol="0" anchor="ctr"/>
+          <a:lstStyle/>
+          <a:p/>
+        </p:txBody>
+      </p:sp>
+      <p:sp>
+        <p:nvSpPr>
+          <p:cNvPr id="14" name="OnthulTxt 0"/>
+          <p:cNvSpPr txBox="1"/>
+          <p:nvPr/>
+        </p:nvSpPr>
+        <p:spPr>
+          <a:xfrm>
+            <a:off x="566928" y="3547872"/>
+            <a:ext cx="2489454" cy="237744"/>
+          </a:xfrm>
+          <a:prstGeom prst="rect">
+            <a:avLst/>
+          </a:prstGeom>
+          <a:noFill/>
+        </p:spPr>
+        <p:txBody>
+          <a:bodyPr wrap="square" anchor="ctr" lIns="45720" rIns="45720" tIns="27432" bIns="27432">
+            <a:normAutofit/>
+          </a:bodyPr>
+          <a:lstStyle/>
+          <a:p>
+            <a:pPr algn="l"/>
+            <a:r>
+              <a:rPr sz="850" b="1">
+                <a:solidFill>
+                  <a:srgbClr val="157355"/>
+                </a:solidFill>
+                <a:latin typeface="Inter"/>
+              </a:rPr>
+              <a:t>¿lo habéis dicho?</a:t>
+            </a:r>
+          </a:p>
+        </p:txBody>
+      </p:sp>
+      <p:sp>
+        <p:nvSpPr>
+          <p:cNvPr id="15" name="Tarjeta 1"/>
+          <p:cNvSpPr/>
+          <p:nvPr/>
+        </p:nvSpPr>
+        <p:spPr>
+          <a:xfrm>
+            <a:off x="3312414" y="2670048"/>
+            <a:ext cx="2708910" cy="1170432"/>
+          </a:xfrm>
+          <a:prstGeom prst="roundRect">
+            <a:avLst>
+              <a:gd name="adj" fmla="val 6000"/>
+            </a:avLst>
+          </a:prstGeom>
+          <a:solidFill>
+            <a:srgbClr val="FFFFFF"/>
+          </a:solidFill>
+          <a:ln w="12700">
+            <a:solidFill>
+              <a:srgbClr val="E4E3DE"/>
+            </a:solidFill>
+          </a:ln>
+          <a:effectLst/>
+        </p:spPr>
+        <p:style>
+          <a:lnRef idx="1">
+            <a:schemeClr val="accent1"/>
+          </a:lnRef>
+          <a:fillRef idx="3">
+            <a:schemeClr val="accent1"/>
+          </a:fillRef>
+          <a:effectRef idx="2">
+            <a:schemeClr val="accent1"/>
+          </a:effectRef>
+          <a:fontRef idx="minor">
+            <a:schemeClr val="lt1"/>
+          </a:fontRef>
+        </p:style>
+        <p:txBody>
+          <a:bodyPr rtlCol="0" anchor="ctr"/>
+          <a:lstStyle/>
+          <a:p/>
+        </p:txBody>
+      </p:sp>
+      <p:sp>
+        <p:nvSpPr>
+          <p:cNvPr id="16" name="TarjetaTxt 1"/>
+          <p:cNvSpPr txBox="1"/>
+          <p:nvPr/>
+        </p:nvSpPr>
+        <p:spPr>
+          <a:xfrm>
+            <a:off x="3403854" y="2724912"/>
+            <a:ext cx="2526030" cy="859536"/>
+          </a:xfrm>
+          <a:prstGeom prst="rect">
+            <a:avLst/>
+          </a:prstGeom>
+          <a:noFill/>
+        </p:spPr>
+        <p:txBody>
+          <a:bodyPr wrap="square" anchor="t" lIns="45720" rIns="45720" tIns="27432" bIns="27432">
+            <a:normAutofit/>
+          </a:bodyPr>
+          <a:lstStyle/>
+          <a:p>
+            <a:pPr algn="l"/>
+            <a:r>
+              <a:rPr sz="1100" b="1">
+                <a:solidFill>
+                  <a:srgbClr val="157355"/>
+                </a:solidFill>
+                <a:latin typeface="Bricolage Grotesque"/>
+              </a:rPr>
+              <a:t>viernes</a:t>
+            </a:r>
+          </a:p>
+          <a:p>
+            <a:pPr algn="l"/>
+            <a:r>
+              <a:rPr sz="1000">
+                <a:solidFill>
+                  <a:srgbClr val="20242E"/>
+                </a:solidFill>
+                <a:latin typeface="Inter"/>
+              </a:rPr>
+              <a:t>nublado todo el día, 4 °C, sin lluvia — frío pero seco; hay que llevar ropa de abrigo</a:t>
+            </a:r>
+          </a:p>
+        </p:txBody>
+      </p:sp>
+      <p:sp>
+        <p:nvSpPr>
+          <p:cNvPr id="17" name="Onthul 1"/>
+          <p:cNvSpPr/>
+          <p:nvPr/>
+        </p:nvSpPr>
+        <p:spPr>
+          <a:xfrm>
+            <a:off x="3403854" y="3547872"/>
+            <a:ext cx="2526030" cy="237744"/>
+          </a:xfrm>
+          <a:prstGeom prst="roundRect">
+            <a:avLst>
+              <a:gd name="adj" fmla="val 20000"/>
+            </a:avLst>
+          </a:prstGeom>
+          <a:solidFill>
+            <a:srgbClr val="E4F4EE"/>
+          </a:solidFill>
+          <a:ln>
+            <a:noFill/>
+          </a:ln>
+          <a:effectLst/>
+        </p:spPr>
+        <p:style>
+          <a:lnRef idx="1">
+            <a:schemeClr val="accent1"/>
+          </a:lnRef>
+          <a:fillRef idx="3">
+            <a:schemeClr val="accent1"/>
+          </a:fillRef>
+          <a:effectRef idx="2">
+            <a:schemeClr val="accent1"/>
+          </a:effectRef>
+          <a:fontRef idx="minor">
+            <a:schemeClr val="lt1"/>
+          </a:fontRef>
+        </p:style>
+        <p:txBody>
+          <a:bodyPr rtlCol="0" anchor="ctr"/>
+          <a:lstStyle/>
+          <a:p/>
+        </p:txBody>
+      </p:sp>
+      <p:sp>
+        <p:nvSpPr>
+          <p:cNvPr id="18" name="OnthulTxt 1"/>
+          <p:cNvSpPr txBox="1"/>
+          <p:nvPr/>
+        </p:nvSpPr>
+        <p:spPr>
+          <a:xfrm>
+            <a:off x="3422142" y="3547872"/>
+            <a:ext cx="2489454" cy="237744"/>
+          </a:xfrm>
+          <a:prstGeom prst="rect">
+            <a:avLst/>
+          </a:prstGeom>
+          <a:noFill/>
+        </p:spPr>
+        <p:txBody>
+          <a:bodyPr wrap="square" anchor="ctr" lIns="45720" rIns="45720" tIns="27432" bIns="27432">
+            <a:normAutofit/>
+          </a:bodyPr>
+          <a:lstStyle/>
+          <a:p>
+            <a:pPr algn="l"/>
+            <a:r>
+              <a:rPr sz="850" b="1">
+                <a:solidFill>
+                  <a:srgbClr val="157355"/>
+                </a:solidFill>
+                <a:latin typeface="Inter"/>
+              </a:rPr>
+              <a:t>¿lo habéis dicho?</a:t>
+            </a:r>
+          </a:p>
+        </p:txBody>
+      </p:sp>
+      <p:sp>
+        <p:nvSpPr>
+          <p:cNvPr id="19" name="Tarjeta 2"/>
+          <p:cNvSpPr/>
+          <p:nvPr/>
+        </p:nvSpPr>
+        <p:spPr>
+          <a:xfrm>
+            <a:off x="6167628" y="2670048"/>
+            <a:ext cx="2708910" cy="1170432"/>
+          </a:xfrm>
+          <a:prstGeom prst="roundRect">
+            <a:avLst>
+              <a:gd name="adj" fmla="val 6000"/>
+            </a:avLst>
+          </a:prstGeom>
+          <a:solidFill>
+            <a:srgbClr val="FFFFFF"/>
+          </a:solidFill>
+          <a:ln w="12700">
+            <a:solidFill>
+              <a:srgbClr val="E4E3DE"/>
+            </a:solidFill>
+          </a:ln>
+          <a:effectLst/>
+        </p:spPr>
+        <p:style>
+          <a:lnRef idx="1">
+            <a:schemeClr val="accent1"/>
+          </a:lnRef>
+          <a:fillRef idx="3">
+            <a:schemeClr val="accent1"/>
+          </a:fillRef>
+          <a:effectRef idx="2">
+            <a:schemeClr val="accent1"/>
+          </a:effectRef>
+          <a:fontRef idx="minor">
+            <a:schemeClr val="lt1"/>
+          </a:fontRef>
+        </p:style>
+        <p:txBody>
+          <a:bodyPr rtlCol="0" anchor="ctr"/>
+          <a:lstStyle/>
+          <a:p/>
+        </p:txBody>
+      </p:sp>
+      <p:sp>
+        <p:nvSpPr>
+          <p:cNvPr id="20" name="TarjetaTxt 2"/>
+          <p:cNvSpPr txBox="1"/>
+          <p:nvPr/>
+        </p:nvSpPr>
+        <p:spPr>
+          <a:xfrm>
+            <a:off x="6259068" y="2724912"/>
+            <a:ext cx="2526030" cy="859536"/>
+          </a:xfrm>
+          <a:prstGeom prst="rect">
+            <a:avLst/>
+          </a:prstGeom>
+          <a:noFill/>
+        </p:spPr>
+        <p:txBody>
+          <a:bodyPr wrap="square" anchor="t" lIns="45720" rIns="45720" tIns="27432" bIns="27432">
+            <a:normAutofit/>
+          </a:bodyPr>
+          <a:lstStyle/>
+          <a:p>
+            <a:pPr algn="l"/>
+            <a:r>
+              <a:rPr sz="1100" b="1">
+                <a:solidFill>
+                  <a:srgbClr val="157355"/>
+                </a:solidFill>
+                <a:latin typeface="Bricolage Grotesque"/>
+              </a:rPr>
+              <a:t>sábado</a:t>
+            </a:r>
+          </a:p>
+          <a:p>
+            <a:pPr algn="l"/>
+            <a:r>
+              <a:rPr sz="1000">
+                <a:solidFill>
+                  <a:srgbClr val="20242E"/>
+                </a:solidFill>
+                <a:latin typeface="Inter"/>
+              </a:rPr>
+              <a:t>sol todo el día, 22 °C — perfecto, pero es el día con más gente y menos cupo</a:t>
+            </a:r>
+          </a:p>
+        </p:txBody>
+      </p:sp>
+      <p:sp>
+        <p:nvSpPr>
+          <p:cNvPr id="21" name="Onthul 2"/>
+          <p:cNvSpPr/>
+          <p:nvPr/>
+        </p:nvSpPr>
+        <p:spPr>
+          <a:xfrm>
+            <a:off x="6259068" y="3547872"/>
+            <a:ext cx="2526030" cy="237744"/>
+          </a:xfrm>
+          <a:prstGeom prst="roundRect">
+            <a:avLst>
+              <a:gd name="adj" fmla="val 20000"/>
+            </a:avLst>
+          </a:prstGeom>
+          <a:solidFill>
+            <a:srgbClr val="E4F4EE"/>
+          </a:solidFill>
+          <a:ln>
+            <a:noFill/>
+          </a:ln>
+          <a:effectLst/>
+        </p:spPr>
+        <p:style>
+          <a:lnRef idx="1">
+            <a:schemeClr val="accent1"/>
+          </a:lnRef>
+          <a:fillRef idx="3">
+            <a:schemeClr val="accent1"/>
+          </a:fillRef>
+          <a:effectRef idx="2">
+            <a:schemeClr val="accent1"/>
+          </a:effectRef>
+          <a:fontRef idx="minor">
+            <a:schemeClr val="lt1"/>
+          </a:fontRef>
+        </p:style>
+        <p:txBody>
+          <a:bodyPr rtlCol="0" anchor="ctr"/>
+          <a:lstStyle/>
+          <a:p/>
+        </p:txBody>
+      </p:sp>
+      <p:sp>
+        <p:nvSpPr>
+          <p:cNvPr id="22" name="OnthulTxt 2"/>
+          <p:cNvSpPr txBox="1"/>
+          <p:nvPr/>
+        </p:nvSpPr>
+        <p:spPr>
+          <a:xfrm>
+            <a:off x="6277356" y="3547872"/>
+            <a:ext cx="2489454" cy="237744"/>
+          </a:xfrm>
+          <a:prstGeom prst="rect">
+            <a:avLst/>
+          </a:prstGeom>
+          <a:noFill/>
+        </p:spPr>
+        <p:txBody>
+          <a:bodyPr wrap="square" anchor="ctr" lIns="45720" rIns="45720" tIns="27432" bIns="27432">
+            <a:normAutofit/>
+          </a:bodyPr>
+          <a:lstStyle/>
+          <a:p>
+            <a:pPr algn="l"/>
+            <a:r>
+              <a:rPr sz="850" b="1">
+                <a:solidFill>
+                  <a:srgbClr val="157355"/>
+                </a:solidFill>
+                <a:latin typeface="Inter"/>
+              </a:rPr>
+              <a:t>¿lo habéis dicho?</a:t>
+            </a:r>
+          </a:p>
+        </p:txBody>
+      </p:sp>
+      <p:sp>
+        <p:nvSpPr>
+          <p:cNvPr id="23" name="Tarjeta 3"/>
+          <p:cNvSpPr/>
+          <p:nvPr/>
+        </p:nvSpPr>
+        <p:spPr>
+          <a:xfrm>
+            <a:off x="9022842" y="2670048"/>
+            <a:ext cx="2708910" cy="1170432"/>
+          </a:xfrm>
+          <a:prstGeom prst="roundRect">
+            <a:avLst>
+              <a:gd name="adj" fmla="val 6000"/>
+            </a:avLst>
+          </a:prstGeom>
+          <a:solidFill>
+            <a:srgbClr val="FFFFFF"/>
+          </a:solidFill>
+          <a:ln w="12700">
+            <a:solidFill>
+              <a:srgbClr val="E4E3DE"/>
+            </a:solidFill>
+          </a:ln>
+          <a:effectLst/>
+        </p:spPr>
+        <p:style>
+          <a:lnRef idx="1">
+            <a:schemeClr val="accent1"/>
+          </a:lnRef>
+          <a:fillRef idx="3">
+            <a:schemeClr val="accent1"/>
+          </a:fillRef>
+          <a:effectRef idx="2">
+            <a:schemeClr val="accent1"/>
+          </a:effectRef>
+          <a:fontRef idx="minor">
+            <a:schemeClr val="lt1"/>
+          </a:fontRef>
+        </p:style>
+        <p:txBody>
+          <a:bodyPr rtlCol="0" anchor="ctr"/>
+          <a:lstStyle/>
+          <a:p/>
+        </p:txBody>
+      </p:sp>
+      <p:sp>
+        <p:nvSpPr>
+          <p:cNvPr id="24" name="TarjetaTxt 3"/>
+          <p:cNvSpPr txBox="1"/>
+          <p:nvPr/>
+        </p:nvSpPr>
+        <p:spPr>
+          <a:xfrm>
+            <a:off x="9114282" y="2724912"/>
+            <a:ext cx="2526030" cy="1060704"/>
+          </a:xfrm>
+          <a:prstGeom prst="rect">
+            <a:avLst/>
+          </a:prstGeom>
+          <a:noFill/>
+        </p:spPr>
+        <p:txBody>
+          <a:bodyPr wrap="square" anchor="t" lIns="45720" rIns="45720" tIns="27432" bIns="27432">
+            <a:normAutofit/>
+          </a:bodyPr>
+          <a:lstStyle/>
+          <a:p>
+            <a:pPr algn="l"/>
+            <a:r>
+              <a:rPr sz="1100" b="1">
+                <a:solidFill>
+                  <a:srgbClr val="157355"/>
+                </a:solidFill>
+                <a:latin typeface="Bricolage Grotesque"/>
+              </a:rPr>
+              <a:t>marco</a:t>
+            </a:r>
+          </a:p>
+          <a:p>
+            <a:pPr algn="l"/>
+            <a:r>
+              <a:rPr sz="1000">
+                <a:solidFill>
+                  <a:srgbClr val="20242E"/>
+                </a:solidFill>
+                <a:latin typeface="Inter"/>
+              </a:rPr>
+              <a:t>Yo voto por el … porque …</a:t>
+            </a:r>
+          </a:p>
+        </p:txBody>
+      </p:sp>
+      <p:sp>
+        <p:nvSpPr>
+          <p:cNvPr id="25" name="Tarjeta 4"/>
+          <p:cNvSpPr/>
+          <p:nvPr/>
+        </p:nvSpPr>
+        <p:spPr>
+          <a:xfrm>
+            <a:off x="457200" y="3968496"/>
+            <a:ext cx="2708910" cy="1170432"/>
+          </a:xfrm>
+          <a:prstGeom prst="roundRect">
+            <a:avLst>
+              <a:gd name="adj" fmla="val 6000"/>
+            </a:avLst>
+          </a:prstGeom>
+          <a:solidFill>
+            <a:srgbClr val="FFFFFF"/>
+          </a:solidFill>
+          <a:ln w="12700">
+            <a:solidFill>
+              <a:srgbClr val="E4E3DE"/>
+            </a:solidFill>
+          </a:ln>
+          <a:effectLst/>
+        </p:spPr>
+        <p:style>
+          <a:lnRef idx="1">
+            <a:schemeClr val="accent1"/>
+          </a:lnRef>
+          <a:fillRef idx="3">
+            <a:schemeClr val="accent1"/>
+          </a:fillRef>
+          <a:effectRef idx="2">
+            <a:schemeClr val="accent1"/>
+          </a:effectRef>
+          <a:fontRef idx="minor">
+            <a:schemeClr val="lt1"/>
+          </a:fontRef>
+        </p:style>
+        <p:txBody>
+          <a:bodyPr rtlCol="0" anchor="ctr"/>
+          <a:lstStyle/>
+          <a:p/>
+        </p:txBody>
+      </p:sp>
+      <p:sp>
+        <p:nvSpPr>
+          <p:cNvPr id="26" name="TarjetaTxt 4"/>
+          <p:cNvSpPr txBox="1"/>
+          <p:nvPr/>
+        </p:nvSpPr>
+        <p:spPr>
+          <a:xfrm>
+            <a:off x="548640" y="4023360"/>
+            <a:ext cx="2526030" cy="1060704"/>
+          </a:xfrm>
+          <a:prstGeom prst="rect">
+            <a:avLst/>
+          </a:prstGeom>
+          <a:noFill/>
+        </p:spPr>
+        <p:txBody>
+          <a:bodyPr wrap="square" anchor="t" lIns="45720" rIns="45720" tIns="27432" bIns="27432">
+            <a:normAutofit/>
+          </a:bodyPr>
+          <a:lstStyle/>
+          <a:p>
+            <a:pPr algn="l"/>
+            <a:r>
+              <a:rPr sz="1100" b="1">
+                <a:solidFill>
+                  <a:srgbClr val="157355"/>
+                </a:solidFill>
+                <a:latin typeface="Bricolage Grotesque"/>
+              </a:rPr>
+              <a:t>marco</a:t>
+            </a:r>
+          </a:p>
+          <a:p>
+            <a:pPr algn="l"/>
+            <a:r>
+              <a:rPr sz="1000">
+                <a:solidFill>
+                  <a:srgbClr val="20242E"/>
+                </a:solidFill>
+                <a:latin typeface="Inter"/>
+              </a:rPr>
+              <a:t>Si llueve, …</a:t>
+            </a:r>
+          </a:p>
+        </p:txBody>
+      </p:sp>
+      <p:sp>
+        <p:nvSpPr>
+          <p:cNvPr id="27" name="Tarjeta 5"/>
+          <p:cNvSpPr/>
+          <p:nvPr/>
+        </p:nvSpPr>
+        <p:spPr>
+          <a:xfrm>
+            <a:off x="3312414" y="3968496"/>
+            <a:ext cx="2708910" cy="1170432"/>
+          </a:xfrm>
+          <a:prstGeom prst="roundRect">
+            <a:avLst>
+              <a:gd name="adj" fmla="val 6000"/>
+            </a:avLst>
+          </a:prstGeom>
+          <a:solidFill>
+            <a:srgbClr val="FFFFFF"/>
+          </a:solidFill>
+          <a:ln w="12700">
+            <a:solidFill>
+              <a:srgbClr val="E4E3DE"/>
+            </a:solidFill>
+          </a:ln>
+          <a:effectLst/>
+        </p:spPr>
+        <p:style>
+          <a:lnRef idx="1">
+            <a:schemeClr val="accent1"/>
+          </a:lnRef>
+          <a:fillRef idx="3">
+            <a:schemeClr val="accent1"/>
+          </a:fillRef>
+          <a:effectRef idx="2">
+            <a:schemeClr val="accent1"/>
+          </a:effectRef>
+          <a:fontRef idx="minor">
+            <a:schemeClr val="lt1"/>
+          </a:fontRef>
+        </p:style>
+        <p:txBody>
+          <a:bodyPr rtlCol="0" anchor="ctr"/>
+          <a:lstStyle/>
+          <a:p/>
+        </p:txBody>
+      </p:sp>
+      <p:sp>
+        <p:nvSpPr>
+          <p:cNvPr id="28" name="TarjetaTxt 5"/>
+          <p:cNvSpPr txBox="1"/>
+          <p:nvPr/>
+        </p:nvSpPr>
+        <p:spPr>
+          <a:xfrm>
+            <a:off x="3403854" y="4023360"/>
+            <a:ext cx="2526030" cy="1060704"/>
+          </a:xfrm>
+          <a:prstGeom prst="rect">
+            <a:avLst/>
+          </a:prstGeom>
+          <a:noFill/>
+        </p:spPr>
+        <p:txBody>
+          <a:bodyPr wrap="square" anchor="t" lIns="45720" rIns="45720" tIns="27432" bIns="27432">
+            <a:normAutofit/>
+          </a:bodyPr>
+          <a:lstStyle/>
+          <a:p>
+            <a:pPr algn="l"/>
+            <a:r>
+              <a:rPr sz="1100" b="1">
+                <a:solidFill>
+                  <a:srgbClr val="157355"/>
+                </a:solidFill>
+                <a:latin typeface="Bricolage Grotesque"/>
+              </a:rPr>
+              <a:t>marco</a:t>
+            </a:r>
+          </a:p>
+          <a:p>
+            <a:pPr algn="l"/>
+            <a:r>
+              <a:rPr sz="1000">
+                <a:solidFill>
+                  <a:srgbClr val="20242E"/>
+                </a:solidFill>
+                <a:latin typeface="Inter"/>
+              </a:rPr>
+              <a:t>El problema del … es que …</a:t>
+            </a:r>
+          </a:p>
+        </p:txBody>
+      </p:sp>
+      <p:sp>
+        <p:nvSpPr>
+          <p:cNvPr id="29" name="Tarjeta 6"/>
+          <p:cNvSpPr/>
+          <p:nvPr/>
+        </p:nvSpPr>
+        <p:spPr>
+          <a:xfrm>
+            <a:off x="6167628" y="3968496"/>
+            <a:ext cx="2708910" cy="1170432"/>
+          </a:xfrm>
+          <a:prstGeom prst="roundRect">
+            <a:avLst>
+              <a:gd name="adj" fmla="val 6000"/>
+            </a:avLst>
+          </a:prstGeom>
+          <a:solidFill>
+            <a:srgbClr val="FFFFFF"/>
+          </a:solidFill>
+          <a:ln w="12700">
+            <a:solidFill>
+              <a:srgbClr val="E4E3DE"/>
+            </a:solidFill>
+          </a:ln>
+          <a:effectLst/>
+        </p:spPr>
+        <p:style>
+          <a:lnRef idx="1">
+            <a:schemeClr val="accent1"/>
+          </a:lnRef>
+          <a:fillRef idx="3">
+            <a:schemeClr val="accent1"/>
+          </a:fillRef>
+          <a:effectRef idx="2">
+            <a:schemeClr val="accent1"/>
+          </a:effectRef>
+          <a:fontRef idx="minor">
+            <a:schemeClr val="lt1"/>
+          </a:fontRef>
+        </p:style>
+        <p:txBody>
+          <a:bodyPr rtlCol="0" anchor="ctr"/>
+          <a:lstStyle/>
+          <a:p/>
+        </p:txBody>
+      </p:sp>
+      <p:sp>
+        <p:nvSpPr>
+          <p:cNvPr id="30" name="TarjetaTxt 6"/>
+          <p:cNvSpPr txBox="1"/>
+          <p:nvPr/>
+        </p:nvSpPr>
+        <p:spPr>
+          <a:xfrm>
+            <a:off x="6259068" y="4023360"/>
+            <a:ext cx="2526030" cy="1060704"/>
+          </a:xfrm>
+          <a:prstGeom prst="rect">
+            <a:avLst/>
+          </a:prstGeom>
+          <a:noFill/>
+        </p:spPr>
+        <p:txBody>
+          <a:bodyPr wrap="square" anchor="t" lIns="45720" rIns="45720" tIns="27432" bIns="27432">
+            <a:normAutofit/>
+          </a:bodyPr>
+          <a:lstStyle/>
+          <a:p>
+            <a:pPr algn="l"/>
+            <a:r>
+              <a:rPr sz="1100" b="1">
+                <a:solidFill>
+                  <a:srgbClr val="157355"/>
+                </a:solidFill>
+                <a:latin typeface="Bricolage Grotesque"/>
+              </a:rPr>
+              <a:t>marco</a:t>
+            </a:r>
+          </a:p>
+          <a:p>
+            <a:pPr algn="l"/>
+            <a:r>
+              <a:rPr sz="1000">
+                <a:solidFill>
+                  <a:srgbClr val="20242E"/>
+                </a:solidFill>
+                <a:latin typeface="Inter"/>
+              </a:rPr>
+              <a:t>Prefiero pasar frío que …</a:t>
+            </a:r>
+          </a:p>
+        </p:txBody>
+      </p:sp>
+      <p:sp>
+        <p:nvSpPr>
+          <p:cNvPr id="31" name="Tarjeta 7"/>
+          <p:cNvSpPr/>
+          <p:nvPr/>
+        </p:nvSpPr>
+        <p:spPr>
+          <a:xfrm>
+            <a:off x="9022842" y="3968496"/>
+            <a:ext cx="2708910" cy="1170432"/>
+          </a:xfrm>
+          <a:prstGeom prst="roundRect">
+            <a:avLst>
+              <a:gd name="adj" fmla="val 6000"/>
+            </a:avLst>
+          </a:prstGeom>
+          <a:solidFill>
+            <a:srgbClr val="FFFFFF"/>
+          </a:solidFill>
+          <a:ln w="12700">
+            <a:solidFill>
+              <a:srgbClr val="E4E3DE"/>
+            </a:solidFill>
+          </a:ln>
+          <a:effectLst/>
+        </p:spPr>
+        <p:style>
+          <a:lnRef idx="1">
+            <a:schemeClr val="accent1"/>
+          </a:lnRef>
+          <a:fillRef idx="3">
+            <a:schemeClr val="accent1"/>
+          </a:fillRef>
+          <a:effectRef idx="2">
+            <a:schemeClr val="accent1"/>
+          </a:effectRef>
+          <a:fontRef idx="minor">
+            <a:schemeClr val="lt1"/>
+          </a:fontRef>
+        </p:style>
+        <p:txBody>
+          <a:bodyPr rtlCol="0" anchor="ctr"/>
+          <a:lstStyle/>
+          <a:p/>
+        </p:txBody>
+      </p:sp>
+      <p:sp>
+        <p:nvSpPr>
+          <p:cNvPr id="32" name="TarjetaTxt 7"/>
+          <p:cNvSpPr txBox="1"/>
+          <p:nvPr/>
+        </p:nvSpPr>
+        <p:spPr>
+          <a:xfrm>
+            <a:off x="9114282" y="4023360"/>
+            <a:ext cx="2526030" cy="1060704"/>
+          </a:xfrm>
+          <a:prstGeom prst="rect">
+            <a:avLst/>
+          </a:prstGeom>
+          <a:noFill/>
+        </p:spPr>
+        <p:txBody>
+          <a:bodyPr wrap="square" anchor="t" lIns="45720" rIns="45720" tIns="27432" bIns="27432">
+            <a:normAutofit/>
+          </a:bodyPr>
+          <a:lstStyle/>
+          <a:p>
+            <a:pPr algn="l"/>
+            <a:r>
+              <a:rPr sz="1100" b="1">
+                <a:solidFill>
+                  <a:srgbClr val="157355"/>
+                </a:solidFill>
+                <a:latin typeface="Bricolage Grotesque"/>
+              </a:rPr>
+              <a:t>marco</a:t>
+            </a:r>
+          </a:p>
+          <a:p>
+            <a:pPr algn="l"/>
+            <a:r>
+              <a:rPr sz="1000">
+                <a:solidFill>
+                  <a:srgbClr val="20242E"/>
+                </a:solidFill>
+                <a:latin typeface="Inter"/>
+              </a:rPr>
+              <a:t>Entonces salimos el …, ¿de acuerdo?</a:t>
+            </a:r>
+          </a:p>
+        </p:txBody>
+      </p:sp>
+      <p:sp>
+        <p:nvSpPr>
+          <p:cNvPr id="33" name="Tarjeta 8"/>
+          <p:cNvSpPr/>
+          <p:nvPr/>
+        </p:nvSpPr>
+        <p:spPr>
+          <a:xfrm>
+            <a:off x="457200" y="5266944"/>
+            <a:ext cx="2708910" cy="1170432"/>
+          </a:xfrm>
+          <a:prstGeom prst="roundRect">
+            <a:avLst>
+              <a:gd name="adj" fmla="val 6000"/>
+            </a:avLst>
+          </a:prstGeom>
+          <a:solidFill>
+            <a:srgbClr val="FFFFFF"/>
+          </a:solidFill>
+          <a:ln w="12700">
+            <a:solidFill>
+              <a:srgbClr val="E4E3DE"/>
+            </a:solidFill>
+          </a:ln>
+          <a:effectLst/>
+        </p:spPr>
+        <p:style>
+          <a:lnRef idx="1">
+            <a:schemeClr val="accent1"/>
+          </a:lnRef>
+          <a:fillRef idx="3">
+            <a:schemeClr val="accent1"/>
+          </a:fillRef>
+          <a:effectRef idx="2">
+            <a:schemeClr val="accent1"/>
+          </a:effectRef>
+          <a:fontRef idx="minor">
+            <a:schemeClr val="lt1"/>
+          </a:fontRef>
+        </p:style>
+        <p:txBody>
+          <a:bodyPr rtlCol="0" anchor="ctr"/>
+          <a:lstStyle/>
+          <a:p/>
+        </p:txBody>
+      </p:sp>
+      <p:sp>
+        <p:nvSpPr>
+          <p:cNvPr id="34" name="TarjetaTxt 8"/>
+          <p:cNvSpPr txBox="1"/>
+          <p:nvPr/>
+        </p:nvSpPr>
+        <p:spPr>
+          <a:xfrm>
+            <a:off x="548640" y="5321808"/>
+            <a:ext cx="2526030" cy="1060704"/>
+          </a:xfrm>
+          <a:prstGeom prst="rect">
+            <a:avLst/>
+          </a:prstGeom>
+          <a:noFill/>
+        </p:spPr>
+        <p:txBody>
+          <a:bodyPr wrap="square" anchor="t" lIns="45720" rIns="45720" tIns="27432" bIns="27432">
+            <a:normAutofit/>
+          </a:bodyPr>
+          <a:lstStyle/>
+          <a:p>
+            <a:pPr algn="l"/>
+            <a:r>
+              <a:rPr sz="1100" b="1">
+                <a:solidFill>
+                  <a:srgbClr val="157355"/>
+                </a:solidFill>
+                <a:latin typeface="Bricolage Grotesque"/>
+              </a:rPr>
+              <a:t>El dilema</a:t>
+            </a:r>
+          </a:p>
+          <a:p>
+            <a:pPr algn="l"/>
+            <a:r>
+              <a:rPr sz="1000">
+                <a:solidFill>
+                  <a:srgbClr val="20242E"/>
+                </a:solidFill>
+                <a:latin typeface="Inter"/>
+              </a:rPr>
+              <a:t>El día con mejor tiempo es el día con más gente. No hay una respuesta correcta.</a:t>
+            </a:r>
+          </a:p>
+        </p:txBody>
+      </p:sp>
+    </p:spTree>
+  </p:cSld>
+  <p:clrMapOvr>
+    <a:masterClrMapping/>
+  </p:clrMapOvr>
+  <p:timing>
+    <p:tnLst>
+      <p:par>
+        <p:cTn id="1" dur="indefinite" restart="never" nodeType="tmRoot">
+          <p:childTnLst>
+            <p:seq concurrent="1" nextAc="seek">
+              <p:cTn id="2" dur="indefinite" nodeType="mainSeq">
+                <p:childTnLst>
+                  <p:par>
+                    <p:cTn id="5" fill="hold">
+                      <p:stCondLst>
+                        <p:cond delay="indefinite"/>
+                      </p:stCondLst>
+                      <p:childTnLst>
+                        <p:par>
+                          <p:cTn id="6" fill="hold">
+                            <p:stCondLst>
+                              <p:cond delay="0"/>
+                            </p:stCondLst>
+                            <p:childTnLst>
+                              <p:par>
+                                <p:cTn id="7" presetID="10" presetClass="entr" presetSubtype="0" fill="hold" grpId="0" nodeType="clickEffect">
+                                  <p:stCondLst>
+                                    <p:cond delay="0"/>
+                                  </p:stCondLst>
+                                  <p:childTnLst>
+                                    <p:set>
+                                      <p:cBhvr>
+                                        <p:cTn id="8" dur="1" fill="hold">
+                                          <p:stCondLst>
+                                            <p:cond delay="0"/>
+                                          </p:stCondLst>
+                                        </p:cTn>
+                                        <p:tgtEl>
+                                          <p:spTgt spid="13"/>
+                                        </p:tgtEl>
+                                        <p:attrNameLst>
+                                          <p:attrName>style.visibility</p:attrName>
+                                        </p:attrNameLst>
+                                      </p:cBhvr>
+                                      <p:to>
+                                        <p:strVal val="visible"/>
+                                      </p:to>
+                                    </p:set>
+                                    <p:animEffect transition="in" filter="fade">
+                                      <p:cBhvr>
+                                        <p:cTn id="9" dur="500"/>
+                                        <p:tgtEl>
+                                          <p:spTgt spid="13"/>
+                                        </p:tgtEl>
+                                      </p:cBhvr>
+                                    </p:animEffect>
+                                  </p:childTnLst>
+                                </p:cTn>
+                              </p:par>
+                            </p:childTnLst>
+                          </p:cTn>
+                        </p:par>
+                      </p:childTnLst>
+                    </p:cTn>
+                  </p:par>
+                  <p:par>
+                    <p:cTn id="10" fill="hold">
+                      <p:stCondLst>
+                        <p:cond delay="indefinite"/>
+                      </p:stCondLst>
+                      <p:childTnLst>
+                        <p:par>
+                          <p:cTn id="11" fill="hold">
+                            <p:stCondLst>
+                              <p:cond delay="0"/>
+                            </p:stCondLst>
+                            <p:childTnLst>
+                              <p:par>
+                                <p:cTn id="12" presetID="10" presetClass="entr" presetSubtype="0" fill="hold" grpId="0" nodeType="clickEffect">
+                                  <p:stCondLst>
+                                    <p:cond delay="0"/>
+                                  </p:stCondLst>
+                                  <p:childTnLst>
+                                    <p:set>
+                                      <p:cBhvr>
+                                        <p:cTn id="13" dur="1" fill="hold">
+                                          <p:stCondLst>
+                                            <p:cond delay="0"/>
+                                          </p:stCondLst>
+                                        </p:cTn>
+                                        <p:tgtEl>
+                                          <p:spTgt spid="14"/>
+                                        </p:tgtEl>
+                                        <p:attrNameLst>
+                                          <p:attrName>style.visibility</p:attrName>
+                                        </p:attrNameLst>
+                                      </p:cBhvr>
+                                      <p:to>
+                                        <p:strVal val="visible"/>
+                                      </p:to>
+                                    </p:set>
+                                    <p:animEffect transition="in" filter="fade">
+                                      <p:cBhvr>
+                                        <p:cTn id="14" dur="500"/>
+                                        <p:tgtEl>
+                                          <p:spTgt spid="14"/>
+                                        </p:tgtEl>
+                                      </p:cBhvr>
+                                    </p:animEffect>
+                                  </p:childTnLst>
+                                </p:cTn>
+                              </p:par>
+                            </p:childTnLst>
+                          </p:cTn>
+                        </p:par>
+                      </p:childTnLst>
+                    </p:cTn>
+                  </p:par>
+                  <p:par>
+                    <p:cTn id="15" fill="hold">
+                      <p:stCondLst>
+                        <p:cond delay="indefinite"/>
+                      </p:stCondLst>
+                      <p:childTnLst>
+                        <p:par>
+                          <p:cTn id="16" fill="hold">
+                            <p:stCondLst>
+                              <p:cond delay="0"/>
+                            </p:stCondLst>
+                            <p:childTnLst>
+                              <p:par>
+                                <p:cTn id="17" presetID="10" presetClass="entr" presetSubtype="0" fill="hold" grpId="0" nodeType="clickEffect">
+                                  <p:stCondLst>
+                                    <p:cond delay="0"/>
+                                  </p:stCondLst>
+                                  <p:childTnLst>
+                                    <p:set>
+                                      <p:cBhvr>
+                                        <p:cTn id="18" dur="1" fill="hold">
+                                          <p:stCondLst>
+                                            <p:cond delay="0"/>
+                                          </p:stCondLst>
+                                        </p:cTn>
+                                        <p:tgtEl>
+                                          <p:spTgt spid="17"/>
+                                        </p:tgtEl>
+                                        <p:attrNameLst>
+                                          <p:attrName>style.visibility</p:attrName>
+                                        </p:attrNameLst>
+                                      </p:cBhvr>
+                                      <p:to>
+                                        <p:strVal val="visible"/>
+                                      </p:to>
+                                    </p:set>
+                                    <p:animEffect transition="in" filter="fade">
+                                      <p:cBhvr>
+                                        <p:cTn id="19" dur="500"/>
+                                        <p:tgtEl>
+                                          <p:spTgt spid="17"/>
+                                        </p:tgtEl>
+                                      </p:cBhvr>
+                                    </p:animEffect>
+                                  </p:childTnLst>
+                                </p:cTn>
+                              </p:par>
+                            </p:childTnLst>
+                          </p:cTn>
+                        </p:par>
+                      </p:childTnLst>
+                    </p:cTn>
+                  </p:par>
+                  <p:par>
+                    <p:cTn id="20" fill="hold">
+                      <p:stCondLst>
+                        <p:cond delay="indefinite"/>
+                      </p:stCondLst>
+                      <p:childTnLst>
+                        <p:par>
+                          <p:cTn id="21" fill="hold">
+                            <p:stCondLst>
+                              <p:cond delay="0"/>
+                            </p:stCondLst>
+                            <p:childTnLst>
+                              <p:par>
+                                <p:cTn id="22" presetID="10" presetClass="entr" presetSubtype="0" fill="hold" grpId="0" nodeType="clickEffect">
+                                  <p:stCondLst>
+                                    <p:cond delay="0"/>
+                                  </p:stCondLst>
+                                  <p:childTnLst>
+                                    <p:set>
+                                      <p:cBhvr>
+                                        <p:cTn id="23" dur="1" fill="hold">
+                                          <p:stCondLst>
+                                            <p:cond delay="0"/>
+                                          </p:stCondLst>
+                                        </p:cTn>
+                                        <p:tgtEl>
+                                          <p:spTgt spid="18"/>
+                                        </p:tgtEl>
+                                        <p:attrNameLst>
+                                          <p:attrName>style.visibility</p:attrName>
+                                        </p:attrNameLst>
+                                      </p:cBhvr>
+                                      <p:to>
+                                        <p:strVal val="visible"/>
+                                      </p:to>
+                                    </p:set>
+                                    <p:animEffect transition="in" filter="fade">
+                                      <p:cBhvr>
+                                        <p:cTn id="24" dur="500"/>
+                                        <p:tgtEl>
+                                          <p:spTgt spid="18"/>
+                                        </p:tgtEl>
+                                      </p:cBhvr>
+                                    </p:animEffect>
+                                  </p:childTnLst>
+                                </p:cTn>
+                              </p:par>
+                            </p:childTnLst>
+                          </p:cTn>
+                        </p:par>
+                      </p:childTnLst>
+                    </p:cTn>
+                  </p:par>
+                  <p:par>
+                    <p:cTn id="25" fill="hold">
+                      <p:stCondLst>
+                        <p:cond delay="indefinite"/>
+                      </p:stCondLst>
+                      <p:childTnLst>
+                        <p:par>
+                          <p:cTn id="26" fill="hold">
+                            <p:stCondLst>
+                              <p:cond delay="0"/>
+                            </p:stCondLst>
+                            <p:childTnLst>
+                              <p:par>
+                                <p:cTn id="27" presetID="10" presetClass="entr" presetSubtype="0" fill="hold" grpId="0" nodeType="clickEffect">
+                                  <p:stCondLst>
+                                    <p:cond delay="0"/>
+                                  </p:stCondLst>
+                                  <p:childTnLst>
+                                    <p:set>
+                                      <p:cBhvr>
+                                        <p:cTn id="28" dur="1" fill="hold">
+                                          <p:stCondLst>
+                                            <p:cond delay="0"/>
+                                          </p:stCondLst>
+                                        </p:cTn>
+                                        <p:tgtEl>
+                                          <p:spTgt spid="21"/>
+                                        </p:tgtEl>
+                                        <p:attrNameLst>
+                                          <p:attrName>style.visibility</p:attrName>
+                                        </p:attrNameLst>
+                                      </p:cBhvr>
+                                      <p:to>
+                                        <p:strVal val="visible"/>
+                                      </p:to>
+                                    </p:set>
+                                    <p:animEffect transition="in" filter="fade">
+                                      <p:cBhvr>
+                                        <p:cTn id="29" dur="500"/>
+                                        <p:tgtEl>
+                                          <p:spTgt spid="21"/>
+                                        </p:tgtEl>
+                                      </p:cBhvr>
+                                    </p:animEffect>
+                                  </p:childTnLst>
+                                </p:cTn>
+                              </p:par>
+                            </p:childTnLst>
+                          </p:cTn>
+                        </p:par>
+                      </p:childTnLst>
+                    </p:cTn>
+                  </p:par>
+                  <p:par>
+                    <p:cTn id="30" fill="hold">
+                      <p:stCondLst>
+                        <p:cond delay="indefinite"/>
+                      </p:stCondLst>
+                      <p:childTnLst>
+                        <p:par>
+                          <p:cTn id="31" fill="hold">
+                            <p:stCondLst>
+                              <p:cond delay="0"/>
+                            </p:stCondLst>
+                            <p:childTnLst>
+                              <p:par>
+                                <p:cTn id="32" presetID="10" presetClass="entr" presetSubtype="0" fill="hold" grpId="0" nodeType="clickEffect">
+                                  <p:stCondLst>
+                                    <p:cond delay="0"/>
+                                  </p:stCondLst>
+                                  <p:childTnLst>
+                                    <p:set>
+                                      <p:cBhvr>
+                                        <p:cTn id="33" dur="1" fill="hold">
+                                          <p:stCondLst>
+                                            <p:cond delay="0"/>
+                                          </p:stCondLst>
+                                        </p:cTn>
+                                        <p:tgtEl>
+                                          <p:spTgt spid="22"/>
+                                        </p:tgtEl>
+                                        <p:attrNameLst>
+                                          <p:attrName>style.visibility</p:attrName>
+                                        </p:attrNameLst>
+                                      </p:cBhvr>
+                                      <p:to>
+                                        <p:strVal val="visible"/>
+                                      </p:to>
+                                    </p:set>
+                                    <p:animEffect transition="in" filter="fade">
+                                      <p:cBhvr>
+                                        <p:cTn id="34" dur="500"/>
+                                        <p:tgtEl>
+                                          <p:spTgt spid="22"/>
+                                        </p:tgtEl>
+                                      </p:cBhvr>
+                                    </p:animEffect>
+                                  </p:childTnLst>
+                                </p:cTn>
+                              </p:par>
+                            </p:childTnLst>
+                          </p:cTn>
+                        </p:par>
+                      </p:childTnLst>
+                    </p:cTn>
+                  </p:par>
+                </p:childTnLst>
+              </p:cTn>
+              <p:prevCondLst>
+                <p:cond evt="onPrev" delay="0">
+                  <p:tgtEl>
+                    <p:sldTgt/>
+                  </p:tgtEl>
+                </p:cond>
+              </p:prevCondLst>
+              <p:nextCondLst>
+                <p:cond evt="onNext" delay="0">
+                  <p:tgtEl>
+                    <p:sldTgt/>
+                  </p:tgtEl>
+                </p:cond>
+              </p:nextCondLst>
+            </p:seq>
+          </p:childTnLst>
+        </p:cTn>
+      </p:par>
+    </p:tnLst>
+  </p:timing>
 </p:sld>
 </file>
 
